--- a/docs/prezentacija/Prezentacija-odbrana.pptx
+++ b/docs/prezentacija/Prezentacija-odbrana.pptx
@@ -4,17 +4,20 @@
   <p:sldMasterIdLst>
     <p:sldMasterId id="2147483660" r:id="rId1"/>
   </p:sldMasterIdLst>
+  <p:notesMasterIdLst>
+    <p:notesMasterId r:id="rId12"/>
+  </p:notesMasterIdLst>
   <p:sldIdLst>
     <p:sldId id="256" r:id="rId2"/>
-    <p:sldId id="259" r:id="rId8"/>
-    <p:sldId id="260" r:id="rId9"/>
-    <p:sldId id="261" r:id="rId10"/>
-    <p:sldId id="262" r:id="rId11"/>
+    <p:sldId id="259" r:id="rId3"/>
+    <p:sldId id="260" r:id="rId4"/>
+    <p:sldId id="261" r:id="rId5"/>
+    <p:sldId id="262" r:id="rId6"/>
     <p:sldId id="263" r:id="rId7"/>
-    <p:sldId id="264" r:id="rId6"/>
-    <p:sldId id="265" r:id="rId5"/>
-    <p:sldId id="266" r:id="rId4"/>
-    <p:sldId id="258" r:id="rId12"/>
+    <p:sldId id="264" r:id="rId8"/>
+    <p:sldId id="265" r:id="rId9"/>
+    <p:sldId id="266" r:id="rId10"/>
+    <p:sldId id="258" r:id="rId11"/>
   </p:sldIdLst>
   <p:sldSz cx="12192000" cy="6858000"/>
   <p:notesSz cx="6858000" cy="9144000"/>
@@ -121,8 +124,121 @@
 </p:presentation>
 </file>
 
+<file path=ppt/changesInfos/changesInfo1.xml><?xml version="1.0" encoding="utf-8"?>
+<pc:chgInfo xmlns:a="http://schemas.openxmlformats.org/drawingml/2006/main" xmlns:r="http://schemas.openxmlformats.org/officeDocument/2006/relationships" xmlns:ac="http://schemas.microsoft.com/office/drawing/2013/main/command" xmlns:pc="http://schemas.microsoft.com/office/powerpoint/2013/main/command">
+  <pc:docChgLst>
+    <pc:chgData name="Dunja Jankovic" userId="5a4e960c-bd51-42d1-9434-6bdfc1ce4c9a" providerId="ADAL" clId="{05A0F1E5-139C-4B9A-BACE-2909464F74E5}"/>
+    <pc:docChg chg="custSel modSld">
+      <pc:chgData name="Dunja Jankovic" userId="5a4e960c-bd51-42d1-9434-6bdfc1ce4c9a" providerId="ADAL" clId="{05A0F1E5-139C-4B9A-BACE-2909464F74E5}" dt="2026-09-29T20:31:07.774" v="86" actId="20577"/>
+      <pc:docMkLst>
+        <pc:docMk/>
+      </pc:docMkLst>
+      <pc:sldChg chg="modSp mod">
+        <pc:chgData name="Dunja Jankovic" userId="5a4e960c-bd51-42d1-9434-6bdfc1ce4c9a" providerId="ADAL" clId="{05A0F1E5-139C-4B9A-BACE-2909464F74E5}" dt="2026-09-29T20:26:27.552" v="32" actId="2710"/>
+        <pc:sldMkLst>
+          <pc:docMk/>
+          <pc:sldMk cId="2335735363" sldId="256"/>
+        </pc:sldMkLst>
+        <pc:spChg chg="mod">
+          <ac:chgData name="Dunja Jankovic" userId="5a4e960c-bd51-42d1-9434-6bdfc1ce4c9a" providerId="ADAL" clId="{05A0F1E5-139C-4B9A-BACE-2909464F74E5}" dt="2026-09-29T20:26:27.552" v="32" actId="2710"/>
+          <ac:spMkLst>
+            <pc:docMk/>
+            <pc:sldMk cId="2335735363" sldId="256"/>
+            <ac:spMk id="3" creationId="{0E4463BD-DE32-40C4-AC89-312D43D7DC60}"/>
+          </ac:spMkLst>
+        </pc:spChg>
+      </pc:sldChg>
+      <pc:sldChg chg="modSp mod">
+        <pc:chgData name="Dunja Jankovic" userId="5a4e960c-bd51-42d1-9434-6bdfc1ce4c9a" providerId="ADAL" clId="{05A0F1E5-139C-4B9A-BACE-2909464F74E5}" dt="2026-09-29T20:27:21.912" v="36" actId="20577"/>
+        <pc:sldMkLst>
+          <pc:docMk/>
+          <pc:sldMk cId="0" sldId="259"/>
+        </pc:sldMkLst>
+        <pc:spChg chg="mod">
+          <ac:chgData name="Dunja Jankovic" userId="5a4e960c-bd51-42d1-9434-6bdfc1ce4c9a" providerId="ADAL" clId="{05A0F1E5-139C-4B9A-BACE-2909464F74E5}" dt="2026-09-29T20:27:21.912" v="36" actId="20577"/>
+          <ac:spMkLst>
+            <pc:docMk/>
+            <pc:sldMk cId="0" sldId="259"/>
+            <ac:spMk id="15" creationId="{00000000-0000-0000-0000-000000000000}"/>
+          </ac:spMkLst>
+        </pc:spChg>
+      </pc:sldChg>
+      <pc:sldChg chg="delSp modSp mod">
+        <pc:chgData name="Dunja Jankovic" userId="5a4e960c-bd51-42d1-9434-6bdfc1ce4c9a" providerId="ADAL" clId="{05A0F1E5-139C-4B9A-BACE-2909464F74E5}" dt="2026-09-29T20:29:14.518" v="44" actId="21"/>
+        <pc:sldMkLst>
+          <pc:docMk/>
+          <pc:sldMk cId="0" sldId="262"/>
+        </pc:sldMkLst>
+        <pc:spChg chg="del mod">
+          <ac:chgData name="Dunja Jankovic" userId="5a4e960c-bd51-42d1-9434-6bdfc1ce4c9a" providerId="ADAL" clId="{05A0F1E5-139C-4B9A-BACE-2909464F74E5}" dt="2026-09-29T20:29:14.518" v="44" actId="21"/>
+          <ac:spMkLst>
+            <pc:docMk/>
+            <pc:sldMk cId="0" sldId="262"/>
+            <ac:spMk id="11" creationId="{00000000-0000-0000-0000-000000000000}"/>
+          </ac:spMkLst>
+        </pc:spChg>
+      </pc:sldChg>
+      <pc:sldChg chg="delSp modSp mod">
+        <pc:chgData name="Dunja Jankovic" userId="5a4e960c-bd51-42d1-9434-6bdfc1ce4c9a" providerId="ADAL" clId="{05A0F1E5-139C-4B9A-BACE-2909464F74E5}" dt="2026-09-29T20:30:37.299" v="49" actId="21"/>
+        <pc:sldMkLst>
+          <pc:docMk/>
+          <pc:sldMk cId="0" sldId="264"/>
+        </pc:sldMkLst>
+        <pc:spChg chg="mod">
+          <ac:chgData name="Dunja Jankovic" userId="5a4e960c-bd51-42d1-9434-6bdfc1ce4c9a" providerId="ADAL" clId="{05A0F1E5-139C-4B9A-BACE-2909464F74E5}" dt="2026-09-29T20:30:25.656" v="48" actId="1076"/>
+          <ac:spMkLst>
+            <pc:docMk/>
+            <pc:sldMk cId="0" sldId="264"/>
+            <ac:spMk id="5" creationId="{00000000-0000-0000-0000-000000000000}"/>
+          </ac:spMkLst>
+        </pc:spChg>
+        <pc:spChg chg="mod">
+          <ac:chgData name="Dunja Jankovic" userId="5a4e960c-bd51-42d1-9434-6bdfc1ce4c9a" providerId="ADAL" clId="{05A0F1E5-139C-4B9A-BACE-2909464F74E5}" dt="2026-09-29T20:30:21.690" v="47" actId="1076"/>
+          <ac:spMkLst>
+            <pc:docMk/>
+            <pc:sldMk cId="0" sldId="264"/>
+            <ac:spMk id="6" creationId="{00000000-0000-0000-0000-000000000000}"/>
+          </ac:spMkLst>
+        </pc:spChg>
+        <pc:spChg chg="mod">
+          <ac:chgData name="Dunja Jankovic" userId="5a4e960c-bd51-42d1-9434-6bdfc1ce4c9a" providerId="ADAL" clId="{05A0F1E5-139C-4B9A-BACE-2909464F74E5}" dt="2026-09-29T20:30:16.103" v="46" actId="1076"/>
+          <ac:spMkLst>
+            <pc:docMk/>
+            <pc:sldMk cId="0" sldId="264"/>
+            <ac:spMk id="7" creationId="{00000000-0000-0000-0000-000000000000}"/>
+          </ac:spMkLst>
+        </pc:spChg>
+        <pc:spChg chg="del mod">
+          <ac:chgData name="Dunja Jankovic" userId="5a4e960c-bd51-42d1-9434-6bdfc1ce4c9a" providerId="ADAL" clId="{05A0F1E5-139C-4B9A-BACE-2909464F74E5}" dt="2026-09-29T20:30:37.299" v="49" actId="21"/>
+          <ac:spMkLst>
+            <pc:docMk/>
+            <pc:sldMk cId="0" sldId="264"/>
+            <ac:spMk id="8" creationId="{00000000-0000-0000-0000-000000000000}"/>
+          </ac:spMkLst>
+        </pc:spChg>
+      </pc:sldChg>
+      <pc:sldChg chg="modSp mod">
+        <pc:chgData name="Dunja Jankovic" userId="5a4e960c-bd51-42d1-9434-6bdfc1ce4c9a" providerId="ADAL" clId="{05A0F1E5-139C-4B9A-BACE-2909464F74E5}" dt="2026-09-29T20:31:07.774" v="86" actId="20577"/>
+        <pc:sldMkLst>
+          <pc:docMk/>
+          <pc:sldMk cId="0" sldId="265"/>
+        </pc:sldMkLst>
+        <pc:spChg chg="mod">
+          <ac:chgData name="Dunja Jankovic" userId="5a4e960c-bd51-42d1-9434-6bdfc1ce4c9a" providerId="ADAL" clId="{05A0F1E5-139C-4B9A-BACE-2909464F74E5}" dt="2026-09-29T20:31:07.774" v="86" actId="20577"/>
+          <ac:spMkLst>
+            <pc:docMk/>
+            <pc:sldMk cId="0" sldId="265"/>
+            <ac:spMk id="2" creationId="{00000000-0000-0000-0000-000000000000}"/>
+          </ac:spMkLst>
+        </pc:spChg>
+      </pc:sldChg>
+    </pc:docChg>
+  </pc:docChgLst>
+</pc:chgInfo>
+</file>
+
 <file path=ppt/notesMasters/notesMaster1.xml><?xml version="1.0" encoding="utf-8"?>
-<p:notesMaster xmlns:a="http://schemas.openxmlformats.org/drawingml/2006/main" xmlns:p="http://schemas.openxmlformats.org/presentationml/2006/main" xmlns:r="http://schemas.openxmlformats.org/officeDocument/2006/relationships">
+<p:notesMaster xmlns:a="http://schemas.openxmlformats.org/drawingml/2006/main" xmlns:r="http://schemas.openxmlformats.org/officeDocument/2006/relationships" xmlns:p="http://schemas.openxmlformats.org/presentationml/2006/main">
   <p:cSld>
     <p:bg>
       <p:bgRef idx="1001">
@@ -143,241 +259,16 @@
           <a:chExt cx="0" cy="0"/>
         </a:xfrm>
       </p:grpSpPr>
-      <p:sp>
-        <p:nvSpPr>
-          <p:cNvPr id="2" name="Header Placeholder 1"/>
-          <p:cNvSpPr>
-            <a:spLocks noGrp="1"/>
-          </p:cNvSpPr>
-          <p:nvPr>
-            <p:ph type="hdr" sz="quarter"/>
-          </p:nvPr>
-        </p:nvSpPr>
-        <p:spPr>
-          <a:xfrm>
-            <a:off x="0" y="0"/>
-            <a:ext cx="2971800" cy="457200"/>
-          </a:xfrm>
-          <a:prstGeom prst="rect">
-            <a:avLst/>
-          </a:prstGeom>
-        </p:spPr>
-        <p:txBody>
-          <a:bodyPr vert="horz" lIns="91440" tIns="45720" rIns="91440" bIns="45720" rtlCol="0"/>
-          <a:lstStyle>
-            <a:lvl1pPr algn="l">
-              <a:defRPr sz="1200"/>
-            </a:lvl1pPr>
-          </a:lstStyle>
-          <a:p>
-            <a:endParaRPr lang="en-US"/>
-          </a:p>
-        </p:txBody>
-      </p:sp>
-      <p:sp>
-        <p:nvSpPr>
-          <p:cNvPr id="3" name="Date Placeholder 2"/>
-          <p:cNvSpPr>
-            <a:spLocks noGrp="1"/>
-          </p:cNvSpPr>
-          <p:nvPr>
-            <p:ph type="dt" idx="1"/>
-          </p:nvPr>
-        </p:nvSpPr>
-        <p:spPr>
-          <a:xfrm>
-            <a:off x="3884613" y="0"/>
-            <a:ext cx="2971800" cy="457200"/>
-          </a:xfrm>
-          <a:prstGeom prst="rect">
-            <a:avLst/>
-          </a:prstGeom>
-        </p:spPr>
-        <p:txBody>
-          <a:bodyPr vert="horz" lIns="91440" tIns="45720" rIns="91440" bIns="45720" rtlCol="0"/>
-          <a:lstStyle>
-            <a:lvl1pPr algn="r">
-              <a:defRPr sz="1200"/>
-            </a:lvl1pPr>
-          </a:lstStyle>
-          <a:p>
-            <a:fld id="{0F89C1C7-3DCD-1040-A9CF-14679D8B5DDD}" type="datetimeFigureOut">
-              <a:rPr lang="en-US" smtClean="0"/>
-              <a:t>10/17/16</a:t>
-            </a:fld>
-            <a:endParaRPr lang="en-US"/>
-          </a:p>
-        </p:txBody>
-      </p:sp>
-      <p:sp>
-        <p:nvSpPr>
-          <p:cNvPr id="4" name="Slide Image Placeholder 3"/>
-          <p:cNvSpPr>
-            <a:spLocks noGrp="1" noRot="1" noChangeAspect="1"/>
-          </p:cNvSpPr>
-          <p:nvPr>
-            <p:ph type="sldImg" idx="2"/>
-          </p:nvPr>
-        </p:nvSpPr>
-        <p:spPr>
-          <a:xfrm>
-            <a:off x="1143000" y="685800"/>
-            <a:ext cx="4572000" cy="3429000"/>
-          </a:xfrm>
-          <a:prstGeom prst="rect">
-            <a:avLst/>
-          </a:prstGeom>
-          <a:noFill/>
-          <a:ln w="12700">
-            <a:solidFill>
-              <a:prstClr val="black"/>
-            </a:solidFill>
-          </a:ln>
-        </p:spPr>
-        <p:txBody>
-          <a:bodyPr vert="horz" lIns="91440" tIns="45720" rIns="91440" bIns="45720" rtlCol="0" anchor="ctr"/>
-          <a:lstStyle/>
-          <a:p>
-            <a:endParaRPr lang="en-US"/>
-          </a:p>
-        </p:txBody>
-      </p:sp>
-      <p:sp>
-        <p:nvSpPr>
-          <p:cNvPr id="5" name="Notes Placeholder 4"/>
-          <p:cNvSpPr>
-            <a:spLocks noGrp="1"/>
-          </p:cNvSpPr>
-          <p:nvPr>
-            <p:ph type="body" sz="quarter" idx="3"/>
-          </p:nvPr>
-        </p:nvSpPr>
-        <p:spPr>
-          <a:xfrm>
-            <a:off x="685800" y="4343400"/>
-            <a:ext cx="5486400" cy="4114800"/>
-          </a:xfrm>
-          <a:prstGeom prst="rect">
-            <a:avLst/>
-          </a:prstGeom>
-        </p:spPr>
-        <p:txBody>
-          <a:bodyPr vert="horz" lIns="91440" tIns="45720" rIns="91440" bIns="45720" rtlCol="0"/>
-          <a:lstStyle/>
-          <a:p>
-            <a:pPr lvl="0"/>
-            <a:r>
-              <a:rPr lang="en-US" smtClean="0"/>
-              <a:t>Click to edit Master text styles</a:t>
-            </a:r>
-          </a:p>
-          <a:p>
-            <a:pPr lvl="1"/>
-            <a:r>
-              <a:rPr lang="en-US" smtClean="0"/>
-              <a:t>Second level</a:t>
-            </a:r>
-          </a:p>
-          <a:p>
-            <a:pPr lvl="2"/>
-            <a:r>
-              <a:rPr lang="en-US" smtClean="0"/>
-              <a:t>Third level</a:t>
-            </a:r>
-          </a:p>
-          <a:p>
-            <a:pPr lvl="3"/>
-            <a:r>
-              <a:rPr lang="en-US" smtClean="0"/>
-              <a:t>Fourth level</a:t>
-            </a:r>
-          </a:p>
-          <a:p>
-            <a:pPr lvl="4"/>
-            <a:r>
-              <a:rPr lang="en-US" smtClean="0"/>
-              <a:t>Fifth level</a:t>
-            </a:r>
-            <a:endParaRPr lang="en-US"/>
-          </a:p>
-        </p:txBody>
-      </p:sp>
-      <p:sp>
-        <p:nvSpPr>
-          <p:cNvPr id="6" name="Footer Placeholder 5"/>
-          <p:cNvSpPr>
-            <a:spLocks noGrp="1"/>
-          </p:cNvSpPr>
-          <p:nvPr>
-            <p:ph type="ftr" sz="quarter" idx="4"/>
-          </p:nvPr>
-        </p:nvSpPr>
-        <p:spPr>
-          <a:xfrm>
-            <a:off x="0" y="8685213"/>
-            <a:ext cx="2971800" cy="457200"/>
-          </a:xfrm>
-          <a:prstGeom prst="rect">
-            <a:avLst/>
-          </a:prstGeom>
-        </p:spPr>
-        <p:txBody>
-          <a:bodyPr vert="horz" lIns="91440" tIns="45720" rIns="91440" bIns="45720" rtlCol="0" anchor="b"/>
-          <a:lstStyle>
-            <a:lvl1pPr algn="l">
-              <a:defRPr sz="1200"/>
-            </a:lvl1pPr>
-          </a:lstStyle>
-          <a:p>
-            <a:endParaRPr lang="en-US"/>
-          </a:p>
-        </p:txBody>
-      </p:sp>
-      <p:sp>
-        <p:nvSpPr>
-          <p:cNvPr id="7" name="Slide Number Placeholder 6"/>
-          <p:cNvSpPr>
-            <a:spLocks noGrp="1"/>
-          </p:cNvSpPr>
-          <p:nvPr>
-            <p:ph type="sldNum" sz="quarter" idx="5"/>
-          </p:nvPr>
-        </p:nvSpPr>
-        <p:spPr>
-          <a:xfrm>
-            <a:off x="3884613" y="8685213"/>
-            <a:ext cx="2971800" cy="457200"/>
-          </a:xfrm>
-          <a:prstGeom prst="rect">
-            <a:avLst/>
-          </a:prstGeom>
-        </p:spPr>
-        <p:txBody>
-          <a:bodyPr vert="horz" lIns="91440" tIns="45720" rIns="91440" bIns="45720" rtlCol="0" anchor="b"/>
-          <a:lstStyle>
-            <a:lvl1pPr algn="r">
-              <a:defRPr sz="1200"/>
-            </a:lvl1pPr>
-          </a:lstStyle>
-          <a:p>
-            <a:fld id="{BB5E49A5-4136-284D-997B-48E1D791AD67}" type="slidenum">
-              <a:rPr lang="en-US" smtClean="0"/>
-              <a:t>‹#›</a:t>
-            </a:fld>
-            <a:endParaRPr lang="en-US"/>
-          </a:p>
-        </p:txBody>
-      </p:sp>
     </p:spTree>
     <p:extLst>
       <p:ext uri="{BB962C8B-B14F-4D97-AF65-F5344CB8AC3E}">
-        <p14:creationId xmlns:p14="http://schemas.microsoft.com/office/powerpoint/2010/main" val="2623252185"/>
+        <p14:creationId xmlns:p14="http://schemas.microsoft.com/office/powerpoint/2010/main" val="388950835"/>
       </p:ext>
     </p:extLst>
   </p:cSld>
   <p:clrMap bg1="lt1" tx1="dk1" bg2="lt2" tx2="dk2" accent1="accent1" accent2="accent2" accent3="accent3" accent4="accent4" accent5="accent5" accent6="accent6" hlink="hlink" folHlink="folHlink"/>
   <p:notesStyle>
-    <a:lvl1pPr marL="0" algn="l" defTabSz="457200" rtl="0" eaLnBrk="1" latinLnBrk="0" hangingPunct="1">
+    <a:lvl1pPr marL="0" algn="l" defTabSz="914400" rtl="0" eaLnBrk="1" latinLnBrk="0" hangingPunct="1">
       <a:defRPr sz="1200" kern="1200">
         <a:solidFill>
           <a:schemeClr val="tx1"/>
@@ -387,7 +278,7 @@
         <a:cs typeface="+mn-cs"/>
       </a:defRPr>
     </a:lvl1pPr>
-    <a:lvl2pPr marL="457200" algn="l" defTabSz="457200" rtl="0" eaLnBrk="1" latinLnBrk="0" hangingPunct="1">
+    <a:lvl2pPr marL="457200" algn="l" defTabSz="914400" rtl="0" eaLnBrk="1" latinLnBrk="0" hangingPunct="1">
       <a:defRPr sz="1200" kern="1200">
         <a:solidFill>
           <a:schemeClr val="tx1"/>
@@ -397,7 +288,7 @@
         <a:cs typeface="+mn-cs"/>
       </a:defRPr>
     </a:lvl2pPr>
-    <a:lvl3pPr marL="914400" algn="l" defTabSz="457200" rtl="0" eaLnBrk="1" latinLnBrk="0" hangingPunct="1">
+    <a:lvl3pPr marL="914400" algn="l" defTabSz="914400" rtl="0" eaLnBrk="1" latinLnBrk="0" hangingPunct="1">
       <a:defRPr sz="1200" kern="1200">
         <a:solidFill>
           <a:schemeClr val="tx1"/>
@@ -407,7 +298,7 @@
         <a:cs typeface="+mn-cs"/>
       </a:defRPr>
     </a:lvl3pPr>
-    <a:lvl4pPr marL="1371600" algn="l" defTabSz="457200" rtl="0" eaLnBrk="1" latinLnBrk="0" hangingPunct="1">
+    <a:lvl4pPr marL="1371600" algn="l" defTabSz="914400" rtl="0" eaLnBrk="1" latinLnBrk="0" hangingPunct="1">
       <a:defRPr sz="1200" kern="1200">
         <a:solidFill>
           <a:schemeClr val="tx1"/>
@@ -417,7 +308,7 @@
         <a:cs typeface="+mn-cs"/>
       </a:defRPr>
     </a:lvl4pPr>
-    <a:lvl5pPr marL="1828800" algn="l" defTabSz="457200" rtl="0" eaLnBrk="1" latinLnBrk="0" hangingPunct="1">
+    <a:lvl5pPr marL="1828800" algn="l" defTabSz="914400" rtl="0" eaLnBrk="1" latinLnBrk="0" hangingPunct="1">
       <a:defRPr sz="1200" kern="1200">
         <a:solidFill>
           <a:schemeClr val="tx1"/>
@@ -427,7 +318,7 @@
         <a:cs typeface="+mn-cs"/>
       </a:defRPr>
     </a:lvl5pPr>
-    <a:lvl6pPr marL="2286000" algn="l" defTabSz="457200" rtl="0" eaLnBrk="1" latinLnBrk="0" hangingPunct="1">
+    <a:lvl6pPr marL="2286000" algn="l" defTabSz="914400" rtl="0" eaLnBrk="1" latinLnBrk="0" hangingPunct="1">
       <a:defRPr sz="1200" kern="1200">
         <a:solidFill>
           <a:schemeClr val="tx1"/>
@@ -437,7 +328,7 @@
         <a:cs typeface="+mn-cs"/>
       </a:defRPr>
     </a:lvl6pPr>
-    <a:lvl7pPr marL="2743200" algn="l" defTabSz="457200" rtl="0" eaLnBrk="1" latinLnBrk="0" hangingPunct="1">
+    <a:lvl7pPr marL="2743200" algn="l" defTabSz="914400" rtl="0" eaLnBrk="1" latinLnBrk="0" hangingPunct="1">
       <a:defRPr sz="1200" kern="1200">
         <a:solidFill>
           <a:schemeClr val="tx1"/>
@@ -447,7 +338,7 @@
         <a:cs typeface="+mn-cs"/>
       </a:defRPr>
     </a:lvl7pPr>
-    <a:lvl8pPr marL="3200400" algn="l" defTabSz="457200" rtl="0" eaLnBrk="1" latinLnBrk="0" hangingPunct="1">
+    <a:lvl8pPr marL="3200400" algn="l" defTabSz="914400" rtl="0" eaLnBrk="1" latinLnBrk="0" hangingPunct="1">
       <a:defRPr sz="1200" kern="1200">
         <a:solidFill>
           <a:schemeClr val="tx1"/>
@@ -457,7 +348,7 @@
         <a:cs typeface="+mn-cs"/>
       </a:defRPr>
     </a:lvl8pPr>
-    <a:lvl9pPr marL="3657600" algn="l" defTabSz="457200" rtl="0" eaLnBrk="1" latinLnBrk="0" hangingPunct="1">
+    <a:lvl9pPr marL="3657600" algn="l" defTabSz="914400" rtl="0" eaLnBrk="1" latinLnBrk="0" hangingPunct="1">
       <a:defRPr sz="1200" kern="1200">
         <a:solidFill>
           <a:schemeClr val="tx1"/>
@@ -472,7 +363,7 @@
 </file>
 
 <file path=ppt/notesSlides/notesSlide1.xml><?xml version="1.0" encoding="utf-8"?>
-<p:notes xmlns:a="http://schemas.openxmlformats.org/drawingml/2006/main" xmlns:p="http://schemas.openxmlformats.org/presentationml/2006/main" xmlns:r="http://schemas.openxmlformats.org/officeDocument/2006/relationships">
+<p:notes xmlns:a="http://schemas.openxmlformats.org/drawingml/2006/main" xmlns:r="http://schemas.openxmlformats.org/officeDocument/2006/relationships" xmlns:p="http://schemas.openxmlformats.org/presentationml/2006/main">
   <p:cSld>
     <p:spTree>
       <p:nvGrpSpPr>
@@ -492,7 +383,7 @@
         <p:nvSpPr>
           <p:cNvPr id="2" name="Slide Image Placeholder 1"/>
           <p:cNvSpPr>
-            <a:spLocks noGrp="1"/>
+            <a:spLocks noGrp="1" noRot="1" noChangeAspect="1"/>
           </p:cNvSpPr>
           <p:nvPr>
             <p:ph type="sldImg" idx="2"/>
@@ -507,7 +398,7 @@
             <a:spLocks noGrp="1"/>
           </p:cNvSpPr>
           <p:nvPr>
-            <p:ph type="body" idx="3" sz="quarter"/>
+            <p:ph type="body" sz="quarter" idx="3"/>
           </p:nvPr>
         </p:nvSpPr>
         <p:spPr/>
@@ -516,31 +407,397 @@
           <a:lstStyle/>
           <a:p>
             <a:r>
-              <a:t>SLAJD 1 — Razvoj interaktivnog asemblera i simulatora podskupa RISC-V instrukcija</a:t>
-            </a:r>
-          </a:p>
-          <a:p/>
-          <a:p>
-            <a:r>
-              <a:t>CILJNO VREME: 0:20; okvir u izlaganju: 0:00–0:20.</a:t>
-            </a:r>
-          </a:p>
-          <a:p/>
-          <a:p>
-            <a:r>
-              <a:t>PODSETNIK (ne čitati): Predstavi temu, ne čitaj sve podatke sa naslovnog slajda.</a:t>
-            </a:r>
-          </a:p>
-          <a:p/>
-          <a:p>
-            <a:r>
+              <a:rPr dirty="0"/>
+              <a:t>SLAJD 1 — </a:t>
+            </a:r>
+            <a:r>
+              <a:rPr dirty="0" err="1"/>
+              <a:t>Razvoj</a:t>
+            </a:r>
+            <a:r>
+              <a:rPr dirty="0"/>
+              <a:t> </a:t>
+            </a:r>
+            <a:r>
+              <a:rPr dirty="0" err="1"/>
+              <a:t>interaktivnog</a:t>
+            </a:r>
+            <a:r>
+              <a:rPr dirty="0"/>
+              <a:t> </a:t>
+            </a:r>
+            <a:r>
+              <a:rPr dirty="0" err="1"/>
+              <a:t>asemblera</a:t>
+            </a:r>
+            <a:r>
+              <a:rPr dirty="0"/>
+              <a:t> </a:t>
+            </a:r>
+            <a:r>
+              <a:rPr dirty="0" err="1"/>
+              <a:t>i</a:t>
+            </a:r>
+            <a:r>
+              <a:rPr dirty="0"/>
+              <a:t> </a:t>
+            </a:r>
+            <a:r>
+              <a:rPr dirty="0" err="1"/>
+              <a:t>simulatora</a:t>
+            </a:r>
+            <a:r>
+              <a:rPr dirty="0"/>
+              <a:t> </a:t>
+            </a:r>
+            <a:r>
+              <a:rPr dirty="0" err="1"/>
+              <a:t>podskupa</a:t>
+            </a:r>
+            <a:r>
+              <a:rPr dirty="0"/>
+              <a:t> RISC-V </a:t>
+            </a:r>
+            <a:r>
+              <a:rPr dirty="0" err="1"/>
+              <a:t>instrukcija</a:t>
+            </a:r>
+            <a:endParaRPr dirty="0"/>
+          </a:p>
+          <a:p>
+            <a:endParaRPr dirty="0"/>
+          </a:p>
+          <a:p>
+            <a:r>
+              <a:rPr dirty="0"/>
+              <a:t>CILJNO VREME: 0:20; </a:t>
+            </a:r>
+            <a:r>
+              <a:rPr dirty="0" err="1"/>
+              <a:t>okvir</a:t>
+            </a:r>
+            <a:r>
+              <a:rPr dirty="0"/>
+              <a:t> u </a:t>
+            </a:r>
+            <a:r>
+              <a:rPr dirty="0" err="1"/>
+              <a:t>izlaganju</a:t>
+            </a:r>
+            <a:r>
+              <a:rPr dirty="0"/>
+              <a:t>: 0:00–0:20.</a:t>
+            </a:r>
+          </a:p>
+          <a:p>
+            <a:endParaRPr dirty="0"/>
+          </a:p>
+          <a:p>
+            <a:r>
+              <a:rPr dirty="0"/>
+              <a:t>PODSETNIK (ne </a:t>
+            </a:r>
+            <a:r>
+              <a:rPr dirty="0" err="1"/>
+              <a:t>čitati</a:t>
+            </a:r>
+            <a:r>
+              <a:rPr dirty="0"/>
+              <a:t>): </a:t>
+            </a:r>
+            <a:r>
+              <a:rPr dirty="0" err="1"/>
+              <a:t>Predstavi</a:t>
+            </a:r>
+            <a:r>
+              <a:rPr dirty="0"/>
+              <a:t> </a:t>
+            </a:r>
+            <a:r>
+              <a:rPr dirty="0" err="1"/>
+              <a:t>temu</a:t>
+            </a:r>
+            <a:r>
+              <a:rPr dirty="0"/>
+              <a:t>, ne </a:t>
+            </a:r>
+            <a:r>
+              <a:rPr dirty="0" err="1"/>
+              <a:t>čitaj</a:t>
+            </a:r>
+            <a:r>
+              <a:rPr dirty="0"/>
+              <a:t> </a:t>
+            </a:r>
+            <a:r>
+              <a:rPr dirty="0" err="1"/>
+              <a:t>sve</a:t>
+            </a:r>
+            <a:r>
+              <a:rPr dirty="0"/>
+              <a:t> </a:t>
+            </a:r>
+            <a:r>
+              <a:rPr dirty="0" err="1"/>
+              <a:t>podatke</a:t>
+            </a:r>
+            <a:r>
+              <a:rPr dirty="0"/>
+              <a:t> </a:t>
+            </a:r>
+            <a:r>
+              <a:rPr dirty="0" err="1"/>
+              <a:t>sa</a:t>
+            </a:r>
+            <a:r>
+              <a:rPr dirty="0"/>
+              <a:t> </a:t>
+            </a:r>
+            <a:r>
+              <a:rPr dirty="0" err="1"/>
+              <a:t>naslovnog</a:t>
+            </a:r>
+            <a:r>
+              <a:rPr dirty="0"/>
+              <a:t> </a:t>
+            </a:r>
+            <a:r>
+              <a:rPr dirty="0" err="1"/>
+              <a:t>slajda</a:t>
+            </a:r>
+            <a:r>
+              <a:rPr dirty="0"/>
+              <a:t>.</a:t>
+            </a:r>
+          </a:p>
+          <a:p>
+            <a:endParaRPr dirty="0"/>
+          </a:p>
+          <a:p>
+            <a:r>
+              <a:rPr dirty="0"/>
               <a:t>GOVOR:</a:t>
             </a:r>
           </a:p>
-          <a:p/>
-          <a:p>
-            <a:r>
-              <a:t>Dobar dan svima. Ja sam Dunja Janković i predstaviću aplikaciju koju sam razvila u okviru diplomskog rada. Ona omogućava pisanje i praćenje izvršavanja jednostavnih RISC-V programa. Pre prikaza aplikacije, ukratko ću objasniti šta znači sam naslov rada.</a:t>
+          <a:p>
+            <a:endParaRPr dirty="0"/>
+          </a:p>
+          <a:p>
+            <a:r>
+              <a:rPr dirty="0" err="1"/>
+              <a:t>Dobar</a:t>
+            </a:r>
+            <a:r>
+              <a:rPr dirty="0"/>
+              <a:t> dan </a:t>
+            </a:r>
+            <a:r>
+              <a:rPr dirty="0" err="1"/>
+              <a:t>svima</a:t>
+            </a:r>
+            <a:r>
+              <a:rPr dirty="0"/>
+              <a:t>. Ja </a:t>
+            </a:r>
+            <a:r>
+              <a:rPr dirty="0" err="1"/>
+              <a:t>sam</a:t>
+            </a:r>
+            <a:r>
+              <a:rPr dirty="0"/>
+              <a:t> Dunja Janković </a:t>
+            </a:r>
+            <a:r>
+              <a:rPr dirty="0" err="1"/>
+              <a:t>i</a:t>
+            </a:r>
+            <a:r>
+              <a:rPr dirty="0"/>
+              <a:t> </a:t>
+            </a:r>
+            <a:r>
+              <a:rPr dirty="0" err="1"/>
+              <a:t>predstaviću</a:t>
+            </a:r>
+            <a:r>
+              <a:rPr dirty="0"/>
+              <a:t> </a:t>
+            </a:r>
+            <a:r>
+              <a:rPr dirty="0" err="1"/>
+              <a:t>aplikaciju</a:t>
+            </a:r>
+            <a:r>
+              <a:rPr dirty="0"/>
+              <a:t> </a:t>
+            </a:r>
+            <a:r>
+              <a:rPr dirty="0" err="1"/>
+              <a:t>koju</a:t>
+            </a:r>
+            <a:r>
+              <a:rPr dirty="0"/>
+              <a:t> </a:t>
+            </a:r>
+            <a:r>
+              <a:rPr dirty="0" err="1"/>
+              <a:t>sam</a:t>
+            </a:r>
+            <a:r>
+              <a:rPr dirty="0"/>
+              <a:t> </a:t>
+            </a:r>
+            <a:r>
+              <a:rPr dirty="0" err="1"/>
+              <a:t>razvila</a:t>
+            </a:r>
+            <a:r>
+              <a:rPr dirty="0"/>
+              <a:t> u </a:t>
+            </a:r>
+            <a:r>
+              <a:rPr dirty="0" err="1"/>
+              <a:t>okviru</a:t>
+            </a:r>
+            <a:r>
+              <a:rPr dirty="0"/>
+              <a:t> </a:t>
+            </a:r>
+            <a:r>
+              <a:rPr dirty="0" err="1"/>
+              <a:t>diplomskog</a:t>
+            </a:r>
+            <a:r>
+              <a:rPr dirty="0"/>
+              <a:t> rada. Ona </a:t>
+            </a:r>
+            <a:r>
+              <a:rPr dirty="0" err="1"/>
+              <a:t>omogućava</a:t>
+            </a:r>
+            <a:r>
+              <a:rPr dirty="0"/>
+              <a:t> </a:t>
+            </a:r>
+            <a:r>
+              <a:rPr dirty="0" err="1"/>
+              <a:t>pisanje</a:t>
+            </a:r>
+            <a:r>
+              <a:rPr dirty="0"/>
+              <a:t> </a:t>
+            </a:r>
+            <a:r>
+              <a:rPr dirty="0" err="1"/>
+              <a:t>i</a:t>
+            </a:r>
+            <a:r>
+              <a:rPr dirty="0"/>
+              <a:t> </a:t>
+            </a:r>
+            <a:r>
+              <a:rPr dirty="0" err="1"/>
+              <a:t>praćenje</a:t>
+            </a:r>
+            <a:r>
+              <a:rPr dirty="0"/>
+              <a:t> </a:t>
+            </a:r>
+            <a:r>
+              <a:rPr dirty="0" err="1"/>
+              <a:t>izvršavanja</a:t>
+            </a:r>
+            <a:r>
+              <a:rPr dirty="0"/>
+              <a:t> </a:t>
+            </a:r>
+            <a:r>
+              <a:rPr dirty="0" err="1"/>
+              <a:t>jednostavnih</a:t>
+            </a:r>
+            <a:r>
+              <a:rPr dirty="0"/>
+              <a:t> RISC-V </a:t>
+            </a:r>
+            <a:r>
+              <a:rPr dirty="0" err="1"/>
+              <a:t>programa</a:t>
+            </a:r>
+            <a:r>
+              <a:rPr dirty="0"/>
+              <a:t>. Pre </a:t>
+            </a:r>
+            <a:r>
+              <a:rPr dirty="0" err="1"/>
+              <a:t>prikaza</a:t>
+            </a:r>
+            <a:r>
+              <a:rPr dirty="0"/>
+              <a:t> </a:t>
+            </a:r>
+            <a:r>
+              <a:rPr dirty="0" err="1"/>
+              <a:t>aplikacije</a:t>
+            </a:r>
+            <a:r>
+              <a:rPr dirty="0"/>
+              <a:t>, </a:t>
+            </a:r>
+            <a:r>
+              <a:rPr dirty="0" err="1"/>
+              <a:t>ukratko</a:t>
+            </a:r>
+            <a:r>
+              <a:rPr dirty="0"/>
+              <a:t> </a:t>
+            </a:r>
+            <a:r>
+              <a:rPr dirty="0" err="1"/>
+              <a:t>ću</a:t>
+            </a:r>
+            <a:r>
+              <a:rPr dirty="0"/>
+              <a:t> </a:t>
+            </a:r>
+            <a:r>
+              <a:rPr dirty="0" err="1"/>
+              <a:t>objasniti</a:t>
+            </a:r>
+            <a:r>
+              <a:rPr dirty="0"/>
+              <a:t> </a:t>
+            </a:r>
+            <a:r>
+              <a:rPr dirty="0" err="1"/>
+              <a:t>šta</a:t>
+            </a:r>
+            <a:r>
+              <a:rPr dirty="0"/>
+              <a:t> </a:t>
+            </a:r>
+            <a:r>
+              <a:rPr dirty="0" err="1"/>
+              <a:t>znači</a:t>
+            </a:r>
+            <a:r>
+              <a:rPr dirty="0"/>
+              <a:t> </a:t>
+            </a:r>
+            <a:r>
+              <a:rPr dirty="0" err="1"/>
+              <a:t>sam</a:t>
+            </a:r>
+            <a:r>
+              <a:rPr dirty="0"/>
+              <a:t> </a:t>
+            </a:r>
+            <a:r>
+              <a:rPr dirty="0" err="1"/>
+              <a:t>naslov</a:t>
+            </a:r>
+            <a:r>
+              <a:rPr dirty="0"/>
+              <a:t> rada.</a:t>
             </a:r>
           </a:p>
         </p:txBody>
@@ -552,7 +809,7 @@
             <a:spLocks noGrp="1"/>
           </p:cNvSpPr>
           <p:nvPr>
-            <p:ph type="sldNum" idx="5" sz="quarter"/>
+            <p:ph type="sldNum" sz="quarter" idx="5"/>
           </p:nvPr>
         </p:nvSpPr>
         <p:spPr/>
@@ -566,7 +823,7 @@
 </file>
 
 <file path=ppt/notesSlides/notesSlide10.xml><?xml version="1.0" encoding="utf-8"?>
-<p:notes xmlns:a="http://schemas.openxmlformats.org/drawingml/2006/main" xmlns:p="http://schemas.openxmlformats.org/presentationml/2006/main" xmlns:r="http://schemas.openxmlformats.org/officeDocument/2006/relationships">
+<p:notes xmlns:a="http://schemas.openxmlformats.org/drawingml/2006/main" xmlns:r="http://schemas.openxmlformats.org/officeDocument/2006/relationships" xmlns:p="http://schemas.openxmlformats.org/presentationml/2006/main">
   <p:cSld>
     <p:spTree>
       <p:nvGrpSpPr>
@@ -586,7 +843,7 @@
         <p:nvSpPr>
           <p:cNvPr id="2" name="Slide Image Placeholder 1"/>
           <p:cNvSpPr>
-            <a:spLocks noGrp="1"/>
+            <a:spLocks noGrp="1" noRot="1" noChangeAspect="1"/>
           </p:cNvSpPr>
           <p:nvPr>
             <p:ph type="sldImg" idx="2"/>
@@ -601,7 +858,7 @@
             <a:spLocks noGrp="1"/>
           </p:cNvSpPr>
           <p:nvPr>
-            <p:ph type="body" idx="3" sz="quarter"/>
+            <p:ph type="body" sz="quarter" idx="3"/>
           </p:nvPr>
         </p:nvSpPr>
         <p:spPr/>
@@ -613,25 +870,33 @@
               <a:t>SLAJD 10 — Pitanja</a:t>
             </a:r>
           </a:p>
-          <a:p/>
+          <a:p>
+            <a:endParaRPr/>
+          </a:p>
           <a:p>
             <a:r>
               <a:t>CILJNO VREME: 0:15; okvir u izlaganju: 9:25–9:40.</a:t>
             </a:r>
           </a:p>
-          <a:p/>
+          <a:p>
+            <a:endParaRPr/>
+          </a:p>
           <a:p>
             <a:r>
               <a:t>PODSETNIK (ne čitati): Zastani, pogledaj publiku i sačekaj pitanja. Pitanja nisu deo planiranih deset minuta izlaganja.</a:t>
             </a:r>
           </a:p>
-          <a:p/>
+          <a:p>
+            <a:endParaRPr/>
+          </a:p>
           <a:p>
             <a:r>
               <a:t>GOVOR:</a:t>
             </a:r>
           </a:p>
-          <a:p/>
+          <a:p>
+            <a:endParaRPr/>
+          </a:p>
           <a:p>
             <a:r>
               <a:t>Time bih završila izlaganje. Hvala vam na pažnji. Spremna sam za vaša pitanja.</a:t>
@@ -646,7 +911,7 @@
             <a:spLocks noGrp="1"/>
           </p:cNvSpPr>
           <p:nvPr>
-            <p:ph type="sldNum" idx="5" sz="quarter"/>
+            <p:ph type="sldNum" sz="quarter" idx="5"/>
           </p:nvPr>
         </p:nvSpPr>
         <p:spPr/>
@@ -660,7 +925,7 @@
 </file>
 
 <file path=ppt/notesSlides/notesSlide2.xml><?xml version="1.0" encoding="utf-8"?>
-<p:notes xmlns:a="http://schemas.openxmlformats.org/drawingml/2006/main" xmlns:p="http://schemas.openxmlformats.org/presentationml/2006/main" xmlns:r="http://schemas.openxmlformats.org/officeDocument/2006/relationships">
+<p:notes xmlns:a="http://schemas.openxmlformats.org/drawingml/2006/main" xmlns:r="http://schemas.openxmlformats.org/officeDocument/2006/relationships" xmlns:p="http://schemas.openxmlformats.org/presentationml/2006/main">
   <p:cSld>
     <p:spTree>
       <p:nvGrpSpPr>
@@ -680,7 +945,7 @@
         <p:nvSpPr>
           <p:cNvPr id="2" name="Slide Image Placeholder 1"/>
           <p:cNvSpPr>
-            <a:spLocks noGrp="1"/>
+            <a:spLocks noGrp="1" noRot="1" noChangeAspect="1"/>
           </p:cNvSpPr>
           <p:nvPr>
             <p:ph type="sldImg" idx="2"/>
@@ -695,7 +960,7 @@
             <a:spLocks noGrp="1"/>
           </p:cNvSpPr>
           <p:nvPr>
-            <p:ph type="body" idx="3" sz="quarter"/>
+            <p:ph type="body" sz="quarter" idx="3"/>
           </p:nvPr>
         </p:nvSpPr>
         <p:spPr/>
@@ -707,49 +972,65 @@
               <a:t>SLAJD 2 — Šta zapravo znači naslov rada?</a:t>
             </a:r>
           </a:p>
-          <a:p/>
+          <a:p>
+            <a:endParaRPr/>
+          </a:p>
           <a:p>
             <a:r>
               <a:t>CILJNO VREME: 1:20; okvir u izlaganju: 0:20–1:40.</a:t>
             </a:r>
           </a:p>
-          <a:p/>
+          <a:p>
+            <a:endParaRPr/>
+          </a:p>
           <a:p>
             <a:r>
               <a:t>PODSETNIK (ne čitati): Prođi redom kroz pet pojmova. Napravi kratku pauzu pre završne rečenice.</a:t>
             </a:r>
           </a:p>
-          <a:p/>
+          <a:p>
+            <a:endParaRPr/>
+          </a:p>
           <a:p>
             <a:r>
               <a:t>GOVOR:</a:t>
             </a:r>
           </a:p>
-          <a:p/>
+          <a:p>
+            <a:endParaRPr/>
+          </a:p>
           <a:p>
             <a:r>
               <a:t>Naslov zvuči stručno, ali je osnovna ideja jednostavna.</a:t>
             </a:r>
           </a:p>
-          <a:p/>
+          <a:p>
+            <a:endParaRPr/>
+          </a:p>
           <a:p>
             <a:r>
               <a:t>Procesor je deo računara koji izvršava naredbe — na primer, da sabere dva broja ili sačuva rezultat. Te naredbe zovemo instrukcije. RISC-V određuje koje instrukcije postoje i šta one rade, a u ovom radu podržan je odabrani deo njih — zato u naslovu piše „podskup”.</a:t>
             </a:r>
           </a:p>
-          <a:p/>
+          <a:p>
+            <a:endParaRPr/>
+          </a:p>
           <a:p>
             <a:r>
               <a:t>Asembler priprema napisane naredbe za izvršavanje, dok simulator oponaša rad procesora u programu. Dakle, nisam pravila fizički procesor, već aplikaciju koja prikazuje izvršavanje njegovih instrukcija.</a:t>
             </a:r>
           </a:p>
-          <a:p/>
+          <a:p>
+            <a:endParaRPr/>
+          </a:p>
           <a:p>
             <a:r>
               <a:t>Interaktivno znači da korisnik može da izvršava program korak po korak i posmatra šta se menja. Jednostavno rečeno, cilj je da ne vidimo samo konačan rezultat, već i kako je program do njega došao.</a:t>
             </a:r>
           </a:p>
-          <a:p/>
+          <a:p>
+            <a:endParaRPr/>
+          </a:p>
           <a:p>
             <a:r>
               <a:t>To je, na primer, zgodno kada želimo da razumemo kako program sabira brojeve: ne gledamo samo broj na kraju, nego i kako se zbir postepeno menja.</a:t>
@@ -764,7 +1045,7 @@
             <a:spLocks noGrp="1"/>
           </p:cNvSpPr>
           <p:nvPr>
-            <p:ph type="sldNum" idx="5" sz="quarter"/>
+            <p:ph type="sldNum" sz="quarter" idx="5"/>
           </p:nvPr>
         </p:nvSpPr>
         <p:spPr/>
@@ -778,7 +1059,7 @@
 </file>
 
 <file path=ppt/notesSlides/notesSlide3.xml><?xml version="1.0" encoding="utf-8"?>
-<p:notes xmlns:a="http://schemas.openxmlformats.org/drawingml/2006/main" xmlns:p="http://schemas.openxmlformats.org/presentationml/2006/main" xmlns:r="http://schemas.openxmlformats.org/officeDocument/2006/relationships">
+<p:notes xmlns:a="http://schemas.openxmlformats.org/drawingml/2006/main" xmlns:r="http://schemas.openxmlformats.org/officeDocument/2006/relationships" xmlns:p="http://schemas.openxmlformats.org/presentationml/2006/main">
   <p:cSld>
     <p:spTree>
       <p:nvGrpSpPr>
@@ -798,7 +1079,7 @@
         <p:nvSpPr>
           <p:cNvPr id="2" name="Slide Image Placeholder 1"/>
           <p:cNvSpPr>
-            <a:spLocks noGrp="1"/>
+            <a:spLocks noGrp="1" noRot="1" noChangeAspect="1"/>
           </p:cNvSpPr>
           <p:nvPr>
             <p:ph type="sldImg" idx="2"/>
@@ -813,7 +1094,7 @@
             <a:spLocks noGrp="1"/>
           </p:cNvSpPr>
           <p:nvPr>
-            <p:ph type="body" idx="3" sz="quarter"/>
+            <p:ph type="body" sz="quarter" idx="3"/>
           </p:nvPr>
         </p:nvSpPr>
         <p:spPr/>
@@ -825,43 +1106,57 @@
               <a:t>SLAJD 3 — Postojeći alati i cilj rada</a:t>
             </a:r>
           </a:p>
-          <a:p/>
+          <a:p>
+            <a:endParaRPr/>
+          </a:p>
           <a:p>
             <a:r>
               <a:t>CILJNO VREME: 0:45; okvir u izlaganju: 1:40–2:25.</a:t>
             </a:r>
           </a:p>
-          <a:p/>
+          <a:p>
+            <a:endParaRPr/>
+          </a:p>
           <a:p>
             <a:r>
               <a:t>PODSETNIK (ne čitati): Pokaži dva primera, pa pređi na cilj sopstvenog rešenja. Ne ulazi u spiskove mogućnosti.</a:t>
             </a:r>
           </a:p>
-          <a:p/>
+          <a:p>
+            <a:endParaRPr/>
+          </a:p>
           <a:p>
             <a:r>
               <a:t>GOVOR:</a:t>
             </a:r>
           </a:p>
-          <a:p/>
+          <a:p>
+            <a:endParaRPr/>
+          </a:p>
           <a:p>
             <a:r>
               <a:t>Postoje i drugi alati koji omogućavaju ovakvo praćenje programa. U radu sam razmotrila RARS i Venus. RARS se koristi kao desktop aplikacija, dok je Venus dostupan kroz veb pregledač.</a:t>
             </a:r>
           </a:p>
-          <a:p/>
+          <a:p>
+            <a:endParaRPr/>
+          </a:p>
           <a:p>
             <a:r>
               <a:t>Izabrala sam ih zato što se i u njima mogu pisati i izvršavati mali RISC-V programi.</a:t>
             </a:r>
           </a:p>
-          <a:p/>
+          <a:p>
+            <a:endParaRPr/>
+          </a:p>
           <a:p>
             <a:r>
               <a:t>Kod njih sam posmatrala mogućnosti važne za moj zadatak: izvršavanje koracima, tačke prekida i pregled stanja. Cilj nije bio da napravim alat sa više funkcija od postojećih, već da samostalno realizujem celinu sa jasno određenim obimom. Zato sam se usredsredila na odabrane instrukcije i njihove rezultate.</a:t>
             </a:r>
           </a:p>
-          <a:p/>
+          <a:p>
+            <a:endParaRPr/>
+          </a:p>
           <a:p>
             <a:r>
               <a:t>Izvori za pripremu, ne čitati: https://github.com/TheThirdOne/rars ; https://github.com/kvakil/venus</a:t>
@@ -876,7 +1171,7 @@
             <a:spLocks noGrp="1"/>
           </p:cNvSpPr>
           <p:nvPr>
-            <p:ph type="sldNum" idx="5" sz="quarter"/>
+            <p:ph type="sldNum" sz="quarter" idx="5"/>
           </p:nvPr>
         </p:nvSpPr>
         <p:spPr/>
@@ -890,7 +1185,7 @@
 </file>
 
 <file path=ppt/notesSlides/notesSlide4.xml><?xml version="1.0" encoding="utf-8"?>
-<p:notes xmlns:a="http://schemas.openxmlformats.org/drawingml/2006/main" xmlns:p="http://schemas.openxmlformats.org/presentationml/2006/main" xmlns:r="http://schemas.openxmlformats.org/officeDocument/2006/relationships">
+<p:notes xmlns:a="http://schemas.openxmlformats.org/drawingml/2006/main" xmlns:r="http://schemas.openxmlformats.org/officeDocument/2006/relationships" xmlns:p="http://schemas.openxmlformats.org/presentationml/2006/main">
   <p:cSld>
     <p:spTree>
       <p:nvGrpSpPr>
@@ -910,7 +1205,7 @@
         <p:nvSpPr>
           <p:cNvPr id="2" name="Slide Image Placeholder 1"/>
           <p:cNvSpPr>
-            <a:spLocks noGrp="1"/>
+            <a:spLocks noGrp="1" noRot="1" noChangeAspect="1"/>
           </p:cNvSpPr>
           <p:nvPr>
             <p:ph type="sldImg" idx="2"/>
@@ -925,7 +1220,7 @@
             <a:spLocks noGrp="1"/>
           </p:cNvSpPr>
           <p:nvPr>
-            <p:ph type="body" idx="3" sz="quarter"/>
+            <p:ph type="body" sz="quarter" idx="3"/>
           </p:nvPr>
         </p:nvSpPr>
         <p:spPr/>
@@ -937,37 +1232,49 @@
               <a:t>SLAJD 4 — Korišćene tehnologije</a:t>
             </a:r>
           </a:p>
-          <a:p/>
+          <a:p>
+            <a:endParaRPr/>
+          </a:p>
           <a:p>
             <a:r>
               <a:t>CILJNO VREME: 0:40; okvir u izlaganju: 2:25–3:05.</a:t>
             </a:r>
           </a:p>
-          <a:p/>
+          <a:p>
+            <a:endParaRPr/>
+          </a:p>
           <a:p>
             <a:r>
               <a:t>PODSETNIK (ne čitati): Za svaku tehnologiju reci samo čemu služi i zašto je korisna.</a:t>
             </a:r>
           </a:p>
-          <a:p/>
+          <a:p>
+            <a:endParaRPr/>
+          </a:p>
           <a:p>
             <a:r>
               <a:t>GOVOR:</a:t>
             </a:r>
           </a:p>
-          <a:p/>
+          <a:p>
+            <a:endParaRPr/>
+          </a:p>
           <a:p>
             <a:r>
               <a:t>Logiku aplikacije napisala sam u TypeScript-u. On mi pomaže da deo programerskih grešaka primetim još tokom pisanja koda. HTML i CSS koristila sam za strukturu, raspored i izgled ekrana.</a:t>
             </a:r>
           </a:p>
-          <a:p/>
+          <a:p>
+            <a:endParaRPr/>
+          </a:p>
           <a:p>
             <a:r>
               <a:t>Vite omogućava jednostavno pokretanje aplikacije tokom razvoja i pripremu za korišćenje. Vitest sam izabrala za automatske provere rezultata. Ukratko, jedan deo alata služi izradi aplikacije, a drugi proveri da ona radi očekivano. Sama aplikacija se koristi u pregledaču.</a:t>
             </a:r>
           </a:p>
-          <a:p/>
+          <a:p>
+            <a:endParaRPr/>
+          </a:p>
           <a:p>
             <a:r>
               <a:t>Sve ove tehnologije služe izradi i proveri aplikacije; korisnik pri radu ne mora da poznaje nijednu od njih.</a:t>
@@ -982,7 +1289,7 @@
             <a:spLocks noGrp="1"/>
           </p:cNvSpPr>
           <p:nvPr>
-            <p:ph type="sldNum" idx="5" sz="quarter"/>
+            <p:ph type="sldNum" sz="quarter" idx="5"/>
           </p:nvPr>
         </p:nvSpPr>
         <p:spPr/>
@@ -996,7 +1303,7 @@
 </file>
 
 <file path=ppt/notesSlides/notesSlide5.xml><?xml version="1.0" encoding="utf-8"?>
-<p:notes xmlns:a="http://schemas.openxmlformats.org/drawingml/2006/main" xmlns:p="http://schemas.openxmlformats.org/presentationml/2006/main" xmlns:r="http://schemas.openxmlformats.org/officeDocument/2006/relationships">
+<p:notes xmlns:a="http://schemas.openxmlformats.org/drawingml/2006/main" xmlns:r="http://schemas.openxmlformats.org/officeDocument/2006/relationships" xmlns:p="http://schemas.openxmlformats.org/presentationml/2006/main">
   <p:cSld>
     <p:spTree>
       <p:nvGrpSpPr>
@@ -1016,7 +1323,7 @@
         <p:nvSpPr>
           <p:cNvPr id="2" name="Slide Image Placeholder 1"/>
           <p:cNvSpPr>
-            <a:spLocks noGrp="1"/>
+            <a:spLocks noGrp="1" noRot="1" noChangeAspect="1"/>
           </p:cNvSpPr>
           <p:nvPr>
             <p:ph type="sldImg" idx="2"/>
@@ -1031,7 +1338,7 @@
             <a:spLocks noGrp="1"/>
           </p:cNvSpPr>
           <p:nvPr>
-            <p:ph type="body" idx="3" sz="quarter"/>
+            <p:ph type="body" sz="quarter" idx="3"/>
           </p:nvPr>
         </p:nvSpPr>
         <p:spPr/>
@@ -1043,43 +1350,57 @@
               <a:t>SLAJD 5 — Šta aplikacija omogućava?</a:t>
             </a:r>
           </a:p>
-          <a:p/>
+          <a:p>
+            <a:endParaRPr/>
+          </a:p>
           <a:p>
             <a:r>
               <a:t>CILJNO VREME: 1:00; okvir u izlaganju: 3:05–4:05.</a:t>
             </a:r>
           </a:p>
-          <a:p/>
+          <a:p>
+            <a:endParaRPr/>
+          </a:p>
           <a:p>
             <a:r>
               <a:t>PODSETNIK (ne čitati): Pokaži levi panel, zatim desne panele i kontrole. Ne čitaj kod sa slike.</a:t>
             </a:r>
           </a:p>
-          <a:p/>
+          <a:p>
+            <a:endParaRPr/>
+          </a:p>
           <a:p>
             <a:r>
               <a:t>GOVOR:</a:t>
             </a:r>
           </a:p>
-          <a:p/>
+          <a:p>
+            <a:endParaRPr/>
+          </a:p>
           <a:p>
             <a:r>
               <a:t>Ovako izgleda aplikacija. Levo se piše program, a desno se prate registri i memorija. Registre možemo da posmatramo kao mesta za vrednosti sa kojima procesor trenutno radi. U memoriji se vide podaci koje je program upisao.</a:t>
             </a:r>
           </a:p>
-          <a:p/>
+          <a:p>
+            <a:endParaRPr/>
+          </a:p>
           <a:p>
             <a:r>
               <a:t>Dugme Step izvršava jednu instrukciju. Run nastavlja izvršavanje, Reset vraća početno stanje, a tačkom prekida biramo mesto zaustavljanja. Tokom izvršavanja kod se ne uređuje, kako bi prikaz odgovarao programu koji upravo pratimo.</a:t>
             </a:r>
           </a:p>
-          <a:p/>
+          <a:p>
+            <a:endParaRPr/>
+          </a:p>
           <a:p>
             <a:r>
               <a:t>Ako rezultat nije očekivan, mogu da ponovim program i proveravam vrednosti posle svakog koraka.</a:t>
             </a:r>
           </a:p>
-          <a:p/>
+          <a:p>
+            <a:endParaRPr/>
+          </a:p>
           <a:p>
             <a:r>
               <a:t>Podržano je 15 instrukcija i 5 pseudo-instrukcija. Ove druge su kraći zapisi koji se prevode u podržane instrukcije. Za korisnika je najvažnije da može da napiše program, pokrene ga i vidi promene.</a:t>
@@ -1094,7 +1415,7 @@
             <a:spLocks noGrp="1"/>
           </p:cNvSpPr>
           <p:nvPr>
-            <p:ph type="sldNum" idx="5" sz="quarter"/>
+            <p:ph type="sldNum" sz="quarter" idx="5"/>
           </p:nvPr>
         </p:nvSpPr>
         <p:spPr/>
@@ -1108,7 +1429,7 @@
 </file>
 
 <file path=ppt/notesSlides/notesSlide6.xml><?xml version="1.0" encoding="utf-8"?>
-<p:notes xmlns:a="http://schemas.openxmlformats.org/drawingml/2006/main" xmlns:p="http://schemas.openxmlformats.org/presentationml/2006/main" xmlns:r="http://schemas.openxmlformats.org/officeDocument/2006/relationships">
+<p:notes xmlns:a="http://schemas.openxmlformats.org/drawingml/2006/main" xmlns:r="http://schemas.openxmlformats.org/officeDocument/2006/relationships" xmlns:p="http://schemas.openxmlformats.org/presentationml/2006/main">
   <p:cSld>
     <p:spTree>
       <p:nvGrpSpPr>
@@ -1128,7 +1449,7 @@
         <p:nvSpPr>
           <p:cNvPr id="2" name="Slide Image Placeholder 1"/>
           <p:cNvSpPr>
-            <a:spLocks noGrp="1"/>
+            <a:spLocks noGrp="1" noRot="1" noChangeAspect="1"/>
           </p:cNvSpPr>
           <p:nvPr>
             <p:ph type="sldImg" idx="2"/>
@@ -1143,7 +1464,7 @@
             <a:spLocks noGrp="1"/>
           </p:cNvSpPr>
           <p:nvPr>
-            <p:ph type="body" idx="3" sz="quarter"/>
+            <p:ph type="body" sz="quarter" idx="3"/>
           </p:nvPr>
         </p:nvSpPr>
         <p:spPr/>
@@ -1155,43 +1476,57 @@
               <a:t>SLAJD 6 — Kako su delovi povezani?</a:t>
             </a:r>
           </a:p>
-          <a:p/>
+          <a:p>
+            <a:endParaRPr/>
+          </a:p>
           <a:p>
             <a:r>
               <a:t>CILJNO VREME: 1:00; okvir u izlaganju: 4:05–5:05.</a:t>
             </a:r>
           </a:p>
-          <a:p/>
+          <a:p>
+            <a:endParaRPr/>
+          </a:p>
           <a:p>
             <a:r>
               <a:t>PODSETNIK (ne čitati): Prati dijagram sleva nadesno. Objasni uloge, ne nazive funkcija ili datoteka.</a:t>
             </a:r>
           </a:p>
-          <a:p/>
+          <a:p>
+            <a:endParaRPr/>
+          </a:p>
           <a:p>
             <a:r>
               <a:t>GOVOR:</a:t>
             </a:r>
           </a:p>
-          <a:p/>
+          <a:p>
+            <a:endParaRPr/>
+          </a:p>
           <a:p>
             <a:r>
               <a:t>Iza ovog ekrana nalaze se odvojeni delovi aplikacije. Korisnik prvo unese tekst programa. Parser pročita njegovu strukturu, a asembler proveri instrukcije i pripremi ih za izvršavanje.</a:t>
             </a:r>
           </a:p>
-          <a:p/>
+          <a:p>
+            <a:endParaRPr/>
+          </a:p>
           <a:p>
             <a:r>
               <a:t>Možemo ih zamisliti kao nekoliko stanica kroz koje program prolazi, pri čemu svaka ima svoj zadatak.</a:t>
             </a:r>
           </a:p>
-          <a:p/>
+          <a:p>
+            <a:endParaRPr/>
+          </a:p>
           <a:p>
             <a:r>
               <a:t>Pripremljeni program zatim dobija simulator. On izvršava instrukcije i menja registre, memoriju i mesto sa kog se program nastavlja. Korisnički interfejs prikazuje dobijeno stanje. Ako se pojavi greška, korisnik dobija poruku umesto neispravnog rezultata.</a:t>
             </a:r>
           </a:p>
-          <a:p/>
+          <a:p>
+            <a:endParaRPr/>
+          </a:p>
           <a:p>
             <a:r>
               <a:t>Važna odluka bila je da logika i prikaz ostanu odvojeni. Tako sam mogla da proveravam izvršavanje bez pokretanja celog interfejsa i da menjam izgled bez menjanja pravila instrukcija. Sada ću taj tok pokazati na kratkom primeru.</a:t>
@@ -1206,7 +1541,7 @@
             <a:spLocks noGrp="1"/>
           </p:cNvSpPr>
           <p:nvPr>
-            <p:ph type="sldNum" idx="5" sz="quarter"/>
+            <p:ph type="sldNum" sz="quarter" idx="5"/>
           </p:nvPr>
         </p:nvSpPr>
         <p:spPr/>
@@ -1220,7 +1555,7 @@
 </file>
 
 <file path=ppt/notesSlides/notesSlide7.xml><?xml version="1.0" encoding="utf-8"?>
-<p:notes xmlns:a="http://schemas.openxmlformats.org/drawingml/2006/main" xmlns:p="http://schemas.openxmlformats.org/presentationml/2006/main" xmlns:r="http://schemas.openxmlformats.org/officeDocument/2006/relationships">
+<p:notes xmlns:a="http://schemas.openxmlformats.org/drawingml/2006/main" xmlns:r="http://schemas.openxmlformats.org/officeDocument/2006/relationships" xmlns:p="http://schemas.openxmlformats.org/presentationml/2006/main">
   <p:cSld>
     <p:spTree>
       <p:nvGrpSpPr>
@@ -1240,7 +1575,7 @@
         <p:nvSpPr>
           <p:cNvPr id="2" name="Slide Image Placeholder 1"/>
           <p:cNvSpPr>
-            <a:spLocks noGrp="1"/>
+            <a:spLocks noGrp="1" noRot="1" noChangeAspect="1"/>
           </p:cNvSpPr>
           <p:nvPr>
             <p:ph type="sldImg" idx="2"/>
@@ -1255,7 +1590,7 @@
             <a:spLocks noGrp="1"/>
           </p:cNvSpPr>
           <p:nvPr>
-            <p:ph type="body" idx="3" sz="quarter"/>
+            <p:ph type="body" sz="quarter" idx="3"/>
           </p:nvPr>
         </p:nvSpPr>
         <p:spPr/>
@@ -1267,97 +1602,129 @@
               <a:t>SLAJD 7 — Primer rada aplikacije</a:t>
             </a:r>
           </a:p>
-          <a:p/>
+          <a:p>
+            <a:endParaRPr/>
+          </a:p>
           <a:p>
             <a:r>
               <a:t>CILJNO VREME: 2:00; okvir u izlaganju: 5:05–7:05.</a:t>
             </a:r>
           </a:p>
-          <a:p/>
+          <a:p>
+            <a:endParaRPr/>
+          </a:p>
           <a:p>
             <a:r>
               <a:t>PODSETNIK (ne čitati): Oko 10 sekundi uvoda, video 1:45 uz govor uživo, oko 5 sekundi za prelaz. Video još nije ugrađen; prikazana slika je rezerva.</a:t>
             </a:r>
           </a:p>
-          <a:p/>
+          <a:p>
+            <a:endParaRPr/>
+          </a:p>
           <a:p>
             <a:r>
               <a:t>GOVOR:</a:t>
             </a:r>
           </a:p>
-          <a:p/>
+          <a:p>
+            <a:endParaRPr/>
+          </a:p>
           <a:p>
             <a:r>
               <a:t>Pre videa: Na kratkom videu pokazaću unos programa, pojedinačne korake, zaustavljanje i konačan rezultat. Primer je sabiranje brojeva od 1 do 5.</a:t>
             </a:r>
           </a:p>
-          <a:p/>
+          <a:p>
+            <a:endParaRPr/>
+          </a:p>
           <a:p>
             <a:r>
               <a:t>0:00–0:10 — Za primer sam izabrala sabiranje brojeva od 1 do 5. Očekivani rezultat je 15, pa možemo lako da pratimo da li program radi ono što želimo.</a:t>
             </a:r>
           </a:p>
-          <a:p/>
+          <a:p>
+            <a:endParaRPr/>
+          </a:p>
           <a:p>
             <a:r>
               <a:t>0:10–0:18 — Najpre proveravam zapis programa i pripremam instrukcije za izvršavanje. Pojavljuje se oznaka sledeće instrukcije.</a:t>
             </a:r>
           </a:p>
-          <a:p/>
+          <a:p>
+            <a:endParaRPr/>
+          </a:p>
           <a:p>
             <a:r>
               <a:t>0:18–0:42 — Svakim pritiskom na Step izvršava se jedna instrukcija. Prvo se postavljaju početne vrednosti, a zatim se obavlja prvo sabiranje. Desno vidimo da je tekući zbir postao 1.</a:t>
             </a:r>
           </a:p>
-          <a:p/>
+          <a:p>
+            <a:endParaRPr/>
+          </a:p>
           <a:p>
             <a:r>
               <a:t>0:42–1:02 — Sada postavljam tačku prekida. Time unapred biram mesto na kome program treba da se zaustavi. Ne moram ručno da prolazim kroz svaki korak: mogu da pokrenem program i pogledam stanje kada dođe do izabranog mesta.</a:t>
             </a:r>
           </a:p>
-          <a:p/>
+          <a:p>
+            <a:endParaRPr/>
+          </a:p>
           <a:p>
             <a:r>
               <a:t>1:02–1:16 — Ponovnim pokretanjem nastavljam od mesta gde je program stao. Zbir je sada 3, a program se ponovo zaustavio na istoj tački u petlji.</a:t>
             </a:r>
           </a:p>
-          <a:p/>
+          <a:p>
+            <a:endParaRPr/>
+          </a:p>
           <a:p>
             <a:r>
               <a:t>1:16–1:31 — Uklanjam tačku prekida i dopuštam programu da završi. Dobijeni zbir je 15, a isti rezultat je upisan i u memoriju.</a:t>
             </a:r>
           </a:p>
-          <a:p/>
+          <a:p>
+            <a:endParaRPr/>
+          </a:p>
           <a:p>
             <a:r>
               <a:t>1:31–1:45 — Program mogu da vratim na početak i ponovo pokrenem. Dobijam isti rezultat, a završni prikaz ostaje dostupan za pregled.</a:t>
             </a:r>
           </a:p>
-          <a:p/>
+          <a:p>
+            <a:endParaRPr/>
+          </a:p>
           <a:p>
             <a:r>
               <a:t>Posle videa: Tako se vidi ceo put od napisanog programa do rezultata.</a:t>
             </a:r>
           </a:p>
-          <a:p/>
+          <a:p>
+            <a:endParaRPr/>
+          </a:p>
           <a:p>
             <a:r>
               <a:t>REZERVNA VERZIJA BEZ VIDEA:</a:t>
             </a:r>
           </a:p>
-          <a:p/>
+          <a:p>
+            <a:endParaRPr/>
+          </a:p>
           <a:p>
             <a:r>
               <a:t>Ako video nije dostupan: Na slici je završno stanje primera. Program sabira brojeve od 1 do 5, pa očekujemo rezultat 15. Levo se vidi program, a desno njegove završne vrednosti.</a:t>
             </a:r>
           </a:p>
-          <a:p/>
+          <a:p>
+            <a:endParaRPr/>
+          </a:p>
           <a:p>
             <a:r>
               <a:t>Tokom izvršavanja mogla sam da prolazim instrukciju po instrukciju pomoću Step-a, ili da postavim tačku prekida i prepustim programu da sam dođe do nje. Tačka u petlji omogućava da se stanje pogleda posle svakog prolaza. Kada uklonim tačku prekida, Run dovršava program.</a:t>
             </a:r>
           </a:p>
-          <a:p/>
+          <a:p>
+            <a:endParaRPr/>
+          </a:p>
           <a:p>
             <a:r>
               <a:t>Na kraju je zbir 15 u registru i memoriji. Reset omogućava ponavljanje od početka. I bez videa, ova slika prikazuje konačan rezultat, dok se način upravljanja vidi na kontrolama ispod programa.</a:t>
@@ -1372,7 +1739,7 @@
             <a:spLocks noGrp="1"/>
           </p:cNvSpPr>
           <p:nvPr>
-            <p:ph type="sldNum" idx="5" sz="quarter"/>
+            <p:ph type="sldNum" sz="quarter" idx="5"/>
           </p:nvPr>
         </p:nvSpPr>
         <p:spPr/>
@@ -1386,7 +1753,7 @@
 </file>
 
 <file path=ppt/notesSlides/notesSlide8.xml><?xml version="1.0" encoding="utf-8"?>
-<p:notes xmlns:a="http://schemas.openxmlformats.org/drawingml/2006/main" xmlns:p="http://schemas.openxmlformats.org/presentationml/2006/main" xmlns:r="http://schemas.openxmlformats.org/officeDocument/2006/relationships">
+<p:notes xmlns:a="http://schemas.openxmlformats.org/drawingml/2006/main" xmlns:r="http://schemas.openxmlformats.org/officeDocument/2006/relationships" xmlns:p="http://schemas.openxmlformats.org/presentationml/2006/main">
   <p:cSld>
     <p:spTree>
       <p:nvGrpSpPr>
@@ -1406,7 +1773,7 @@
         <p:nvSpPr>
           <p:cNvPr id="2" name="Slide Image Placeholder 1"/>
           <p:cNvSpPr>
-            <a:spLocks noGrp="1"/>
+            <a:spLocks noGrp="1" noRot="1" noChangeAspect="1"/>
           </p:cNvSpPr>
           <p:nvPr>
             <p:ph type="sldImg" idx="2"/>
@@ -1421,7 +1788,7 @@
             <a:spLocks noGrp="1"/>
           </p:cNvSpPr>
           <p:nvPr>
-            <p:ph type="body" idx="3" sz="quarter"/>
+            <p:ph type="body" sz="quarter" idx="3"/>
           </p:nvPr>
         </p:nvSpPr>
         <p:spPr/>
@@ -1433,43 +1800,57 @@
               <a:t>SLAJD 8 — Kako sam proverila da radi?</a:t>
             </a:r>
           </a:p>
-          <a:p/>
+          <a:p>
+            <a:endParaRPr/>
+          </a:p>
           <a:p>
             <a:r>
               <a:t>CILJNO VREME: 1:00; okvir u izlaganju: 7:05–8:05.</a:t>
             </a:r>
           </a:p>
-          <a:p/>
+          <a:p>
+            <a:endParaRPr/>
+          </a:p>
           <a:p>
             <a:r>
               <a:t>PODSETNIK (ne čitati): Naglasak je na proverljivosti. Broj 113 odnosi se na testove logike, ne na broj UI provera.</a:t>
             </a:r>
           </a:p>
-          <a:p/>
+          <a:p>
+            <a:endParaRPr/>
+          </a:p>
           <a:p>
             <a:r>
               <a:t>GOVOR:</a:t>
             </a:r>
           </a:p>
-          <a:p/>
+          <a:p>
+            <a:endParaRPr/>
+          </a:p>
           <a:p>
             <a:r>
               <a:t>Nije dovoljno da aplikacija samo izgleda kao da radi. U projektu postoji 113 automatskih testova za parser, asembler i model procesora, i pri završnoj proveri svi su prošli.</a:t>
             </a:r>
           </a:p>
-          <a:p/>
+          <a:p>
+            <a:endParaRPr/>
+          </a:p>
           <a:p>
             <a:r>
               <a:t>To su provere koje porede dobijeni rezultat sa očekivanim. Pored ispravnih programa, proveravala sam granične vrednosti, neispravne instrukcije i nedozvoljene pristupe memoriji. Tako se traže i greške koje ne bismo primetili samo pokretanjem jednog primera.</a:t>
             </a:r>
           </a:p>
-          <a:p/>
+          <a:p>
+            <a:endParaRPr/>
+          </a:p>
           <a:p>
             <a:r>
               <a:t>Dodatno je proveren rad korisničkih kontrola i prikaza. To ne znači da je ispitan svaki mogući slučaj, ali postoje ponovljive provere najvažnijih pravila, na koje se mogu osloniti i pri daljim izmenama aplikacije.</a:t>
             </a:r>
           </a:p>
-          <a:p/>
+          <a:p>
+            <a:endParaRPr/>
+          </a:p>
           <a:p>
             <a:r>
               <a:t>Kada kasnije izmenim aplikaciju, iste testove mogu ponovo da pokrenem i proverim da nisam pokvarila ranije ponašanje.</a:t>
@@ -1484,7 +1865,7 @@
             <a:spLocks noGrp="1"/>
           </p:cNvSpPr>
           <p:nvPr>
-            <p:ph type="sldNum" idx="5" sz="quarter"/>
+            <p:ph type="sldNum" sz="quarter" idx="5"/>
           </p:nvPr>
         </p:nvSpPr>
         <p:spPr/>
@@ -1498,7 +1879,7 @@
 </file>
 
 <file path=ppt/notesSlides/notesSlide9.xml><?xml version="1.0" encoding="utf-8"?>
-<p:notes xmlns:a="http://schemas.openxmlformats.org/drawingml/2006/main" xmlns:p="http://schemas.openxmlformats.org/presentationml/2006/main" xmlns:r="http://schemas.openxmlformats.org/officeDocument/2006/relationships">
+<p:notes xmlns:a="http://schemas.openxmlformats.org/drawingml/2006/main" xmlns:r="http://schemas.openxmlformats.org/officeDocument/2006/relationships" xmlns:p="http://schemas.openxmlformats.org/presentationml/2006/main">
   <p:cSld>
     <p:spTree>
       <p:nvGrpSpPr>
@@ -1518,7 +1899,7 @@
         <p:nvSpPr>
           <p:cNvPr id="2" name="Slide Image Placeholder 1"/>
           <p:cNvSpPr>
-            <a:spLocks noGrp="1"/>
+            <a:spLocks noGrp="1" noRot="1" noChangeAspect="1"/>
           </p:cNvSpPr>
           <p:nvPr>
             <p:ph type="sldImg" idx="2"/>
@@ -1533,7 +1914,7 @@
             <a:spLocks noGrp="1"/>
           </p:cNvSpPr>
           <p:nvPr>
-            <p:ph type="body" idx="3" sz="quarter"/>
+            <p:ph type="body" sz="quarter" idx="3"/>
           </p:nvPr>
         </p:nvSpPr>
         <p:spPr/>
@@ -1545,49 +1926,65 @@
               <a:t>SLAJD 9 — Šta je ostvareno i šta dalje?</a:t>
             </a:r>
           </a:p>
-          <a:p/>
+          <a:p>
+            <a:endParaRPr/>
+          </a:p>
           <a:p>
             <a:r>
               <a:t>CILJNO VREME: 1:20; okvir u izlaganju: 8:05–9:25.</a:t>
             </a:r>
           </a:p>
-          <a:p/>
+          <a:p>
+            <a:endParaRPr/>
+          </a:p>
           <a:p>
             <a:r>
               <a:t>PODSETNIK (ne čitati): Završi pozitivno, ali jasno odvoji postojeće mogućnosti od budućih ideja.</a:t>
             </a:r>
           </a:p>
-          <a:p/>
+          <a:p>
+            <a:endParaRPr/>
+          </a:p>
           <a:p>
             <a:r>
               <a:t>GOVOR:</a:t>
             </a:r>
           </a:p>
-          <a:p/>
+          <a:p>
+            <a:endParaRPr/>
+          </a:p>
           <a:p>
             <a:r>
               <a:t>Najvažniji rezultat je celina u kojoj korisnik može da napiše program, izvrši ga i prati šta se dešava. Ostvarene su dogovorene mogućnosti: pojedinačni koraci, rad do tačke prekida, izvršavanje do kraja i prikaz registara i memorije.</a:t>
             </a:r>
           </a:p>
-          <a:p/>
+          <a:p>
+            <a:endParaRPr/>
+          </a:p>
           <a:p>
             <a:r>
               <a:t>Obim je namerno ograničen. Ne simuliram svaki detalj pravog procesora, već ponašanje odabranih RISC-V instrukcija. To je omogućilo da se ceo postupak izrade i provere objasni jasno.</a:t>
             </a:r>
           </a:p>
-          <a:p/>
+          <a:p>
+            <a:endParaRPr/>
+          </a:p>
           <a:p>
             <a:r>
               <a:t>Dalji razvoj mogao bi da donese više instrukcija i složenije primere. Korisni dodaci bili bi i učitavanje i čuvanje programa, kao i vraćanje jednog koraka, kada želimo ponovo da pogledamo prethodno stanje.</a:t>
             </a:r>
           </a:p>
-          <a:p/>
+          <a:p>
+            <a:endParaRPr/>
+          </a:p>
           <a:p>
             <a:r>
               <a:t>Takve dopune bih uvodila postepeno, uz nove provere, kako bi rešenje ostalo pregledno. Važno mi je da korisnik uvek može da poveže naredbu koju je napisao sa promenom koju vidi na ekranu.</a:t>
             </a:r>
           </a:p>
-          <a:p/>
+          <a:p>
+            <a:endParaRPr/>
+          </a:p>
           <a:p>
             <a:r>
               <a:t>Aplikacija je namenjena demonstraciji i učenju, a njenu korist za korisnike trebalo bi dodatno ispitati u praksi. Za ovaj rad dobila sam zaokruženo rešenje i osnovu koju mogu dalje da proširujem.</a:t>
@@ -1602,7 +1999,7 @@
             <a:spLocks noGrp="1"/>
           </p:cNvSpPr>
           <p:nvPr>
-            <p:ph type="sldNum" idx="5" sz="quarter"/>
+            <p:ph type="sldNum" sz="quarter" idx="5"/>
           </p:nvPr>
         </p:nvSpPr>
         <p:spPr/>
@@ -1709,6 +2106,13 @@
               <a:schemeClr val="lt1"/>
             </a:fontRef>
           </p:style>
+          <p:txBody>
+            <a:bodyPr/>
+            <a:lstStyle/>
+            <a:p>
+              <a:endParaRPr lang="en-US"/>
+            </a:p>
+          </p:txBody>
         </p:sp>
         <p:pic>
           <p:nvPicPr>
@@ -1946,7 +2350,7 @@
           <a:p>
             <a:fld id="{142B5BC2-0F29-414F-9F92-5ADA83C1C172}" type="datetimeFigureOut">
               <a:rPr lang="en-GB" smtClean="0"/>
-              <a:t>16/07/2026</a:t>
+              <a:t>29/09/2026</a:t>
             </a:fld>
             <a:endParaRPr lang="en-GB"/>
           </a:p>
@@ -2270,7 +2674,7 @@
           <a:p>
             <a:fld id="{142B5BC2-0F29-414F-9F92-5ADA83C1C172}" type="datetimeFigureOut">
               <a:rPr lang="en-GB" smtClean="0"/>
-              <a:t>16/07/2026</a:t>
+              <a:t>29/09/2026</a:t>
             </a:fld>
             <a:endParaRPr lang="en-GB"/>
           </a:p>
@@ -2518,7 +2922,7 @@
           <a:p>
             <a:fld id="{142B5BC2-0F29-414F-9F92-5ADA83C1C172}" type="datetimeFigureOut">
               <a:rPr lang="en-GB" smtClean="0"/>
-              <a:t>16/07/2026</a:t>
+              <a:t>29/09/2026</a:t>
             </a:fld>
             <a:endParaRPr lang="en-GB"/>
           </a:p>
@@ -2857,7 +3261,7 @@
           <a:p>
             <a:fld id="{142B5BC2-0F29-414F-9F92-5ADA83C1C172}" type="datetimeFigureOut">
               <a:rPr lang="en-GB" smtClean="0"/>
-              <a:t>16/07/2026</a:t>
+              <a:t>29/09/2026</a:t>
             </a:fld>
             <a:endParaRPr lang="en-GB"/>
           </a:p>
@@ -3204,7 +3608,7 @@
           <a:p>
             <a:fld id="{142B5BC2-0F29-414F-9F92-5ADA83C1C172}" type="datetimeFigureOut">
               <a:rPr lang="en-GB" smtClean="0"/>
-              <a:t>16/07/2026</a:t>
+              <a:t>29/09/2026</a:t>
             </a:fld>
             <a:endParaRPr lang="en-GB"/>
           </a:p>
@@ -3578,7 +3982,7 @@
           <a:p>
             <a:fld id="{142B5BC2-0F29-414F-9F92-5ADA83C1C172}" type="datetimeFigureOut">
               <a:rPr lang="en-GB" smtClean="0"/>
-              <a:t>16/07/2026</a:t>
+              <a:t>29/09/2026</a:t>
             </a:fld>
             <a:endParaRPr lang="en-GB"/>
           </a:p>
@@ -4048,7 +4452,7 @@
           <a:p>
             <a:fld id="{142B5BC2-0F29-414F-9F92-5ADA83C1C172}" type="datetimeFigureOut">
               <a:rPr lang="en-GB" smtClean="0"/>
-              <a:t>16/07/2026</a:t>
+              <a:t>29/09/2026</a:t>
             </a:fld>
             <a:endParaRPr lang="en-GB"/>
           </a:p>
@@ -4253,7 +4657,7 @@
           <a:p>
             <a:fld id="{142B5BC2-0F29-414F-9F92-5ADA83C1C172}" type="datetimeFigureOut">
               <a:rPr lang="en-GB" smtClean="0"/>
-              <a:t>16/07/2026</a:t>
+              <a:t>29/09/2026</a:t>
             </a:fld>
             <a:endParaRPr lang="en-GB"/>
           </a:p>
@@ -4464,7 +4868,7 @@
           <a:p>
             <a:fld id="{142B5BC2-0F29-414F-9F92-5ADA83C1C172}" type="datetimeFigureOut">
               <a:rPr lang="en-GB" smtClean="0"/>
-              <a:t>16/07/2026</a:t>
+              <a:t>29/09/2026</a:t>
             </a:fld>
             <a:endParaRPr lang="en-GB"/>
           </a:p>
@@ -4696,7 +5100,7 @@
           <a:p>
             <a:fld id="{142B5BC2-0F29-414F-9F92-5ADA83C1C172}" type="datetimeFigureOut">
               <a:rPr lang="en-GB" smtClean="0"/>
-              <a:t>16/07/2026</a:t>
+              <a:t>29/09/2026</a:t>
             </a:fld>
             <a:endParaRPr lang="en-GB"/>
           </a:p>
@@ -4944,7 +5348,7 @@
           <a:p>
             <a:fld id="{142B5BC2-0F29-414F-9F92-5ADA83C1C172}" type="datetimeFigureOut">
               <a:rPr lang="en-GB" smtClean="0"/>
-              <a:t>16/07/2026</a:t>
+              <a:t>29/09/2026</a:t>
             </a:fld>
             <a:endParaRPr lang="en-GB"/>
           </a:p>
@@ -5242,7 +5646,7 @@
           <a:p>
             <a:fld id="{142B5BC2-0F29-414F-9F92-5ADA83C1C172}" type="datetimeFigureOut">
               <a:rPr lang="en-GB" smtClean="0"/>
-              <a:t>16/07/2026</a:t>
+              <a:t>29/09/2026</a:t>
             </a:fld>
             <a:endParaRPr lang="en-GB"/>
           </a:p>
@@ -5636,7 +6040,7 @@
           <a:p>
             <a:fld id="{142B5BC2-0F29-414F-9F92-5ADA83C1C172}" type="datetimeFigureOut">
               <a:rPr lang="en-GB" smtClean="0"/>
-              <a:t>16/07/2026</a:t>
+              <a:t>29/09/2026</a:t>
             </a:fld>
             <a:endParaRPr lang="en-GB"/>
           </a:p>
@@ -5785,7 +6189,7 @@
           <a:p>
             <a:fld id="{142B5BC2-0F29-414F-9F92-5ADA83C1C172}" type="datetimeFigureOut">
               <a:rPr lang="en-GB" smtClean="0"/>
-              <a:t>16/07/2026</a:t>
+              <a:t>29/09/2026</a:t>
             </a:fld>
             <a:endParaRPr lang="en-GB"/>
           </a:p>
@@ -5911,7 +6315,7 @@
           <a:p>
             <a:fld id="{142B5BC2-0F29-414F-9F92-5ADA83C1C172}" type="datetimeFigureOut">
               <a:rPr lang="en-GB" smtClean="0"/>
-              <a:t>16/07/2026</a:t>
+              <a:t>29/09/2026</a:t>
             </a:fld>
             <a:endParaRPr lang="en-GB"/>
           </a:p>
@@ -6166,7 +6570,7 @@
           <a:p>
             <a:fld id="{142B5BC2-0F29-414F-9F92-5ADA83C1C172}" type="datetimeFigureOut">
               <a:rPr lang="en-GB" smtClean="0"/>
-              <a:t>16/07/2026</a:t>
+              <a:t>29/09/2026</a:t>
             </a:fld>
             <a:endParaRPr lang="en-GB"/>
           </a:p>
@@ -6481,7 +6885,7 @@
           <a:p>
             <a:fld id="{142B5BC2-0F29-414F-9F92-5ADA83C1C172}" type="datetimeFigureOut">
               <a:rPr lang="en-GB" smtClean="0"/>
-              <a:t>16/07/2026</a:t>
+              <a:t>29/09/2026</a:t>
             </a:fld>
             <a:endParaRPr lang="en-GB"/>
           </a:p>
@@ -6641,6 +7045,13 @@
               <a:schemeClr val="lt1"/>
             </a:fontRef>
           </p:style>
+          <p:txBody>
+            <a:bodyPr/>
+            <a:lstStyle/>
+            <a:p>
+              <a:endParaRPr lang="en-US"/>
+            </a:p>
+          </p:txBody>
         </p:sp>
         <p:pic>
           <p:nvPicPr>
@@ -6832,7 +7243,7 @@
           <a:p>
             <a:fld id="{142B5BC2-0F29-414F-9F92-5ADA83C1C172}" type="datetimeFigureOut">
               <a:rPr lang="en-GB" smtClean="0"/>
-              <a:t>16/07/2026</a:t>
+              <a:t>29/09/2026</a:t>
             </a:fld>
             <a:endParaRPr lang="en-GB"/>
           </a:p>
@@ -7398,7 +7809,7 @@
           </a:xfrm>
         </p:spPr>
         <p:txBody>
-          <a:bodyPr wrap="square" lIns="27432" rIns="27432" tIns="0" bIns="0" anchor="ctr">
+          <a:bodyPr wrap="square" lIns="27432" tIns="0" rIns="27432" bIns="0" anchor="ctr">
             <a:noAutofit/>
           </a:bodyPr>
           <a:lstStyle/>
@@ -7416,7 +7827,7 @@
               <a:buNone/>
             </a:pPr>
             <a:r>
-              <a:rPr sz="3600" b="0" i="0" lang="sr-Latn-RS">
+              <a:rPr lang="sr-Latn-RS" sz="3600" b="0" i="0" dirty="0">
                 <a:solidFill>
                   <a:srgbClr val="212121"/>
                 </a:solidFill>
@@ -7440,7 +7851,7 @@
               <a:buNone/>
             </a:pPr>
             <a:r>
-              <a:rPr sz="3600" b="0" i="0" lang="sr-Latn-RS">
+              <a:rPr lang="sr-Latn-RS" sz="3600" b="0" i="0" dirty="0">
                 <a:solidFill>
                   <a:srgbClr val="212121"/>
                 </a:solidFill>
@@ -7463,7 +7874,7 @@
               <a:buNone/>
             </a:pPr>
             <a:r>
-              <a:rPr sz="3600" b="0" i="0" lang="sr-Latn-RS">
+              <a:rPr lang="sr-Latn-RS" sz="3600" b="0" i="0" dirty="0">
                 <a:solidFill>
                   <a:srgbClr val="212121"/>
                 </a:solidFill>
@@ -7497,10 +7908,66 @@
           </a:xfrm>
         </p:spPr>
         <p:txBody>
-          <a:bodyPr wrap="square" lIns="27432" rIns="27432" tIns="0" bIns="0" anchor="ctr">
+          <a:bodyPr wrap="square" lIns="27432" tIns="0" rIns="27432" bIns="0" anchor="ctr">
             <a:noAutofit/>
           </a:bodyPr>
           <a:lstStyle/>
+          <a:p>
+            <a:pPr algn="r">
+              <a:lnSpc>
+                <a:spcPct val="200000"/>
+              </a:lnSpc>
+              <a:spcBef>
+                <a:spcPts val="0"/>
+              </a:spcBef>
+              <a:spcAft>
+                <a:spcPts val="0"/>
+              </a:spcAft>
+              <a:buNone/>
+            </a:pPr>
+            <a:r>
+              <a:rPr lang="sr-Latn-RS" sz="2400" b="0" i="0" dirty="0">
+                <a:solidFill>
+                  <a:srgbClr val="212121"/>
+                </a:solidFill>
+                <a:latin typeface="Garamond"/>
+              </a:rPr>
+              <a:t>Dunja Janković 2020/0058</a:t>
+            </a:r>
+            <a:endParaRPr lang="sr-Cyrl-RS" dirty="0"/>
+          </a:p>
+          <a:p>
+            <a:pPr algn="r">
+              <a:lnSpc>
+                <a:spcPct val="200000"/>
+              </a:lnSpc>
+              <a:spcBef>
+                <a:spcPts val="0"/>
+              </a:spcBef>
+              <a:spcAft>
+                <a:spcPts val="0"/>
+              </a:spcAft>
+              <a:buNone/>
+            </a:pPr>
+            <a:r>
+              <a:rPr lang="en-US" sz="2400" dirty="0">
+                <a:solidFill>
+                  <a:srgbClr val="212121"/>
+                </a:solidFill>
+                <a:latin typeface="Garamond"/>
+              </a:rPr>
+              <a:t>m</a:t>
+            </a:r>
+            <a:r>
+              <a:rPr lang="sr-Latn-RS" sz="2400" b="0" i="0" dirty="0">
+                <a:solidFill>
+                  <a:srgbClr val="212121"/>
+                </a:solidFill>
+                <a:latin typeface="Garamond"/>
+              </a:rPr>
+              <a:t>entor: doc. dr Uroš Radenković</a:t>
+            </a:r>
+          </a:p>
           <a:p>
             <a:pPr algn="r">
               <a:lnSpc>
@@ -7514,62 +7981,12 @@
               </a:spcAft>
               <a:buNone/>
             </a:pPr>
-            <a:r>
-              <a:rPr sz="2400" b="0" i="0" lang="sr-Latn-RS">
-                <a:solidFill>
-                  <a:srgbClr val="212121"/>
-                </a:solidFill>
-                <a:latin typeface="Garamond"/>
-              </a:rPr>
-              <a:t>Dunja Janković 2020/0058</a:t>
-            </a:r>
-            <a:endParaRPr lang="sr-Cyrl-RS" dirty="0"/>
-          </a:p>
-          <a:p>
-            <a:pPr algn="r">
-              <a:lnSpc>
-                <a:spcPct val="100000"/>
-              </a:lnSpc>
-              <a:spcBef>
-                <a:spcPts val="0"/>
-              </a:spcBef>
-              <a:spcAft>
-                <a:spcPts val="0"/>
-              </a:spcAft>
-              <a:buNone/>
-            </a:pPr>
-            <a:r>
-              <a:rPr sz="2400" b="0" i="0" lang="sr-Latn-RS">
-                <a:solidFill>
-                  <a:srgbClr val="212121"/>
-                </a:solidFill>
-                <a:latin typeface="Garamond"/>
-              </a:rPr>
-              <a:t>Mentor: doc. dr Uroš Radenković</a:t>
-            </a:r>
-          </a:p>
-          <a:p>
-            <a:pPr algn="r">
-              <a:lnSpc>
-                <a:spcPct val="100000"/>
-              </a:lnSpc>
-              <a:spcBef>
-                <a:spcPts val="0"/>
-              </a:spcBef>
-              <a:spcAft>
-                <a:spcPts val="0"/>
-              </a:spcAft>
-              <a:buNone/>
-            </a:pPr>
-            <a:r>
-              <a:rPr sz="2400" b="0" i="0" lang="sr-Latn-RS">
-                <a:solidFill>
-                  <a:srgbClr val="212121"/>
-                </a:solidFill>
-                <a:latin typeface="Garamond"/>
-              </a:rPr>
-              <a:t>Beograd, 2026.</a:t>
-            </a:r>
+            <a:endParaRPr lang="sr-Latn-RS" sz="2400" b="0" i="0" dirty="0">
+              <a:solidFill>
+                <a:srgbClr val="212121"/>
+              </a:solidFill>
+              <a:latin typeface="Garamond"/>
+            </a:endParaRPr>
           </a:p>
         </p:txBody>
       </p:sp>
@@ -7586,7 +8003,7 @@
           <p:nvPr/>
         </p:nvPicPr>
         <p:blipFill>
-          <a:blip r:embed="rId2" cstate="print">
+          <a:blip r:embed="rId3" cstate="print">
             <a:extLst>
               <a:ext uri="{28A0092B-C50C-407E-A947-70E740481C1C}">
                 <a14:useLocalDpi xmlns:a14="http://schemas.microsoft.com/office/drawing/2010/main" val="0"/>
@@ -7626,537 +8043,6 @@
 </file>
 
 <file path=ppt/slides/slide10.xml><?xml version="1.0" encoding="utf-8"?>
-<p:sld xmlns:a="http://schemas.openxmlformats.org/drawingml/2006/main" xmlns:p="http://schemas.openxmlformats.org/presentationml/2006/main" xmlns:r="http://schemas.openxmlformats.org/officeDocument/2006/relationships">
-  <p:cSld>
-    <p:spTree>
-      <p:nvGrpSpPr>
-        <p:cNvPr id="1" name=""/>
-        <p:cNvGrpSpPr/>
-        <p:nvPr/>
-      </p:nvGrpSpPr>
-      <p:grpSpPr/>
-      <p:sp>
-        <p:nvSpPr>
-          <p:cNvPr id="2" name="TextBox 1"/>
-          <p:cNvSpPr txBox="1"/>
-          <p:nvPr/>
-        </p:nvSpPr>
-        <p:spPr>
-          <a:xfrm>
-            <a:off x="1298448" y="950976"/>
-            <a:ext cx="9601200" cy="768096"/>
-          </a:xfrm>
-          <a:prstGeom prst="rect">
-            <a:avLst/>
-          </a:prstGeom>
-          <a:noFill/>
-        </p:spPr>
-        <p:txBody>
-          <a:bodyPr wrap="square" lIns="27432" rIns="27432" tIns="0" bIns="0" anchor="ctr">
-            <a:noAutofit/>
-          </a:bodyPr>
-          <a:lstStyle/>
-          <a:p>
-            <a:pPr algn="ctr">
-              <a:lnSpc>
-                <a:spcPct val="100000"/>
-              </a:lnSpc>
-              <a:spcBef>
-                <a:spcPts val="0"/>
-              </a:spcBef>
-              <a:spcAft>
-                <a:spcPts val="0"/>
-              </a:spcAft>
-              <a:buNone/>
-            </a:pPr>
-            <a:r>
-              <a:rPr sz="4200" b="0" i="0" lang="sr-Latn-RS">
-                <a:solidFill>
-                  <a:srgbClr val="212121"/>
-                </a:solidFill>
-                <a:latin typeface="Garamond"/>
-              </a:rPr>
-              <a:t>Šta je ostvareno i šta dalje?</a:t>
-            </a:r>
-          </a:p>
-        </p:txBody>
-      </p:sp>
-      <p:cxnSp>
-        <p:nvCxnSpPr>
-          <p:cNvPr id="3" name="Straight Connector 6"/>
-          <p:cNvCxnSpPr/>
-          <p:nvPr/>
-        </p:nvCxnSpPr>
-        <p:spPr>
-          <a:xfrm>
-            <a:off x="1399032" y="1847088"/>
-            <a:ext cx="9409176" cy="0"/>
-          </a:xfrm>
-          <a:prstGeom prst="line">
-            <a:avLst/>
-          </a:prstGeom>
-          <a:ln w="15875"/>
-        </p:spPr>
-        <p:style>
-          <a:lnRef idx="2">
-            <a:schemeClr val="accent1"/>
-          </a:lnRef>
-          <a:fillRef idx="0">
-            <a:schemeClr val="accent1"/>
-          </a:fillRef>
-          <a:effectRef idx="1">
-            <a:schemeClr val="accent1"/>
-          </a:effectRef>
-          <a:fontRef idx="minor">
-            <a:schemeClr val="tx1"/>
-          </a:fontRef>
-        </p:style>
-      </p:cxnSp>
-      <p:sp>
-        <p:nvSpPr>
-          <p:cNvPr id="4" name="TextBox 3"/>
-          <p:cNvSpPr txBox="1"/>
-          <p:nvPr/>
-        </p:nvSpPr>
-        <p:spPr>
-          <a:xfrm>
-            <a:off x="1536192" y="2249424"/>
-            <a:ext cx="2267712" cy="667512"/>
-          </a:xfrm>
-          <a:prstGeom prst="rect">
-            <a:avLst/>
-          </a:prstGeom>
-          <a:noFill/>
-        </p:spPr>
-        <p:txBody>
-          <a:bodyPr wrap="square" lIns="27432" rIns="27432" tIns="0" bIns="0" anchor="ctr">
-            <a:noAutofit/>
-          </a:bodyPr>
-          <a:lstStyle/>
-          <a:p>
-            <a:pPr algn="l">
-              <a:lnSpc>
-                <a:spcPct val="100000"/>
-              </a:lnSpc>
-              <a:spcBef>
-                <a:spcPts val="0"/>
-              </a:spcBef>
-              <a:spcAft>
-                <a:spcPts val="0"/>
-              </a:spcAft>
-              <a:buNone/>
-            </a:pPr>
-            <a:r>
-              <a:rPr sz="3100" b="1" i="0" lang="sr-Latn-RS">
-                <a:solidFill>
-                  <a:srgbClr val="83992A"/>
-                </a:solidFill>
-                <a:latin typeface="Garamond"/>
-              </a:rPr>
-              <a:t>Ostvareno</a:t>
-            </a:r>
-          </a:p>
-        </p:txBody>
-      </p:sp>
-      <p:sp>
-        <p:nvSpPr>
-          <p:cNvPr id="5" name="TextBox 4"/>
-          <p:cNvSpPr txBox="1"/>
-          <p:nvPr/>
-        </p:nvSpPr>
-        <p:spPr>
-          <a:xfrm>
-            <a:off x="3968496" y="2249424"/>
-            <a:ext cx="6638544" cy="914400"/>
-          </a:xfrm>
-          <a:prstGeom prst="rect">
-            <a:avLst/>
-          </a:prstGeom>
-          <a:noFill/>
-        </p:spPr>
-        <p:txBody>
-          <a:bodyPr wrap="square" lIns="27432" rIns="27432" tIns="0" bIns="0" anchor="ctr">
-            <a:noAutofit/>
-          </a:bodyPr>
-          <a:lstStyle/>
-          <a:p>
-            <a:pPr algn="l">
-              <a:lnSpc>
-                <a:spcPct val="100000"/>
-              </a:lnSpc>
-              <a:spcBef>
-                <a:spcPts val="0"/>
-              </a:spcBef>
-              <a:spcAft>
-                <a:spcPts val="0"/>
-              </a:spcAft>
-              <a:buNone/>
-            </a:pPr>
-            <a:r>
-              <a:rPr sz="2800" b="0" i="0" lang="sr-Latn-RS">
-                <a:solidFill>
-                  <a:srgbClr val="212121"/>
-                </a:solidFill>
-                <a:latin typeface="Garamond"/>
-              </a:rPr>
-              <a:t>Pisanje, izvršavanje i praćenje programa</a:t>
-            </a:r>
-          </a:p>
-        </p:txBody>
-      </p:sp>
-      <p:sp>
-        <p:nvSpPr>
-          <p:cNvPr id="6" name="TextBox 5"/>
-          <p:cNvSpPr txBox="1"/>
-          <p:nvPr/>
-        </p:nvSpPr>
-        <p:spPr>
-          <a:xfrm>
-            <a:off x="1536192" y="3218688"/>
-            <a:ext cx="2267712" cy="667512"/>
-          </a:xfrm>
-          <a:prstGeom prst="rect">
-            <a:avLst/>
-          </a:prstGeom>
-          <a:noFill/>
-        </p:spPr>
-        <p:txBody>
-          <a:bodyPr wrap="square" lIns="27432" rIns="27432" tIns="0" bIns="0" anchor="ctr">
-            <a:noAutofit/>
-          </a:bodyPr>
-          <a:lstStyle/>
-          <a:p>
-            <a:pPr algn="l">
-              <a:lnSpc>
-                <a:spcPct val="100000"/>
-              </a:lnSpc>
-              <a:spcBef>
-                <a:spcPts val="0"/>
-              </a:spcBef>
-              <a:spcAft>
-                <a:spcPts val="0"/>
-              </a:spcAft>
-              <a:buNone/>
-            </a:pPr>
-            <a:r>
-              <a:rPr sz="3100" b="1" i="0" lang="sr-Latn-RS">
-                <a:solidFill>
-                  <a:srgbClr val="83992A"/>
-                </a:solidFill>
-                <a:latin typeface="Garamond"/>
-              </a:rPr>
-              <a:t>Granice</a:t>
-            </a:r>
-          </a:p>
-        </p:txBody>
-      </p:sp>
-      <p:sp>
-        <p:nvSpPr>
-          <p:cNvPr id="7" name="TextBox 6"/>
-          <p:cNvSpPr txBox="1"/>
-          <p:nvPr/>
-        </p:nvSpPr>
-        <p:spPr>
-          <a:xfrm>
-            <a:off x="3968496" y="3218688"/>
-            <a:ext cx="6638544" cy="914400"/>
-          </a:xfrm>
-          <a:prstGeom prst="rect">
-            <a:avLst/>
-          </a:prstGeom>
-          <a:noFill/>
-        </p:spPr>
-        <p:txBody>
-          <a:bodyPr wrap="square" lIns="27432" rIns="27432" tIns="0" bIns="0" anchor="ctr">
-            <a:noAutofit/>
-          </a:bodyPr>
-          <a:lstStyle/>
-          <a:p>
-            <a:pPr algn="l">
-              <a:lnSpc>
-                <a:spcPct val="100000"/>
-              </a:lnSpc>
-              <a:spcBef>
-                <a:spcPts val="0"/>
-              </a:spcBef>
-              <a:spcAft>
-                <a:spcPts val="0"/>
-              </a:spcAft>
-              <a:buNone/>
-            </a:pPr>
-            <a:r>
-              <a:rPr sz="2800" b="0" i="0" lang="sr-Latn-RS">
-                <a:solidFill>
-                  <a:srgbClr val="212121"/>
-                </a:solidFill>
-                <a:latin typeface="Garamond"/>
-              </a:rPr>
-              <a:t>Odabrani podskup RISC-V instrukcija</a:t>
-            </a:r>
-          </a:p>
-        </p:txBody>
-      </p:sp>
-      <p:sp>
-        <p:nvSpPr>
-          <p:cNvPr id="8" name="TextBox 7"/>
-          <p:cNvSpPr txBox="1"/>
-          <p:nvPr/>
-        </p:nvSpPr>
-        <p:spPr>
-          <a:xfrm>
-            <a:off x="1536192" y="4187952"/>
-            <a:ext cx="2267712" cy="667512"/>
-          </a:xfrm>
-          <a:prstGeom prst="rect">
-            <a:avLst/>
-          </a:prstGeom>
-          <a:noFill/>
-        </p:spPr>
-        <p:txBody>
-          <a:bodyPr wrap="square" lIns="27432" rIns="27432" tIns="0" bIns="0" anchor="ctr">
-            <a:noAutofit/>
-          </a:bodyPr>
-          <a:lstStyle/>
-          <a:p>
-            <a:pPr algn="l">
-              <a:lnSpc>
-                <a:spcPct val="100000"/>
-              </a:lnSpc>
-              <a:spcBef>
-                <a:spcPts val="0"/>
-              </a:spcBef>
-              <a:spcAft>
-                <a:spcPts val="0"/>
-              </a:spcAft>
-              <a:buNone/>
-            </a:pPr>
-            <a:r>
-              <a:rPr sz="3100" b="1" i="0" lang="sr-Latn-RS">
-                <a:solidFill>
-                  <a:srgbClr val="83992A"/>
-                </a:solidFill>
-                <a:latin typeface="Garamond"/>
-              </a:rPr>
-              <a:t>Dalje</a:t>
-            </a:r>
-          </a:p>
-        </p:txBody>
-      </p:sp>
-      <p:sp>
-        <p:nvSpPr>
-          <p:cNvPr id="9" name="TextBox 8"/>
-          <p:cNvSpPr txBox="1"/>
-          <p:nvPr/>
-        </p:nvSpPr>
-        <p:spPr>
-          <a:xfrm>
-            <a:off x="3968496" y="4187952"/>
-            <a:ext cx="6638544" cy="914400"/>
-          </a:xfrm>
-          <a:prstGeom prst="rect">
-            <a:avLst/>
-          </a:prstGeom>
-          <a:noFill/>
-        </p:spPr>
-        <p:txBody>
-          <a:bodyPr wrap="square" lIns="27432" rIns="27432" tIns="0" bIns="0" anchor="ctr">
-            <a:noAutofit/>
-          </a:bodyPr>
-          <a:lstStyle/>
-          <a:p>
-            <a:pPr algn="l">
-              <a:lnSpc>
-                <a:spcPct val="100000"/>
-              </a:lnSpc>
-              <a:spcBef>
-                <a:spcPts val="0"/>
-              </a:spcBef>
-              <a:spcAft>
-                <a:spcPts val="0"/>
-              </a:spcAft>
-              <a:buNone/>
-            </a:pPr>
-            <a:r>
-              <a:rPr sz="2800" b="0" i="0" lang="sr-Latn-RS">
-                <a:solidFill>
-                  <a:srgbClr val="212121"/>
-                </a:solidFill>
-                <a:latin typeface="Garamond"/>
-              </a:rPr>
-              <a:t>Više instrukcija, čuvanje programa,</a:t>
-            </a:r>
-          </a:p>
-          <a:p>
-            <a:pPr algn="l">
-              <a:lnSpc>
-                <a:spcPct val="100000"/>
-              </a:lnSpc>
-              <a:spcBef>
-                <a:spcPts val="0"/>
-              </a:spcBef>
-              <a:spcAft>
-                <a:spcPts val="0"/>
-              </a:spcAft>
-              <a:buNone/>
-            </a:pPr>
-            <a:r>
-              <a:rPr sz="2800" b="0" i="0" lang="sr-Latn-RS">
-                <a:solidFill>
-                  <a:srgbClr val="212121"/>
-                </a:solidFill>
-                <a:latin typeface="Garamond"/>
-              </a:rPr>
-              <a:t>vraćanje jednog koraka</a:t>
-            </a:r>
-          </a:p>
-        </p:txBody>
-      </p:sp>
-      <p:sp>
-        <p:nvSpPr>
-          <p:cNvPr id="10" name="Rectangle 9"/>
-          <p:cNvSpPr/>
-          <p:nvPr/>
-        </p:nvSpPr>
-        <p:spPr>
-          <a:xfrm>
-            <a:off x="1325880" y="5367528"/>
-            <a:ext cx="9537192" cy="448056"/>
-          </a:xfrm>
-          <a:prstGeom prst="rect">
-            <a:avLst/>
-          </a:prstGeom>
-          <a:solidFill>
-            <a:srgbClr val="F3F5EA"/>
-          </a:solidFill>
-          <a:ln w="12700">
-            <a:solidFill>
-              <a:srgbClr val="83992A"/>
-            </a:solidFill>
-          </a:ln>
-        </p:spPr>
-        <p:style>
-          <a:lnRef idx="1">
-            <a:schemeClr val="accent1"/>
-          </a:lnRef>
-          <a:fillRef idx="3">
-            <a:schemeClr val="accent1"/>
-          </a:fillRef>
-          <a:effectRef idx="2">
-            <a:schemeClr val="accent1"/>
-          </a:effectRef>
-          <a:fontRef idx="minor">
-            <a:schemeClr val="lt1"/>
-          </a:fontRef>
-        </p:style>
-        <p:txBody>
-          <a:bodyPr rtlCol="0" anchor="ctr"/>
-          <a:lstStyle/>
-          <a:p>
-            <a:pPr algn="ctr"/>
-          </a:p>
-        </p:txBody>
-      </p:sp>
-      <p:sp>
-        <p:nvSpPr>
-          <p:cNvPr id="11" name="TextBox 10"/>
-          <p:cNvSpPr txBox="1"/>
-          <p:nvPr/>
-        </p:nvSpPr>
-        <p:spPr>
-          <a:xfrm>
-            <a:off x="1444752" y="5385816"/>
-            <a:ext cx="9299448" cy="411480"/>
-          </a:xfrm>
-          <a:prstGeom prst="rect">
-            <a:avLst/>
-          </a:prstGeom>
-          <a:noFill/>
-        </p:spPr>
-        <p:txBody>
-          <a:bodyPr wrap="square" lIns="27432" rIns="27432" tIns="0" bIns="0" anchor="ctr">
-            <a:noAutofit/>
-          </a:bodyPr>
-          <a:lstStyle/>
-          <a:p>
-            <a:pPr algn="ctr">
-              <a:lnSpc>
-                <a:spcPct val="100000"/>
-              </a:lnSpc>
-              <a:spcBef>
-                <a:spcPts val="0"/>
-              </a:spcBef>
-              <a:spcAft>
-                <a:spcPts val="0"/>
-              </a:spcAft>
-              <a:buNone/>
-            </a:pPr>
-            <a:r>
-              <a:rPr sz="2600" b="1" i="0" lang="sr-Latn-RS">
-                <a:solidFill>
-                  <a:srgbClr val="212121"/>
-                </a:solidFill>
-                <a:latin typeface="Garamond"/>
-              </a:rPr>
-              <a:t>Od napisanog programa do vidljivog rezultata.</a:t>
-            </a:r>
-          </a:p>
-        </p:txBody>
-      </p:sp>
-      <p:sp>
-        <p:nvSpPr>
-          <p:cNvPr id="12" name="Broj slajda"/>
-          <p:cNvSpPr txBox="1"/>
-          <p:nvPr/>
-        </p:nvSpPr>
-        <p:spPr>
-          <a:xfrm>
-            <a:off x="10140696" y="5980176"/>
-            <a:ext cx="694944" cy="246888"/>
-          </a:xfrm>
-          <a:prstGeom prst="rect">
-            <a:avLst/>
-          </a:prstGeom>
-          <a:noFill/>
-        </p:spPr>
-        <p:txBody>
-          <a:bodyPr wrap="square" lIns="27432" rIns="27432" tIns="0" bIns="0" anchor="ctr">
-            <a:noAutofit/>
-          </a:bodyPr>
-          <a:lstStyle/>
-          <a:p>
-            <a:pPr algn="r">
-              <a:lnSpc>
-                <a:spcPct val="100000"/>
-              </a:lnSpc>
-              <a:spcBef>
-                <a:spcPts val="0"/>
-              </a:spcBef>
-              <a:spcAft>
-                <a:spcPts val="0"/>
-              </a:spcAft>
-              <a:buNone/>
-            </a:pPr>
-            <a:r>
-              <a:rPr sz="1600" b="0" i="0" lang="sr-Latn-RS">
-                <a:solidFill>
-                  <a:srgbClr val="212121"/>
-                </a:solidFill>
-                <a:latin typeface="Garamond"/>
-              </a:rPr>
-              <a:t>9/10</a:t>
-            </a:r>
-          </a:p>
-        </p:txBody>
-      </p:sp>
-    </p:spTree>
-  </p:cSld>
-  <p:clrMapOvr>
-    <a:masterClrMapping/>
-  </p:clrMapOvr>
-</p:sld>
-</file>
-
-<file path=ppt/slides/slide11.xml><?xml version="1.0" encoding="utf-8"?>
 <p:sld xmlns:a="http://schemas.openxmlformats.org/drawingml/2006/main" xmlns:r="http://schemas.openxmlformats.org/officeDocument/2006/relationships" xmlns:p="http://schemas.openxmlformats.org/presentationml/2006/main">
   <p:cSld>
     <p:spTree>
@@ -8191,7 +8077,7 @@
         </p:nvSpPr>
         <p:spPr/>
         <p:txBody>
-          <a:bodyPr wrap="square" lIns="27432" rIns="27432" tIns="0" bIns="0" anchor="ctr">
+          <a:bodyPr wrap="square" lIns="27432" tIns="0" rIns="27432" bIns="0" anchor="ctr">
             <a:noAutofit/>
           </a:bodyPr>
           <a:lstStyle/>
@@ -8209,7 +8095,7 @@
               <a:buNone/>
             </a:pPr>
             <a:r>
-              <a:rPr sz="4400" b="0" i="0" lang="sr-Latn-RS">
+              <a:rPr lang="sr-Latn-RS" sz="4400" b="0" i="0">
                 <a:solidFill>
                   <a:srgbClr val="212121"/>
                 </a:solidFill>
@@ -8244,7 +8130,7 @@
           </a:xfrm>
         </p:spPr>
         <p:txBody>
-          <a:bodyPr wrap="square" lIns="27432" rIns="27432" tIns="0" bIns="0" anchor="ctr">
+          <a:bodyPr wrap="square" lIns="27432" tIns="0" rIns="27432" bIns="0" anchor="ctr">
             <a:noAutofit/>
           </a:bodyPr>
           <a:lstStyle/>
@@ -8262,7 +8148,7 @@
               <a:buNone/>
             </a:pPr>
             <a:r>
-              <a:rPr sz="4400" b="0" i="0" lang="sr-Latn-RS">
+              <a:rPr lang="sr-Latn-RS" sz="4400" b="0" i="0">
                 <a:solidFill>
                   <a:srgbClr val="212121"/>
                 </a:solidFill>
@@ -8287,8 +8173,8 @@
 </p:sld>
 </file>
 
-<file path=ppt/slides/slide3.xml><?xml version="1.0" encoding="utf-8"?>
-<p:sld xmlns:a="http://schemas.openxmlformats.org/drawingml/2006/main" xmlns:p="http://schemas.openxmlformats.org/presentationml/2006/main" xmlns:r="http://schemas.openxmlformats.org/officeDocument/2006/relationships">
+<file path=ppt/slides/slide2.xml><?xml version="1.0" encoding="utf-8"?>
+<p:sld xmlns:a="http://schemas.openxmlformats.org/drawingml/2006/main" xmlns:r="http://schemas.openxmlformats.org/officeDocument/2006/relationships" xmlns:p="http://schemas.openxmlformats.org/presentationml/2006/main">
   <p:cSld>
     <p:spTree>
       <p:nvGrpSpPr>
@@ -8296,7 +8182,14 @@
         <p:cNvGrpSpPr/>
         <p:nvPr/>
       </p:nvGrpSpPr>
-      <p:grpSpPr/>
+      <p:grpSpPr>
+        <a:xfrm>
+          <a:off x="0" y="0"/>
+          <a:ext cx="0" cy="0"/>
+          <a:chOff x="0" y="0"/>
+          <a:chExt cx="0" cy="0"/>
+        </a:xfrm>
+      </p:grpSpPr>
       <p:sp>
         <p:nvSpPr>
           <p:cNvPr id="2" name="TextBox 1"/>
@@ -8314,7 +8207,7 @@
           <a:noFill/>
         </p:spPr>
         <p:txBody>
-          <a:bodyPr wrap="square" lIns="27432" rIns="27432" tIns="0" bIns="0" anchor="ctr">
+          <a:bodyPr wrap="square" lIns="27432" tIns="0" rIns="27432" bIns="0" anchor="ctr">
             <a:noAutofit/>
           </a:bodyPr>
           <a:lstStyle/>
@@ -8332,7 +8225,7 @@
               <a:buNone/>
             </a:pPr>
             <a:r>
-              <a:rPr sz="4200" b="0" i="0" lang="sr-Latn-RS">
+              <a:rPr lang="sr-Latn-RS" sz="4200" b="0" i="0">
                 <a:solidFill>
                   <a:srgbClr val="212121"/>
                 </a:solidFill>
@@ -8391,7 +8284,7 @@
           <a:noFill/>
         </p:spPr>
         <p:txBody>
-          <a:bodyPr wrap="square" lIns="27432" rIns="27432" tIns="0" bIns="0" anchor="ctr">
+          <a:bodyPr wrap="square" lIns="27432" tIns="0" rIns="27432" bIns="0" anchor="ctr">
             <a:noAutofit/>
           </a:bodyPr>
           <a:lstStyle/>
@@ -8409,7 +8302,7 @@
               <a:buNone/>
             </a:pPr>
             <a:r>
-              <a:rPr sz="2600" b="1" i="0" lang="sr-Latn-RS">
+              <a:rPr lang="sr-Latn-RS" sz="2600" b="1" i="0">
                 <a:solidFill>
                   <a:srgbClr val="83992A"/>
                 </a:solidFill>
@@ -8437,7 +8330,7 @@
           <a:noFill/>
         </p:spPr>
         <p:txBody>
-          <a:bodyPr wrap="square" lIns="27432" rIns="27432" tIns="0" bIns="0" anchor="ctr">
+          <a:bodyPr wrap="square" lIns="27432" tIns="0" rIns="27432" bIns="0" anchor="ctr">
             <a:noAutofit/>
           </a:bodyPr>
           <a:lstStyle/>
@@ -8455,7 +8348,7 @@
               <a:buNone/>
             </a:pPr>
             <a:r>
-              <a:rPr sz="2600" b="0" i="0" lang="sr-Latn-RS">
+              <a:rPr lang="sr-Latn-RS" sz="2600" b="0" i="0">
                 <a:solidFill>
                   <a:srgbClr val="212121"/>
                 </a:solidFill>
@@ -8483,7 +8376,7 @@
           <a:noFill/>
         </p:spPr>
         <p:txBody>
-          <a:bodyPr wrap="square" lIns="27432" rIns="27432" tIns="0" bIns="0" anchor="ctr">
+          <a:bodyPr wrap="square" lIns="27432" tIns="0" rIns="27432" bIns="0" anchor="ctr">
             <a:noAutofit/>
           </a:bodyPr>
           <a:lstStyle/>
@@ -8501,7 +8394,7 @@
               <a:buNone/>
             </a:pPr>
             <a:r>
-              <a:rPr sz="2600" b="1" i="0" lang="sr-Latn-RS">
+              <a:rPr lang="sr-Latn-RS" sz="2600" b="1" i="0">
                 <a:solidFill>
                   <a:srgbClr val="83992A"/>
                 </a:solidFill>
@@ -8529,7 +8422,7 @@
           <a:noFill/>
         </p:spPr>
         <p:txBody>
-          <a:bodyPr wrap="square" lIns="27432" rIns="27432" tIns="0" bIns="0" anchor="ctr">
+          <a:bodyPr wrap="square" lIns="27432" tIns="0" rIns="27432" bIns="0" anchor="ctr">
             <a:noAutofit/>
           </a:bodyPr>
           <a:lstStyle/>
@@ -8547,7 +8440,7 @@
               <a:buNone/>
             </a:pPr>
             <a:r>
-              <a:rPr sz="2600" b="0" i="0" lang="sr-Latn-RS">
+              <a:rPr lang="sr-Latn-RS" sz="2600" b="0" i="0">
                 <a:solidFill>
                   <a:srgbClr val="212121"/>
                 </a:solidFill>
@@ -8570,7 +8463,7 @@
               <a:buNone/>
             </a:pPr>
             <a:r>
-              <a:rPr sz="2600" b="0" i="0" lang="sr-Latn-RS">
+              <a:rPr lang="sr-Latn-RS" sz="2600" b="0" i="0">
                 <a:solidFill>
                   <a:srgbClr val="212121"/>
                 </a:solidFill>
@@ -8598,7 +8491,7 @@
           <a:noFill/>
         </p:spPr>
         <p:txBody>
-          <a:bodyPr wrap="square" lIns="27432" rIns="27432" tIns="0" bIns="0" anchor="ctr">
+          <a:bodyPr wrap="square" lIns="27432" tIns="0" rIns="27432" bIns="0" anchor="ctr">
             <a:noAutofit/>
           </a:bodyPr>
           <a:lstStyle/>
@@ -8616,7 +8509,7 @@
               <a:buNone/>
             </a:pPr>
             <a:r>
-              <a:rPr sz="2600" b="1" i="0" lang="sr-Latn-RS">
+              <a:rPr lang="sr-Latn-RS" sz="2600" b="1" i="0">
                 <a:solidFill>
                   <a:srgbClr val="83992A"/>
                 </a:solidFill>
@@ -8644,7 +8537,7 @@
           <a:noFill/>
         </p:spPr>
         <p:txBody>
-          <a:bodyPr wrap="square" lIns="27432" rIns="27432" tIns="0" bIns="0" anchor="ctr">
+          <a:bodyPr wrap="square" lIns="27432" tIns="0" rIns="27432" bIns="0" anchor="ctr">
             <a:noAutofit/>
           </a:bodyPr>
           <a:lstStyle/>
@@ -8662,7 +8555,7 @@
               <a:buNone/>
             </a:pPr>
             <a:r>
-              <a:rPr sz="2600" b="0" i="0" lang="sr-Latn-RS">
+              <a:rPr lang="sr-Latn-RS" sz="2600" b="0" i="0">
                 <a:solidFill>
                   <a:srgbClr val="212121"/>
                 </a:solidFill>
@@ -8690,7 +8583,7 @@
           <a:noFill/>
         </p:spPr>
         <p:txBody>
-          <a:bodyPr wrap="square" lIns="27432" rIns="27432" tIns="0" bIns="0" anchor="ctr">
+          <a:bodyPr wrap="square" lIns="27432" tIns="0" rIns="27432" bIns="0" anchor="ctr">
             <a:noAutofit/>
           </a:bodyPr>
           <a:lstStyle/>
@@ -8708,7 +8601,7 @@
               <a:buNone/>
             </a:pPr>
             <a:r>
-              <a:rPr sz="2600" b="1" i="0" lang="sr-Latn-RS">
+              <a:rPr lang="sr-Latn-RS" sz="2600" b="1" i="0">
                 <a:solidFill>
                   <a:srgbClr val="83992A"/>
                 </a:solidFill>
@@ -8736,7 +8629,7 @@
           <a:noFill/>
         </p:spPr>
         <p:txBody>
-          <a:bodyPr wrap="square" lIns="27432" rIns="27432" tIns="0" bIns="0" anchor="ctr">
+          <a:bodyPr wrap="square" lIns="27432" tIns="0" rIns="27432" bIns="0" anchor="ctr">
             <a:noAutofit/>
           </a:bodyPr>
           <a:lstStyle/>
@@ -8754,7 +8647,7 @@
               <a:buNone/>
             </a:pPr>
             <a:r>
-              <a:rPr sz="2600" b="0" i="0" lang="sr-Latn-RS">
+              <a:rPr lang="sr-Latn-RS" sz="2600" b="0" i="0">
                 <a:solidFill>
                   <a:srgbClr val="212121"/>
                 </a:solidFill>
@@ -8782,7 +8675,7 @@
           <a:noFill/>
         </p:spPr>
         <p:txBody>
-          <a:bodyPr wrap="square" lIns="27432" rIns="27432" tIns="0" bIns="0" anchor="ctr">
+          <a:bodyPr wrap="square" lIns="27432" tIns="0" rIns="27432" bIns="0" anchor="ctr">
             <a:noAutofit/>
           </a:bodyPr>
           <a:lstStyle/>
@@ -8800,7 +8693,7 @@
               <a:buNone/>
             </a:pPr>
             <a:r>
-              <a:rPr sz="2600" b="1" i="0" lang="sr-Latn-RS">
+              <a:rPr lang="sr-Latn-RS" sz="2600" b="1" i="0">
                 <a:solidFill>
                   <a:srgbClr val="83992A"/>
                 </a:solidFill>
@@ -8828,7 +8721,7 @@
           <a:noFill/>
         </p:spPr>
         <p:txBody>
-          <a:bodyPr wrap="square" lIns="27432" rIns="27432" tIns="0" bIns="0" anchor="ctr">
+          <a:bodyPr wrap="square" lIns="27432" tIns="0" rIns="27432" bIns="0" anchor="ctr">
             <a:noAutofit/>
           </a:bodyPr>
           <a:lstStyle/>
@@ -8846,7 +8739,7 @@
               <a:buNone/>
             </a:pPr>
             <a:r>
-              <a:rPr sz="2600" b="0" i="0" lang="sr-Latn-RS">
+              <a:rPr lang="sr-Latn-RS" sz="2600" b="0" i="0">
                 <a:solidFill>
                   <a:srgbClr val="212121"/>
                 </a:solidFill>
@@ -8899,6 +8792,7 @@
           <a:lstStyle/>
           <a:p>
             <a:pPr algn="ctr"/>
+            <a:endParaRPr/>
           </a:p>
         </p:txBody>
       </p:sp>
@@ -8919,7 +8813,7 @@
           <a:noFill/>
         </p:spPr>
         <p:txBody>
-          <a:bodyPr wrap="square" lIns="27432" rIns="27432" tIns="0" bIns="0" anchor="ctr">
+          <a:bodyPr wrap="square" lIns="27432" tIns="0" rIns="27432" bIns="0" anchor="ctr">
             <a:noAutofit/>
           </a:bodyPr>
           <a:lstStyle/>
@@ -8937,7 +8831,7 @@
               <a:buNone/>
             </a:pPr>
             <a:r>
-              <a:rPr sz="2400" b="1" i="0" lang="sr-Latn-RS">
+              <a:rPr lang="sr-Latn-RS" sz="2400" b="1" i="0" dirty="0">
                 <a:solidFill>
                   <a:srgbClr val="212121"/>
                 </a:solidFill>
@@ -8945,22 +8839,17 @@
               </a:rPr>
               <a:t>Napišemo mali program i pratimo</a:t>
             </a:r>
-          </a:p>
-          <a:p>
-            <a:pPr algn="ctr">
-              <a:lnSpc>
-                <a:spcPct val="100000"/>
-              </a:lnSpc>
-              <a:spcBef>
-                <a:spcPts val="0"/>
-              </a:spcBef>
-              <a:spcAft>
-                <a:spcPts val="0"/>
-              </a:spcAft>
-              <a:buNone/>
-            </a:pPr>
-            <a:r>
-              <a:rPr sz="2400" b="1" i="0" lang="sr-Latn-RS">
+            <a:r>
+              <a:rPr lang="en-US" sz="2400" b="1" dirty="0">
+                <a:solidFill>
+                  <a:srgbClr val="212121"/>
+                </a:solidFill>
+                <a:latin typeface="Garamond"/>
+              </a:rPr>
+              <a:t> </a:t>
+            </a:r>
+            <a:r>
+              <a:rPr lang="sr-Latn-RS" sz="2400" b="1" i="0" dirty="0">
                 <a:solidFill>
                   <a:srgbClr val="212121"/>
                 </a:solidFill>
@@ -8988,7 +8877,7 @@
           <a:noFill/>
         </p:spPr>
         <p:txBody>
-          <a:bodyPr wrap="square" lIns="27432" rIns="27432" tIns="0" bIns="0" anchor="ctr">
+          <a:bodyPr wrap="square" lIns="27432" tIns="0" rIns="27432" bIns="0" anchor="ctr">
             <a:noAutofit/>
           </a:bodyPr>
           <a:lstStyle/>
@@ -9006,7 +8895,7 @@
               <a:buNone/>
             </a:pPr>
             <a:r>
-              <a:rPr sz="1600" b="0" i="0" lang="sr-Latn-RS">
+              <a:rPr lang="sr-Latn-RS" sz="1600" b="0" i="0">
                 <a:solidFill>
                   <a:srgbClr val="212121"/>
                 </a:solidFill>
@@ -9025,8 +8914,8 @@
 </p:sld>
 </file>
 
-<file path=ppt/slides/slide4.xml><?xml version="1.0" encoding="utf-8"?>
-<p:sld xmlns:a="http://schemas.openxmlformats.org/drawingml/2006/main" xmlns:p="http://schemas.openxmlformats.org/presentationml/2006/main" xmlns:r="http://schemas.openxmlformats.org/officeDocument/2006/relationships">
+<file path=ppt/slides/slide3.xml><?xml version="1.0" encoding="utf-8"?>
+<p:sld xmlns:a="http://schemas.openxmlformats.org/drawingml/2006/main" xmlns:r="http://schemas.openxmlformats.org/officeDocument/2006/relationships" xmlns:p="http://schemas.openxmlformats.org/presentationml/2006/main">
   <p:cSld>
     <p:spTree>
       <p:nvGrpSpPr>
@@ -9034,7 +8923,14 @@
         <p:cNvGrpSpPr/>
         <p:nvPr/>
       </p:nvGrpSpPr>
-      <p:grpSpPr/>
+      <p:grpSpPr>
+        <a:xfrm>
+          <a:off x="0" y="0"/>
+          <a:ext cx="0" cy="0"/>
+          <a:chOff x="0" y="0"/>
+          <a:chExt cx="0" cy="0"/>
+        </a:xfrm>
+      </p:grpSpPr>
       <p:sp>
         <p:nvSpPr>
           <p:cNvPr id="2" name="TextBox 1"/>
@@ -9052,7 +8948,7 @@
           <a:noFill/>
         </p:spPr>
         <p:txBody>
-          <a:bodyPr wrap="square" lIns="27432" rIns="27432" tIns="0" bIns="0" anchor="ctr">
+          <a:bodyPr wrap="square" lIns="27432" tIns="0" rIns="27432" bIns="0" anchor="ctr">
             <a:noAutofit/>
           </a:bodyPr>
           <a:lstStyle/>
@@ -9070,7 +8966,7 @@
               <a:buNone/>
             </a:pPr>
             <a:r>
-              <a:rPr sz="4200" b="0" i="0" lang="sr-Latn-RS">
+              <a:rPr lang="sr-Latn-RS" sz="4200" b="0" i="0">
                 <a:solidFill>
                   <a:srgbClr val="212121"/>
                 </a:solidFill>
@@ -9154,6 +9050,7 @@
           <a:lstStyle/>
           <a:p>
             <a:pPr algn="ctr"/>
+            <a:endParaRPr/>
           </a:p>
         </p:txBody>
       </p:sp>
@@ -9174,7 +9071,7 @@
           <a:noFill/>
         </p:spPr>
         <p:txBody>
-          <a:bodyPr wrap="square" lIns="27432" rIns="27432" tIns="0" bIns="0" anchor="ctr">
+          <a:bodyPr wrap="square" lIns="27432" tIns="0" rIns="27432" bIns="0" anchor="ctr">
             <a:noAutofit/>
           </a:bodyPr>
           <a:lstStyle/>
@@ -9192,7 +9089,7 @@
               <a:buNone/>
             </a:pPr>
             <a:r>
-              <a:rPr sz="3600" b="1" i="0" lang="sr-Latn-RS">
+              <a:rPr lang="sr-Latn-RS" sz="3600" b="1" i="0">
                 <a:solidFill>
                   <a:srgbClr val="212121"/>
                 </a:solidFill>
@@ -9220,7 +9117,7 @@
           <a:noFill/>
         </p:spPr>
         <p:txBody>
-          <a:bodyPr wrap="square" lIns="27432" rIns="27432" tIns="0" bIns="0" anchor="ctr">
+          <a:bodyPr wrap="square" lIns="27432" tIns="0" rIns="27432" bIns="0" anchor="ctr">
             <a:noAutofit/>
           </a:bodyPr>
           <a:lstStyle/>
@@ -9238,7 +9135,7 @@
               <a:buNone/>
             </a:pPr>
             <a:r>
-              <a:rPr sz="2800" b="0" i="0" lang="sr-Latn-RS">
+              <a:rPr lang="sr-Latn-RS" sz="2800" b="0" i="0">
                 <a:solidFill>
                   <a:srgbClr val="212121"/>
                 </a:solidFill>
@@ -9291,6 +9188,7 @@
           <a:lstStyle/>
           <a:p>
             <a:pPr algn="ctr"/>
+            <a:endParaRPr/>
           </a:p>
         </p:txBody>
       </p:sp>
@@ -9311,7 +9209,7 @@
           <a:noFill/>
         </p:spPr>
         <p:txBody>
-          <a:bodyPr wrap="square" lIns="27432" rIns="27432" tIns="0" bIns="0" anchor="ctr">
+          <a:bodyPr wrap="square" lIns="27432" tIns="0" rIns="27432" bIns="0" anchor="ctr">
             <a:noAutofit/>
           </a:bodyPr>
           <a:lstStyle/>
@@ -9329,7 +9227,7 @@
               <a:buNone/>
             </a:pPr>
             <a:r>
-              <a:rPr sz="3600" b="1" i="0" lang="sr-Latn-RS">
+              <a:rPr lang="sr-Latn-RS" sz="3600" b="1" i="0">
                 <a:solidFill>
                   <a:srgbClr val="212121"/>
                 </a:solidFill>
@@ -9357,7 +9255,7 @@
           <a:noFill/>
         </p:spPr>
         <p:txBody>
-          <a:bodyPr wrap="square" lIns="27432" rIns="27432" tIns="0" bIns="0" anchor="ctr">
+          <a:bodyPr wrap="square" lIns="27432" tIns="0" rIns="27432" bIns="0" anchor="ctr">
             <a:noAutofit/>
           </a:bodyPr>
           <a:lstStyle/>
@@ -9375,7 +9273,7 @@
               <a:buNone/>
             </a:pPr>
             <a:r>
-              <a:rPr sz="2800" b="0" i="0" lang="sr-Latn-RS">
+              <a:rPr lang="sr-Latn-RS" sz="2800" b="0" i="0">
                 <a:solidFill>
                   <a:srgbClr val="212121"/>
                 </a:solidFill>
@@ -9403,7 +9301,7 @@
           <a:noFill/>
         </p:spPr>
         <p:txBody>
-          <a:bodyPr wrap="square" lIns="27432" rIns="27432" tIns="0" bIns="0" anchor="ctr">
+          <a:bodyPr wrap="square" lIns="27432" tIns="0" rIns="27432" bIns="0" anchor="ctr">
             <a:noAutofit/>
           </a:bodyPr>
           <a:lstStyle/>
@@ -9421,7 +9319,7 @@
               <a:buNone/>
             </a:pPr>
             <a:r>
-              <a:rPr sz="2800" b="0" i="0" lang="sr-Latn-RS">
+              <a:rPr lang="sr-Latn-RS" sz="2800" b="0" i="0">
                 <a:solidFill>
                   <a:srgbClr val="212121"/>
                 </a:solidFill>
@@ -9444,7 +9342,7 @@
               <a:buNone/>
             </a:pPr>
             <a:r>
-              <a:rPr sz="2800" b="0" i="0" lang="sr-Latn-RS">
+              <a:rPr lang="sr-Latn-RS" sz="2800" b="0" i="0">
                 <a:solidFill>
                   <a:srgbClr val="212121"/>
                 </a:solidFill>
@@ -9497,6 +9395,7 @@
           <a:lstStyle/>
           <a:p>
             <a:pPr algn="ctr"/>
+            <a:endParaRPr/>
           </a:p>
         </p:txBody>
       </p:sp>
@@ -9517,7 +9416,7 @@
           <a:noFill/>
         </p:spPr>
         <p:txBody>
-          <a:bodyPr wrap="square" lIns="27432" rIns="27432" tIns="0" bIns="0" anchor="ctr">
+          <a:bodyPr wrap="square" lIns="27432" tIns="0" rIns="27432" bIns="0" anchor="ctr">
             <a:noAutofit/>
           </a:bodyPr>
           <a:lstStyle/>
@@ -9535,7 +9434,7 @@
               <a:buNone/>
             </a:pPr>
             <a:r>
-              <a:rPr sz="2700" b="1" i="0" lang="sr-Latn-RS">
+              <a:rPr lang="sr-Latn-RS" sz="2700" b="1" i="0">
                 <a:solidFill>
                   <a:srgbClr val="212121"/>
                 </a:solidFill>
@@ -9563,7 +9462,7 @@
           <a:noFill/>
         </p:spPr>
         <p:txBody>
-          <a:bodyPr wrap="square" lIns="27432" rIns="27432" tIns="0" bIns="0" anchor="ctr">
+          <a:bodyPr wrap="square" lIns="27432" tIns="0" rIns="27432" bIns="0" anchor="ctr">
             <a:noAutofit/>
           </a:bodyPr>
           <a:lstStyle/>
@@ -9581,7 +9480,7 @@
               <a:buNone/>
             </a:pPr>
             <a:r>
-              <a:rPr sz="1600" b="0" i="0" lang="sr-Latn-RS">
+              <a:rPr lang="sr-Latn-RS" sz="1600" b="0" i="0">
                 <a:solidFill>
                   <a:srgbClr val="212121"/>
                 </a:solidFill>
@@ -9600,8 +9499,8 @@
 </p:sld>
 </file>
 
-<file path=ppt/slides/slide5.xml><?xml version="1.0" encoding="utf-8"?>
-<p:sld xmlns:a="http://schemas.openxmlformats.org/drawingml/2006/main" xmlns:p="http://schemas.openxmlformats.org/presentationml/2006/main" xmlns:r="http://schemas.openxmlformats.org/officeDocument/2006/relationships">
+<file path=ppt/slides/slide4.xml><?xml version="1.0" encoding="utf-8"?>
+<p:sld xmlns:a="http://schemas.openxmlformats.org/drawingml/2006/main" xmlns:r="http://schemas.openxmlformats.org/officeDocument/2006/relationships" xmlns:p="http://schemas.openxmlformats.org/presentationml/2006/main">
   <p:cSld>
     <p:spTree>
       <p:nvGrpSpPr>
@@ -9609,7 +9508,14 @@
         <p:cNvGrpSpPr/>
         <p:nvPr/>
       </p:nvGrpSpPr>
-      <p:grpSpPr/>
+      <p:grpSpPr>
+        <a:xfrm>
+          <a:off x="0" y="0"/>
+          <a:ext cx="0" cy="0"/>
+          <a:chOff x="0" y="0"/>
+          <a:chExt cx="0" cy="0"/>
+        </a:xfrm>
+      </p:grpSpPr>
       <p:sp>
         <p:nvSpPr>
           <p:cNvPr id="2" name="TextBox 1"/>
@@ -9627,7 +9533,7 @@
           <a:noFill/>
         </p:spPr>
         <p:txBody>
-          <a:bodyPr wrap="square" lIns="27432" rIns="27432" tIns="0" bIns="0" anchor="ctr">
+          <a:bodyPr wrap="square" lIns="27432" tIns="0" rIns="27432" bIns="0" anchor="ctr">
             <a:noAutofit/>
           </a:bodyPr>
           <a:lstStyle/>
@@ -9645,7 +9551,7 @@
               <a:buNone/>
             </a:pPr>
             <a:r>
-              <a:rPr sz="4200" b="0" i="0" lang="sr-Latn-RS">
+              <a:rPr lang="sr-Latn-RS" sz="4200" b="0" i="0">
                 <a:solidFill>
                   <a:srgbClr val="212121"/>
                 </a:solidFill>
@@ -9727,6 +9633,7 @@
           <a:lstStyle/>
           <a:p>
             <a:pPr algn="ctr"/>
+            <a:endParaRPr/>
           </a:p>
         </p:txBody>
       </p:sp>
@@ -9747,7 +9654,7 @@
           <a:noFill/>
         </p:spPr>
         <p:txBody>
-          <a:bodyPr wrap="square" lIns="27432" rIns="27432" tIns="0" bIns="0" anchor="ctr">
+          <a:bodyPr wrap="square" lIns="27432" tIns="0" rIns="27432" bIns="0" anchor="ctr">
             <a:noAutofit/>
           </a:bodyPr>
           <a:lstStyle/>
@@ -9765,7 +9672,7 @@
               <a:buNone/>
             </a:pPr>
             <a:r>
-              <a:rPr sz="3200" b="1" i="0" lang="sr-Latn-RS">
+              <a:rPr lang="sr-Latn-RS" sz="3200" b="1" i="0">
                 <a:solidFill>
                   <a:srgbClr val="212121"/>
                 </a:solidFill>
@@ -9793,7 +9700,7 @@
           <a:noFill/>
         </p:spPr>
         <p:txBody>
-          <a:bodyPr wrap="square" lIns="27432" rIns="27432" tIns="0" bIns="0" anchor="ctr">
+          <a:bodyPr wrap="square" lIns="27432" tIns="0" rIns="27432" bIns="0" anchor="ctr">
             <a:noAutofit/>
           </a:bodyPr>
           <a:lstStyle/>
@@ -9811,7 +9718,7 @@
               <a:buNone/>
             </a:pPr>
             <a:r>
-              <a:rPr sz="2800" b="0" i="0" lang="sr-Latn-RS">
+              <a:rPr lang="sr-Latn-RS" sz="2800" b="0" i="0">
                 <a:solidFill>
                   <a:srgbClr val="212121"/>
                 </a:solidFill>
@@ -9862,6 +9769,7 @@
           <a:lstStyle/>
           <a:p>
             <a:pPr algn="ctr"/>
+            <a:endParaRPr/>
           </a:p>
         </p:txBody>
       </p:sp>
@@ -9882,7 +9790,7 @@
           <a:noFill/>
         </p:spPr>
         <p:txBody>
-          <a:bodyPr wrap="square" lIns="27432" rIns="27432" tIns="0" bIns="0" anchor="ctr">
+          <a:bodyPr wrap="square" lIns="27432" tIns="0" rIns="27432" bIns="0" anchor="ctr">
             <a:noAutofit/>
           </a:bodyPr>
           <a:lstStyle/>
@@ -9900,7 +9808,7 @@
               <a:buNone/>
             </a:pPr>
             <a:r>
-              <a:rPr sz="3200" b="1" i="0" lang="sr-Latn-RS">
+              <a:rPr lang="sr-Latn-RS" sz="3200" b="1" i="0">
                 <a:solidFill>
                   <a:srgbClr val="212121"/>
                 </a:solidFill>
@@ -9928,7 +9836,7 @@
           <a:noFill/>
         </p:spPr>
         <p:txBody>
-          <a:bodyPr wrap="square" lIns="27432" rIns="27432" tIns="0" bIns="0" anchor="ctr">
+          <a:bodyPr wrap="square" lIns="27432" tIns="0" rIns="27432" bIns="0" anchor="ctr">
             <a:noAutofit/>
           </a:bodyPr>
           <a:lstStyle/>
@@ -9946,7 +9854,7 @@
               <a:buNone/>
             </a:pPr>
             <a:r>
-              <a:rPr sz="2800" b="0" i="0" lang="sr-Latn-RS">
+              <a:rPr lang="sr-Latn-RS" sz="2800" b="0" i="0">
                 <a:solidFill>
                   <a:srgbClr val="212121"/>
                 </a:solidFill>
@@ -9997,6 +9905,7 @@
           <a:lstStyle/>
           <a:p>
             <a:pPr algn="ctr"/>
+            <a:endParaRPr/>
           </a:p>
         </p:txBody>
       </p:sp>
@@ -10017,7 +9926,7 @@
           <a:noFill/>
         </p:spPr>
         <p:txBody>
-          <a:bodyPr wrap="square" lIns="27432" rIns="27432" tIns="0" bIns="0" anchor="ctr">
+          <a:bodyPr wrap="square" lIns="27432" tIns="0" rIns="27432" bIns="0" anchor="ctr">
             <a:noAutofit/>
           </a:bodyPr>
           <a:lstStyle/>
@@ -10035,7 +9944,7 @@
               <a:buNone/>
             </a:pPr>
             <a:r>
-              <a:rPr sz="3200" b="1" i="0" lang="sr-Latn-RS">
+              <a:rPr lang="sr-Latn-RS" sz="3200" b="1" i="0">
                 <a:solidFill>
                   <a:srgbClr val="212121"/>
                 </a:solidFill>
@@ -10063,7 +9972,7 @@
           <a:noFill/>
         </p:spPr>
         <p:txBody>
-          <a:bodyPr wrap="square" lIns="27432" rIns="27432" tIns="0" bIns="0" anchor="ctr">
+          <a:bodyPr wrap="square" lIns="27432" tIns="0" rIns="27432" bIns="0" anchor="ctr">
             <a:noAutofit/>
           </a:bodyPr>
           <a:lstStyle/>
@@ -10081,7 +9990,7 @@
               <a:buNone/>
             </a:pPr>
             <a:r>
-              <a:rPr sz="2800" b="0" i="0" lang="sr-Latn-RS">
+              <a:rPr lang="sr-Latn-RS" sz="2800" b="0" i="0">
                 <a:solidFill>
                   <a:srgbClr val="212121"/>
                 </a:solidFill>
@@ -10132,6 +10041,7 @@
           <a:lstStyle/>
           <a:p>
             <a:pPr algn="ctr"/>
+            <a:endParaRPr/>
           </a:p>
         </p:txBody>
       </p:sp>
@@ -10152,7 +10062,7 @@
           <a:noFill/>
         </p:spPr>
         <p:txBody>
-          <a:bodyPr wrap="square" lIns="27432" rIns="27432" tIns="0" bIns="0" anchor="ctr">
+          <a:bodyPr wrap="square" lIns="27432" tIns="0" rIns="27432" bIns="0" anchor="ctr">
             <a:noAutofit/>
           </a:bodyPr>
           <a:lstStyle/>
@@ -10170,7 +10080,7 @@
               <a:buNone/>
             </a:pPr>
             <a:r>
-              <a:rPr sz="3200" b="1" i="0" lang="sr-Latn-RS">
+              <a:rPr lang="sr-Latn-RS" sz="3200" b="1" i="0">
                 <a:solidFill>
                   <a:srgbClr val="212121"/>
                 </a:solidFill>
@@ -10198,7 +10108,7 @@
           <a:noFill/>
         </p:spPr>
         <p:txBody>
-          <a:bodyPr wrap="square" lIns="27432" rIns="27432" tIns="0" bIns="0" anchor="ctr">
+          <a:bodyPr wrap="square" lIns="27432" tIns="0" rIns="27432" bIns="0" anchor="ctr">
             <a:noAutofit/>
           </a:bodyPr>
           <a:lstStyle/>
@@ -10216,7 +10126,7 @@
               <a:buNone/>
             </a:pPr>
             <a:r>
-              <a:rPr sz="2800" b="0" i="0" lang="sr-Latn-RS">
+              <a:rPr lang="sr-Latn-RS" sz="2800" b="0" i="0">
                 <a:solidFill>
                   <a:srgbClr val="212121"/>
                 </a:solidFill>
@@ -10244,7 +10154,7 @@
           <a:noFill/>
         </p:spPr>
         <p:txBody>
-          <a:bodyPr wrap="square" lIns="27432" rIns="27432" tIns="0" bIns="0" anchor="ctr">
+          <a:bodyPr wrap="square" lIns="27432" tIns="0" rIns="27432" bIns="0" anchor="ctr">
             <a:noAutofit/>
           </a:bodyPr>
           <a:lstStyle/>
@@ -10262,7 +10172,7 @@
               <a:buNone/>
             </a:pPr>
             <a:r>
-              <a:rPr sz="1600" b="0" i="0" lang="sr-Latn-RS">
+              <a:rPr lang="sr-Latn-RS" sz="1600" b="0" i="0">
                 <a:solidFill>
                   <a:srgbClr val="212121"/>
                 </a:solidFill>
@@ -10281,8 +10191,8 @@
 </p:sld>
 </file>
 
-<file path=ppt/slides/slide6.xml><?xml version="1.0" encoding="utf-8"?>
-<p:sld xmlns:a="http://schemas.openxmlformats.org/drawingml/2006/main" xmlns:p="http://schemas.openxmlformats.org/presentationml/2006/main" xmlns:r="http://schemas.openxmlformats.org/officeDocument/2006/relationships">
+<file path=ppt/slides/slide5.xml><?xml version="1.0" encoding="utf-8"?>
+<p:sld xmlns:a="http://schemas.openxmlformats.org/drawingml/2006/main" xmlns:r="http://schemas.openxmlformats.org/officeDocument/2006/relationships" xmlns:p="http://schemas.openxmlformats.org/presentationml/2006/main">
   <p:cSld>
     <p:spTree>
       <p:nvGrpSpPr>
@@ -10290,7 +10200,14 @@
         <p:cNvGrpSpPr/>
         <p:nvPr/>
       </p:nvGrpSpPr>
-      <p:grpSpPr/>
+      <p:grpSpPr>
+        <a:xfrm>
+          <a:off x="0" y="0"/>
+          <a:ext cx="0" cy="0"/>
+          <a:chOff x="0" y="0"/>
+          <a:chExt cx="0" cy="0"/>
+        </a:xfrm>
+      </p:grpSpPr>
       <p:sp>
         <p:nvSpPr>
           <p:cNvPr id="2" name="TextBox 1"/>
@@ -10308,7 +10225,7 @@
           <a:noFill/>
         </p:spPr>
         <p:txBody>
-          <a:bodyPr wrap="square" lIns="27432" rIns="27432" tIns="0" bIns="0" anchor="ctr">
+          <a:bodyPr wrap="square" lIns="27432" tIns="0" rIns="27432" bIns="0" anchor="ctr">
             <a:noAutofit/>
           </a:bodyPr>
           <a:lstStyle/>
@@ -10326,7 +10243,7 @@
               <a:buNone/>
             </a:pPr>
             <a:r>
-              <a:rPr sz="4200" b="0" i="0" lang="sr-Latn-RS">
+              <a:rPr lang="sr-Latn-RS" sz="4200" b="0" i="0">
                 <a:solidFill>
                   <a:srgbClr val="212121"/>
                 </a:solidFill>
@@ -10377,7 +10294,7 @@
           <p:nvPr/>
         </p:nvPicPr>
         <p:blipFill>
-          <a:blip r:embed="rId2"/>
+          <a:blip r:embed="rId3"/>
           <a:stretch>
             <a:fillRect/>
           </a:stretch>
@@ -10409,7 +10326,7 @@
           <a:noFill/>
         </p:spPr>
         <p:txBody>
-          <a:bodyPr wrap="square" lIns="27432" rIns="27432" tIns="0" bIns="0" anchor="ctr">
+          <a:bodyPr wrap="square" lIns="27432" tIns="0" rIns="27432" bIns="0" anchor="ctr">
             <a:noAutofit/>
           </a:bodyPr>
           <a:lstStyle/>
@@ -10427,7 +10344,7 @@
               <a:buNone/>
             </a:pPr>
             <a:r>
-              <a:rPr sz="2800" b="1" i="0" lang="sr-Latn-RS">
+              <a:rPr lang="sr-Latn-RS" sz="2800" b="1" i="0" dirty="0">
                 <a:solidFill>
                   <a:srgbClr val="83992A"/>
                 </a:solidFill>
@@ -10455,7 +10372,7 @@
           <a:noFill/>
         </p:spPr>
         <p:txBody>
-          <a:bodyPr wrap="square" lIns="27432" rIns="27432" tIns="0" bIns="0" anchor="ctr">
+          <a:bodyPr wrap="square" lIns="27432" tIns="0" rIns="27432" bIns="0" anchor="ctr">
             <a:noAutofit/>
           </a:bodyPr>
           <a:lstStyle/>
@@ -10473,7 +10390,7 @@
               <a:buNone/>
             </a:pPr>
             <a:r>
-              <a:rPr sz="2400" b="0" i="0" lang="sr-Latn-RS">
+              <a:rPr lang="sr-Latn-RS" sz="2400" b="0" i="0" dirty="0">
                 <a:solidFill>
                   <a:srgbClr val="212121"/>
                 </a:solidFill>
@@ -10501,7 +10418,7 @@
           <a:noFill/>
         </p:spPr>
         <p:txBody>
-          <a:bodyPr wrap="square" lIns="27432" rIns="27432" tIns="0" bIns="0" anchor="ctr">
+          <a:bodyPr wrap="square" lIns="27432" tIns="0" rIns="27432" bIns="0" anchor="ctr">
             <a:noAutofit/>
           </a:bodyPr>
           <a:lstStyle/>
@@ -10519,7 +10436,7 @@
               <a:buNone/>
             </a:pPr>
             <a:r>
-              <a:rPr sz="2800" b="1" i="0" lang="sr-Latn-RS">
+              <a:rPr lang="sr-Latn-RS" sz="2800" b="1" i="0" dirty="0">
                 <a:solidFill>
                   <a:srgbClr val="83992A"/>
                 </a:solidFill>
@@ -10547,7 +10464,7 @@
           <a:noFill/>
         </p:spPr>
         <p:txBody>
-          <a:bodyPr wrap="square" lIns="27432" rIns="27432" tIns="0" bIns="0" anchor="ctr">
+          <a:bodyPr wrap="square" lIns="27432" tIns="0" rIns="27432" bIns="0" anchor="ctr">
             <a:noAutofit/>
           </a:bodyPr>
           <a:lstStyle/>
@@ -10565,7 +10482,7 @@
               <a:buNone/>
             </a:pPr>
             <a:r>
-              <a:rPr sz="2400" b="0" i="0" lang="sr-Latn-RS">
+              <a:rPr lang="sr-Latn-RS" sz="2400" b="0" i="0" dirty="0">
                 <a:solidFill>
                   <a:srgbClr val="212121"/>
                 </a:solidFill>
@@ -10593,7 +10510,7 @@
           <a:noFill/>
         </p:spPr>
         <p:txBody>
-          <a:bodyPr wrap="square" lIns="27432" rIns="27432" tIns="0" bIns="0" anchor="ctr">
+          <a:bodyPr wrap="square" lIns="27432" tIns="0" rIns="27432" bIns="0" anchor="ctr">
             <a:noAutofit/>
           </a:bodyPr>
           <a:lstStyle/>
@@ -10611,7 +10528,7 @@
               <a:buNone/>
             </a:pPr>
             <a:r>
-              <a:rPr sz="2800" b="1" i="0" lang="sr-Latn-RS">
+              <a:rPr lang="sr-Latn-RS" sz="2800" b="1" i="0" dirty="0">
                 <a:solidFill>
                   <a:srgbClr val="83992A"/>
                 </a:solidFill>
@@ -10639,7 +10556,7 @@
           <a:noFill/>
         </p:spPr>
         <p:txBody>
-          <a:bodyPr wrap="square" lIns="27432" rIns="27432" tIns="0" bIns="0" anchor="ctr">
+          <a:bodyPr wrap="square" lIns="27432" tIns="0" rIns="27432" bIns="0" anchor="ctr">
             <a:noAutofit/>
           </a:bodyPr>
           <a:lstStyle/>
@@ -10657,7 +10574,7 @@
               <a:buNone/>
             </a:pPr>
             <a:r>
-              <a:rPr sz="2400" b="0" i="0" lang="sr-Latn-RS">
+              <a:rPr lang="sr-Latn-RS" sz="2400" b="0" i="0" dirty="0">
                 <a:solidFill>
                   <a:srgbClr val="212121"/>
                 </a:solidFill>
@@ -10670,14 +10587,14 @@
       </p:sp>
       <p:sp>
         <p:nvSpPr>
-          <p:cNvPr id="11" name="TextBox 10"/>
+          <p:cNvPr id="12" name="Broj slajda"/>
           <p:cNvSpPr txBox="1"/>
           <p:nvPr/>
         </p:nvSpPr>
         <p:spPr>
           <a:xfrm>
-            <a:off x="8823960" y="4846320"/>
-            <a:ext cx="2057400" cy="1024128"/>
+            <a:off x="10140696" y="5980176"/>
+            <a:ext cx="694944" cy="246888"/>
           </a:xfrm>
           <a:prstGeom prst="rect">
             <a:avLst/>
@@ -10685,76 +10602,7 @@
           <a:noFill/>
         </p:spPr>
         <p:txBody>
-          <a:bodyPr wrap="square" lIns="27432" rIns="27432" tIns="0" bIns="0" anchor="ctr">
-            <a:noAutofit/>
-          </a:bodyPr>
-          <a:lstStyle/>
-          <a:p>
-            <a:pPr algn="ctr">
-              <a:lnSpc>
-                <a:spcPct val="100000"/>
-              </a:lnSpc>
-              <a:spcBef>
-                <a:spcPts val="0"/>
-              </a:spcBef>
-              <a:spcAft>
-                <a:spcPts val="0"/>
-              </a:spcAft>
-              <a:buNone/>
-            </a:pPr>
-            <a:r>
-              <a:rPr sz="2200" b="0" i="0" lang="sr-Latn-RS">
-                <a:solidFill>
-                  <a:srgbClr val="212121"/>
-                </a:solidFill>
-                <a:latin typeface="Garamond"/>
-              </a:rPr>
-              <a:t>15 instrukcija</a:t>
-            </a:r>
-          </a:p>
-          <a:p>
-            <a:pPr algn="ctr">
-              <a:lnSpc>
-                <a:spcPct val="100000"/>
-              </a:lnSpc>
-              <a:spcBef>
-                <a:spcPts val="0"/>
-              </a:spcBef>
-              <a:spcAft>
-                <a:spcPts val="0"/>
-              </a:spcAft>
-              <a:buNone/>
-            </a:pPr>
-            <a:r>
-              <a:rPr sz="2200" b="0" i="0" lang="sr-Latn-RS">
-                <a:solidFill>
-                  <a:srgbClr val="212121"/>
-                </a:solidFill>
-                <a:latin typeface="Garamond"/>
-              </a:rPr>
-              <a:t>5 pseudo-instrukcija</a:t>
-            </a:r>
-          </a:p>
-        </p:txBody>
-      </p:sp>
-      <p:sp>
-        <p:nvSpPr>
-          <p:cNvPr id="12" name="Broj slajda"/>
-          <p:cNvSpPr txBox="1"/>
-          <p:nvPr/>
-        </p:nvSpPr>
-        <p:spPr>
-          <a:xfrm>
-            <a:off x="10140696" y="5980176"/>
-            <a:ext cx="694944" cy="246888"/>
-          </a:xfrm>
-          <a:prstGeom prst="rect">
-            <a:avLst/>
-          </a:prstGeom>
-          <a:noFill/>
-        </p:spPr>
-        <p:txBody>
-          <a:bodyPr wrap="square" lIns="27432" rIns="27432" tIns="0" bIns="0" anchor="ctr">
+          <a:bodyPr wrap="square" lIns="27432" tIns="0" rIns="27432" bIns="0" anchor="ctr">
             <a:noAutofit/>
           </a:bodyPr>
           <a:lstStyle/>
@@ -10772,7 +10620,7 @@
               <a:buNone/>
             </a:pPr>
             <a:r>
-              <a:rPr sz="1600" b="0" i="0" lang="sr-Latn-RS">
+              <a:rPr lang="sr-Latn-RS" sz="1600" b="0" i="0">
                 <a:solidFill>
                   <a:srgbClr val="212121"/>
                 </a:solidFill>
@@ -10791,8 +10639,8 @@
 </p:sld>
 </file>
 
-<file path=ppt/slides/slide7.xml><?xml version="1.0" encoding="utf-8"?>
-<p:sld xmlns:a="http://schemas.openxmlformats.org/drawingml/2006/main" xmlns:p="http://schemas.openxmlformats.org/presentationml/2006/main" xmlns:r="http://schemas.openxmlformats.org/officeDocument/2006/relationships">
+<file path=ppt/slides/slide6.xml><?xml version="1.0" encoding="utf-8"?>
+<p:sld xmlns:a="http://schemas.openxmlformats.org/drawingml/2006/main" xmlns:r="http://schemas.openxmlformats.org/officeDocument/2006/relationships" xmlns:p="http://schemas.openxmlformats.org/presentationml/2006/main">
   <p:cSld>
     <p:spTree>
       <p:nvGrpSpPr>
@@ -10800,7 +10648,14 @@
         <p:cNvGrpSpPr/>
         <p:nvPr/>
       </p:nvGrpSpPr>
-      <p:grpSpPr/>
+      <p:grpSpPr>
+        <a:xfrm>
+          <a:off x="0" y="0"/>
+          <a:ext cx="0" cy="0"/>
+          <a:chOff x="0" y="0"/>
+          <a:chExt cx="0" cy="0"/>
+        </a:xfrm>
+      </p:grpSpPr>
       <p:sp>
         <p:nvSpPr>
           <p:cNvPr id="2" name="TextBox 1"/>
@@ -10818,7 +10673,7 @@
           <a:noFill/>
         </p:spPr>
         <p:txBody>
-          <a:bodyPr wrap="square" lIns="27432" rIns="27432" tIns="0" bIns="0" anchor="ctr">
+          <a:bodyPr wrap="square" lIns="27432" tIns="0" rIns="27432" bIns="0" anchor="ctr">
             <a:noAutofit/>
           </a:bodyPr>
           <a:lstStyle/>
@@ -10836,7 +10691,7 @@
               <a:buNone/>
             </a:pPr>
             <a:r>
-              <a:rPr sz="4200" b="0" i="0" lang="sr-Latn-RS">
+              <a:rPr lang="sr-Latn-RS" sz="4200" b="0" i="0">
                 <a:solidFill>
                   <a:srgbClr val="212121"/>
                 </a:solidFill>
@@ -10920,6 +10775,7 @@
           <a:lstStyle/>
           <a:p>
             <a:pPr algn="ctr"/>
+            <a:endParaRPr/>
           </a:p>
         </p:txBody>
       </p:sp>
@@ -10940,7 +10796,7 @@
           <a:noFill/>
         </p:spPr>
         <p:txBody>
-          <a:bodyPr wrap="square" lIns="27432" rIns="27432" tIns="0" bIns="0" anchor="ctr">
+          <a:bodyPr wrap="square" lIns="27432" tIns="0" rIns="27432" bIns="0" anchor="ctr">
             <a:noAutofit/>
           </a:bodyPr>
           <a:lstStyle/>
@@ -10958,7 +10814,7 @@
               <a:buNone/>
             </a:pPr>
             <a:r>
-              <a:rPr sz="2800" b="1" i="0" lang="sr-Latn-RS">
+              <a:rPr lang="sr-Latn-RS" sz="2800" b="1" i="0">
                 <a:solidFill>
                   <a:srgbClr val="212121"/>
                 </a:solidFill>
@@ -10986,7 +10842,7 @@
           <a:noFill/>
         </p:spPr>
         <p:txBody>
-          <a:bodyPr wrap="square" lIns="27432" rIns="27432" tIns="0" bIns="0" anchor="ctr">
+          <a:bodyPr wrap="square" lIns="27432" tIns="0" rIns="27432" bIns="0" anchor="ctr">
             <a:noAutofit/>
           </a:bodyPr>
           <a:lstStyle/>
@@ -11004,7 +10860,7 @@
               <a:buNone/>
             </a:pPr>
             <a:r>
-              <a:rPr sz="2300" b="0" i="0" lang="sr-Latn-RS">
+              <a:rPr lang="sr-Latn-RS" sz="2300" b="0" i="0">
                 <a:solidFill>
                   <a:srgbClr val="212121"/>
                 </a:solidFill>
@@ -11027,7 +10883,7 @@
               <a:buNone/>
             </a:pPr>
             <a:r>
-              <a:rPr sz="2300" b="0" i="0" lang="sr-Latn-RS">
+              <a:rPr lang="sr-Latn-RS" sz="2300" b="0" i="0">
                 <a:solidFill>
                   <a:srgbClr val="212121"/>
                 </a:solidFill>
@@ -11078,6 +10934,7 @@
           <a:lstStyle/>
           <a:p>
             <a:pPr algn="ctr"/>
+            <a:endParaRPr/>
           </a:p>
         </p:txBody>
       </p:sp>
@@ -11123,6 +10980,7 @@
           <a:lstStyle/>
           <a:p>
             <a:pPr algn="ctr"/>
+            <a:endParaRPr/>
           </a:p>
         </p:txBody>
       </p:sp>
@@ -11143,7 +11001,7 @@
           <a:noFill/>
         </p:spPr>
         <p:txBody>
-          <a:bodyPr wrap="square" lIns="27432" rIns="27432" tIns="0" bIns="0" anchor="ctr">
+          <a:bodyPr wrap="square" lIns="27432" tIns="0" rIns="27432" bIns="0" anchor="ctr">
             <a:noAutofit/>
           </a:bodyPr>
           <a:lstStyle/>
@@ -11161,7 +11019,7 @@
               <a:buNone/>
             </a:pPr>
             <a:r>
-              <a:rPr sz="2800" b="1" i="0" lang="sr-Latn-RS">
+              <a:rPr lang="sr-Latn-RS" sz="2800" b="1" i="0">
                 <a:solidFill>
                   <a:srgbClr val="212121"/>
                 </a:solidFill>
@@ -11184,7 +11042,7 @@
               <a:buNone/>
             </a:pPr>
             <a:r>
-              <a:rPr sz="2800" b="1" i="0" lang="sr-Latn-RS">
+              <a:rPr lang="sr-Latn-RS" sz="2800" b="1" i="0">
                 <a:solidFill>
                   <a:srgbClr val="212121"/>
                 </a:solidFill>
@@ -11212,7 +11070,7 @@
           <a:noFill/>
         </p:spPr>
         <p:txBody>
-          <a:bodyPr wrap="square" lIns="27432" rIns="27432" tIns="0" bIns="0" anchor="ctr">
+          <a:bodyPr wrap="square" lIns="27432" tIns="0" rIns="27432" bIns="0" anchor="ctr">
             <a:noAutofit/>
           </a:bodyPr>
           <a:lstStyle/>
@@ -11230,7 +11088,7 @@
               <a:buNone/>
             </a:pPr>
             <a:r>
-              <a:rPr sz="2300" b="0" i="0" lang="sr-Latn-RS">
+              <a:rPr lang="sr-Latn-RS" sz="2300" b="0" i="0">
                 <a:solidFill>
                   <a:srgbClr val="212121"/>
                 </a:solidFill>
@@ -11253,7 +11111,7 @@
               <a:buNone/>
             </a:pPr>
             <a:r>
-              <a:rPr sz="2300" b="0" i="0" lang="sr-Latn-RS">
+              <a:rPr lang="sr-Latn-RS" sz="2300" b="0" i="0">
                 <a:solidFill>
                   <a:srgbClr val="212121"/>
                 </a:solidFill>
@@ -11304,6 +11162,7 @@
           <a:lstStyle/>
           <a:p>
             <a:pPr algn="ctr"/>
+            <a:endParaRPr/>
           </a:p>
         </p:txBody>
       </p:sp>
@@ -11349,6 +11208,7 @@
           <a:lstStyle/>
           <a:p>
             <a:pPr algn="ctr"/>
+            <a:endParaRPr/>
           </a:p>
         </p:txBody>
       </p:sp>
@@ -11369,7 +11229,7 @@
           <a:noFill/>
         </p:spPr>
         <p:txBody>
-          <a:bodyPr wrap="square" lIns="27432" rIns="27432" tIns="0" bIns="0" anchor="ctr">
+          <a:bodyPr wrap="square" lIns="27432" tIns="0" rIns="27432" bIns="0" anchor="ctr">
             <a:noAutofit/>
           </a:bodyPr>
           <a:lstStyle/>
@@ -11387,7 +11247,7 @@
               <a:buNone/>
             </a:pPr>
             <a:r>
-              <a:rPr sz="2800" b="1" i="0" lang="sr-Latn-RS">
+              <a:rPr lang="sr-Latn-RS" sz="2800" b="1" i="0">
                 <a:solidFill>
                   <a:srgbClr val="212121"/>
                 </a:solidFill>
@@ -11415,7 +11275,7 @@
           <a:noFill/>
         </p:spPr>
         <p:txBody>
-          <a:bodyPr wrap="square" lIns="27432" rIns="27432" tIns="0" bIns="0" anchor="ctr">
+          <a:bodyPr wrap="square" lIns="27432" tIns="0" rIns="27432" bIns="0" anchor="ctr">
             <a:noAutofit/>
           </a:bodyPr>
           <a:lstStyle/>
@@ -11433,7 +11293,7 @@
               <a:buNone/>
             </a:pPr>
             <a:r>
-              <a:rPr sz="2300" b="0" i="0" lang="sr-Latn-RS">
+              <a:rPr lang="sr-Latn-RS" sz="2300" b="0" i="0">
                 <a:solidFill>
                   <a:srgbClr val="212121"/>
                 </a:solidFill>
@@ -11456,7 +11316,7 @@
               <a:buNone/>
             </a:pPr>
             <a:r>
-              <a:rPr sz="2300" b="0" i="0" lang="sr-Latn-RS">
+              <a:rPr lang="sr-Latn-RS" sz="2300" b="0" i="0">
                 <a:solidFill>
                   <a:srgbClr val="212121"/>
                 </a:solidFill>
@@ -11507,6 +11367,7 @@
           <a:lstStyle/>
           <a:p>
             <a:pPr algn="ctr"/>
+            <a:endParaRPr/>
           </a:p>
         </p:txBody>
       </p:sp>
@@ -11552,6 +11413,7 @@
           <a:lstStyle/>
           <a:p>
             <a:pPr algn="ctr"/>
+            <a:endParaRPr/>
           </a:p>
         </p:txBody>
       </p:sp>
@@ -11572,7 +11434,7 @@
           <a:noFill/>
         </p:spPr>
         <p:txBody>
-          <a:bodyPr wrap="square" lIns="27432" rIns="27432" tIns="0" bIns="0" anchor="ctr">
+          <a:bodyPr wrap="square" lIns="27432" tIns="0" rIns="27432" bIns="0" anchor="ctr">
             <a:noAutofit/>
           </a:bodyPr>
           <a:lstStyle/>
@@ -11590,7 +11452,7 @@
               <a:buNone/>
             </a:pPr>
             <a:r>
-              <a:rPr sz="2800" b="1" i="0" lang="sr-Latn-RS">
+              <a:rPr lang="sr-Latn-RS" sz="2800" b="1" i="0">
                 <a:solidFill>
                   <a:srgbClr val="212121"/>
                 </a:solidFill>
@@ -11618,7 +11480,7 @@
           <a:noFill/>
         </p:spPr>
         <p:txBody>
-          <a:bodyPr wrap="square" lIns="27432" rIns="27432" tIns="0" bIns="0" anchor="ctr">
+          <a:bodyPr wrap="square" lIns="27432" tIns="0" rIns="27432" bIns="0" anchor="ctr">
             <a:noAutofit/>
           </a:bodyPr>
           <a:lstStyle/>
@@ -11636,7 +11498,7 @@
               <a:buNone/>
             </a:pPr>
             <a:r>
-              <a:rPr sz="2300" b="0" i="0" lang="sr-Latn-RS">
+              <a:rPr lang="sr-Latn-RS" sz="2300" b="0" i="0">
                 <a:solidFill>
                   <a:srgbClr val="212121"/>
                 </a:solidFill>
@@ -11659,7 +11521,7 @@
               <a:buNone/>
             </a:pPr>
             <a:r>
-              <a:rPr sz="2300" b="0" i="0" lang="sr-Latn-RS">
+              <a:rPr lang="sr-Latn-RS" sz="2300" b="0" i="0">
                 <a:solidFill>
                   <a:srgbClr val="212121"/>
                 </a:solidFill>
@@ -11712,6 +11574,7 @@
           <a:lstStyle/>
           <a:p>
             <a:pPr algn="ctr"/>
+            <a:endParaRPr/>
           </a:p>
         </p:txBody>
       </p:sp>
@@ -11732,7 +11595,7 @@
           <a:noFill/>
         </p:spPr>
         <p:txBody>
-          <a:bodyPr wrap="square" lIns="27432" rIns="27432" tIns="0" bIns="0" anchor="ctr">
+          <a:bodyPr wrap="square" lIns="27432" tIns="0" rIns="27432" bIns="0" anchor="ctr">
             <a:noAutofit/>
           </a:bodyPr>
           <a:lstStyle/>
@@ -11750,7 +11613,7 @@
               <a:buNone/>
             </a:pPr>
             <a:r>
-              <a:rPr sz="3000" b="1" i="0" lang="sr-Latn-RS">
+              <a:rPr lang="sr-Latn-RS" sz="3000" b="1" i="0">
                 <a:solidFill>
                   <a:srgbClr val="212121"/>
                 </a:solidFill>
@@ -11778,7 +11641,7 @@
           <a:noFill/>
         </p:spPr>
         <p:txBody>
-          <a:bodyPr wrap="square" lIns="27432" rIns="27432" tIns="0" bIns="0" anchor="ctr">
+          <a:bodyPr wrap="square" lIns="27432" tIns="0" rIns="27432" bIns="0" anchor="ctr">
             <a:noAutofit/>
           </a:bodyPr>
           <a:lstStyle/>
@@ -11796,7 +11659,7 @@
               <a:buNone/>
             </a:pPr>
             <a:r>
-              <a:rPr sz="1600" b="0" i="0" lang="sr-Latn-RS">
+              <a:rPr lang="sr-Latn-RS" sz="1600" b="0" i="0">
                 <a:solidFill>
                   <a:srgbClr val="212121"/>
                 </a:solidFill>
@@ -11815,8 +11678,8 @@
 </p:sld>
 </file>
 
-<file path=ppt/slides/slide8.xml><?xml version="1.0" encoding="utf-8"?>
-<p:sld xmlns:a="http://schemas.openxmlformats.org/drawingml/2006/main" xmlns:p="http://schemas.openxmlformats.org/presentationml/2006/main" xmlns:r="http://schemas.openxmlformats.org/officeDocument/2006/relationships">
+<file path=ppt/slides/slide7.xml><?xml version="1.0" encoding="utf-8"?>
+<p:sld xmlns:a="http://schemas.openxmlformats.org/drawingml/2006/main" xmlns:r="http://schemas.openxmlformats.org/officeDocument/2006/relationships" xmlns:p="http://schemas.openxmlformats.org/presentationml/2006/main">
   <p:cSld>
     <p:spTree>
       <p:nvGrpSpPr>
@@ -11824,7 +11687,14 @@
         <p:cNvGrpSpPr/>
         <p:nvPr/>
       </p:nvGrpSpPr>
-      <p:grpSpPr/>
+      <p:grpSpPr>
+        <a:xfrm>
+          <a:off x="0" y="0"/>
+          <a:ext cx="0" cy="0"/>
+          <a:chOff x="0" y="0"/>
+          <a:chExt cx="0" cy="0"/>
+        </a:xfrm>
+      </p:grpSpPr>
       <p:sp>
         <p:nvSpPr>
           <p:cNvPr id="2" name="TextBox 1"/>
@@ -11842,7 +11712,7 @@
           <a:noFill/>
         </p:spPr>
         <p:txBody>
-          <a:bodyPr wrap="square" lIns="27432" rIns="27432" tIns="0" bIns="0" anchor="ctr">
+          <a:bodyPr wrap="square" lIns="27432" tIns="0" rIns="27432" bIns="0" anchor="ctr">
             <a:noAutofit/>
           </a:bodyPr>
           <a:lstStyle/>
@@ -11860,7 +11730,7 @@
               <a:buNone/>
             </a:pPr>
             <a:r>
-              <a:rPr sz="4200" b="0" i="0" lang="sr-Latn-RS">
+              <a:rPr lang="sr-Latn-RS" sz="4200" b="0" i="0">
                 <a:solidFill>
                   <a:srgbClr val="212121"/>
                 </a:solidFill>
@@ -11911,7 +11781,7 @@
           <p:nvPr/>
         </p:nvPicPr>
         <p:blipFill>
-          <a:blip r:embed="rId2"/>
+          <a:blip r:embed="rId3"/>
           <a:stretch>
             <a:fillRect/>
           </a:stretch>
@@ -11934,7 +11804,7 @@
         </p:nvSpPr>
         <p:spPr>
           <a:xfrm>
-            <a:off x="8933688" y="2633472"/>
+            <a:off x="8979408" y="2935222"/>
             <a:ext cx="1792224" cy="512064"/>
           </a:xfrm>
           <a:prstGeom prst="rect">
@@ -11943,7 +11813,7 @@
           <a:noFill/>
         </p:spPr>
         <p:txBody>
-          <a:bodyPr wrap="square" lIns="27432" rIns="27432" tIns="0" bIns="0" anchor="ctr">
+          <a:bodyPr wrap="square" lIns="27432" tIns="0" rIns="27432" bIns="0" anchor="ctr">
             <a:noAutofit/>
           </a:bodyPr>
           <a:lstStyle/>
@@ -11961,7 +11831,7 @@
               <a:buNone/>
             </a:pPr>
             <a:r>
-              <a:rPr sz="2900" b="0" i="0" lang="sr-Latn-RS">
+              <a:rPr lang="sr-Latn-RS" sz="2900" b="0" i="0" dirty="0">
                 <a:solidFill>
                   <a:srgbClr val="212121"/>
                 </a:solidFill>
@@ -11980,7 +11850,7 @@
         </p:nvSpPr>
         <p:spPr>
           <a:xfrm>
-            <a:off x="8933688" y="3127248"/>
+            <a:off x="8933688" y="3319271"/>
             <a:ext cx="1792224" cy="466344"/>
           </a:xfrm>
           <a:prstGeom prst="rect">
@@ -11989,7 +11859,7 @@
           <a:noFill/>
         </p:spPr>
         <p:txBody>
-          <a:bodyPr wrap="square" lIns="27432" rIns="27432" tIns="0" bIns="0" anchor="ctr">
+          <a:bodyPr wrap="square" lIns="27432" tIns="0" rIns="27432" bIns="0" anchor="ctr">
             <a:noAutofit/>
           </a:bodyPr>
           <a:lstStyle/>
@@ -12007,7 +11877,7 @@
               <a:buNone/>
             </a:pPr>
             <a:r>
-              <a:rPr sz="2900" b="0" i="0" lang="sr-Latn-RS">
+              <a:rPr lang="sr-Latn-RS" sz="2900" b="0" i="0" dirty="0">
                 <a:solidFill>
                   <a:srgbClr val="212121"/>
                 </a:solidFill>
@@ -12026,7 +11896,7 @@
         </p:nvSpPr>
         <p:spPr>
           <a:xfrm>
-            <a:off x="8933688" y="3685032"/>
+            <a:off x="8933688" y="3830650"/>
             <a:ext cx="1792224" cy="868680"/>
           </a:xfrm>
           <a:prstGeom prst="rect">
@@ -12035,7 +11905,7 @@
           <a:noFill/>
         </p:spPr>
         <p:txBody>
-          <a:bodyPr wrap="square" lIns="27432" rIns="27432" tIns="0" bIns="0" anchor="ctr">
+          <a:bodyPr wrap="square" lIns="27432" tIns="0" rIns="27432" bIns="0" anchor="ctr">
             <a:noAutofit/>
           </a:bodyPr>
           <a:lstStyle/>
@@ -12053,7 +11923,7 @@
               <a:buNone/>
             </a:pPr>
             <a:r>
-              <a:rPr sz="5200" b="1" i="0" lang="sr-Latn-RS">
+              <a:rPr lang="sr-Latn-RS" sz="5200" b="1" i="0" dirty="0">
                 <a:solidFill>
                   <a:srgbClr val="83992A"/>
                 </a:solidFill>
@@ -12066,14 +11936,14 @@
       </p:sp>
       <p:sp>
         <p:nvSpPr>
-          <p:cNvPr id="8" name="TextBox 7"/>
+          <p:cNvPr id="9" name="Broj slajda"/>
           <p:cNvSpPr txBox="1"/>
           <p:nvPr/>
         </p:nvSpPr>
         <p:spPr>
           <a:xfrm>
-            <a:off x="8833104" y="4818888"/>
-            <a:ext cx="2002536" cy="850392"/>
+            <a:off x="10140696" y="5980176"/>
+            <a:ext cx="694944" cy="246888"/>
           </a:xfrm>
           <a:prstGeom prst="rect">
             <a:avLst/>
@@ -12081,76 +11951,7 @@
           <a:noFill/>
         </p:spPr>
         <p:txBody>
-          <a:bodyPr wrap="square" lIns="27432" rIns="27432" tIns="0" bIns="0" anchor="ctr">
-            <a:noAutofit/>
-          </a:bodyPr>
-          <a:lstStyle/>
-          <a:p>
-            <a:pPr algn="ctr">
-              <a:lnSpc>
-                <a:spcPct val="100000"/>
-              </a:lnSpc>
-              <a:spcBef>
-                <a:spcPts val="0"/>
-              </a:spcBef>
-              <a:spcAft>
-                <a:spcPts val="0"/>
-              </a:spcAft>
-              <a:buNone/>
-            </a:pPr>
-            <a:r>
-              <a:rPr sz="2600" b="0" i="0" lang="sr-Latn-RS">
-                <a:solidFill>
-                  <a:srgbClr val="212121"/>
-                </a:solidFill>
-                <a:latin typeface="Garamond"/>
-              </a:rPr>
-              <a:t>Zbir brojeva</a:t>
-            </a:r>
-          </a:p>
-          <a:p>
-            <a:pPr algn="ctr">
-              <a:lnSpc>
-                <a:spcPct val="100000"/>
-              </a:lnSpc>
-              <a:spcBef>
-                <a:spcPts val="0"/>
-              </a:spcBef>
-              <a:spcAft>
-                <a:spcPts val="0"/>
-              </a:spcAft>
-              <a:buNone/>
-            </a:pPr>
-            <a:r>
-              <a:rPr sz="2600" b="0" i="0" lang="sr-Latn-RS">
-                <a:solidFill>
-                  <a:srgbClr val="212121"/>
-                </a:solidFill>
-                <a:latin typeface="Garamond"/>
-              </a:rPr>
-              <a:t>od 1 do 5</a:t>
-            </a:r>
-          </a:p>
-        </p:txBody>
-      </p:sp>
-      <p:sp>
-        <p:nvSpPr>
-          <p:cNvPr id="9" name="Broj slajda"/>
-          <p:cNvSpPr txBox="1"/>
-          <p:nvPr/>
-        </p:nvSpPr>
-        <p:spPr>
-          <a:xfrm>
-            <a:off x="10140696" y="5980176"/>
-            <a:ext cx="694944" cy="246888"/>
-          </a:xfrm>
-          <a:prstGeom prst="rect">
-            <a:avLst/>
-          </a:prstGeom>
-          <a:noFill/>
-        </p:spPr>
-        <p:txBody>
-          <a:bodyPr wrap="square" lIns="27432" rIns="27432" tIns="0" bIns="0" anchor="ctr">
+          <a:bodyPr wrap="square" lIns="27432" tIns="0" rIns="27432" bIns="0" anchor="ctr">
             <a:noAutofit/>
           </a:bodyPr>
           <a:lstStyle/>
@@ -12168,7 +11969,7 @@
               <a:buNone/>
             </a:pPr>
             <a:r>
-              <a:rPr sz="1600" b="0" i="0" lang="sr-Latn-RS">
+              <a:rPr lang="sr-Latn-RS" sz="1600" b="0" i="0">
                 <a:solidFill>
                   <a:srgbClr val="212121"/>
                 </a:solidFill>
@@ -12187,8 +11988,8 @@
 </p:sld>
 </file>
 
-<file path=ppt/slides/slide9.xml><?xml version="1.0" encoding="utf-8"?>
-<p:sld xmlns:a="http://schemas.openxmlformats.org/drawingml/2006/main" xmlns:p="http://schemas.openxmlformats.org/presentationml/2006/main" xmlns:r="http://schemas.openxmlformats.org/officeDocument/2006/relationships">
+<file path=ppt/slides/slide8.xml><?xml version="1.0" encoding="utf-8"?>
+<p:sld xmlns:a="http://schemas.openxmlformats.org/drawingml/2006/main" xmlns:r="http://schemas.openxmlformats.org/officeDocument/2006/relationships" xmlns:p="http://schemas.openxmlformats.org/presentationml/2006/main">
   <p:cSld>
     <p:spTree>
       <p:nvGrpSpPr>
@@ -12196,7 +11997,14 @@
         <p:cNvGrpSpPr/>
         <p:nvPr/>
       </p:nvGrpSpPr>
-      <p:grpSpPr/>
+      <p:grpSpPr>
+        <a:xfrm>
+          <a:off x="0" y="0"/>
+          <a:ext cx="0" cy="0"/>
+          <a:chOff x="0" y="0"/>
+          <a:chExt cx="0" cy="0"/>
+        </a:xfrm>
+      </p:grpSpPr>
       <p:sp>
         <p:nvSpPr>
           <p:cNvPr id="2" name="TextBox 1"/>
@@ -12214,7 +12022,7 @@
           <a:noFill/>
         </p:spPr>
         <p:txBody>
-          <a:bodyPr wrap="square" lIns="27432" rIns="27432" tIns="0" bIns="0" anchor="ctr">
+          <a:bodyPr wrap="square" lIns="27432" tIns="0" rIns="27432" bIns="0" anchor="ctr">
             <a:noAutofit/>
           </a:bodyPr>
           <a:lstStyle/>
@@ -12232,14 +12040,20 @@
               <a:buNone/>
             </a:pPr>
             <a:r>
-              <a:rPr sz="4200" b="0" i="0" lang="sr-Latn-RS">
+              <a:rPr lang="en-US" sz="4200" b="0" i="0" dirty="0" err="1">
                 <a:solidFill>
                   <a:srgbClr val="212121"/>
                 </a:solidFill>
                 <a:latin typeface="Garamond"/>
               </a:rPr>
-              <a:t>Kako sam proverila da radi?</a:t>
-            </a:r>
+              <a:t>Testiranje</a:t>
+            </a:r>
+            <a:endParaRPr lang="sr-Latn-RS" sz="4200" b="0" i="0" dirty="0">
+              <a:solidFill>
+                <a:srgbClr val="212121"/>
+              </a:solidFill>
+              <a:latin typeface="Garamond"/>
+            </a:endParaRPr>
           </a:p>
         </p:txBody>
       </p:sp>
@@ -12291,7 +12105,7 @@
           <a:noFill/>
         </p:spPr>
         <p:txBody>
-          <a:bodyPr wrap="square" lIns="27432" rIns="27432" tIns="0" bIns="0" anchor="ctr">
+          <a:bodyPr wrap="square" lIns="27432" tIns="0" rIns="27432" bIns="0" anchor="ctr">
             <a:noAutofit/>
           </a:bodyPr>
           <a:lstStyle/>
@@ -12309,7 +12123,7 @@
               <a:buNone/>
             </a:pPr>
             <a:r>
-              <a:rPr sz="9200" b="1" i="0" lang="sr-Latn-RS">
+              <a:rPr lang="sr-Latn-RS" sz="9200" b="1" i="0">
                 <a:solidFill>
                   <a:srgbClr val="83992A"/>
                 </a:solidFill>
@@ -12337,7 +12151,7 @@
           <a:noFill/>
         </p:spPr>
         <p:txBody>
-          <a:bodyPr wrap="square" lIns="27432" rIns="27432" tIns="0" bIns="0" anchor="ctr">
+          <a:bodyPr wrap="square" lIns="27432" tIns="0" rIns="27432" bIns="0" anchor="ctr">
             <a:noAutofit/>
           </a:bodyPr>
           <a:lstStyle/>
@@ -12355,7 +12169,7 @@
               <a:buNone/>
             </a:pPr>
             <a:r>
-              <a:rPr sz="3000" b="0" i="0" lang="sr-Latn-RS">
+              <a:rPr lang="sr-Latn-RS" sz="3000" b="0" i="0">
                 <a:solidFill>
                   <a:srgbClr val="212121"/>
                 </a:solidFill>
@@ -12378,7 +12192,7 @@
               <a:buNone/>
             </a:pPr>
             <a:r>
-              <a:rPr sz="3000" b="0" i="0" lang="sr-Latn-RS">
+              <a:rPr lang="sr-Latn-RS" sz="3000" b="0" i="0">
                 <a:solidFill>
                   <a:srgbClr val="212121"/>
                 </a:solidFill>
@@ -12431,6 +12245,7 @@
           <a:lstStyle/>
           <a:p>
             <a:pPr algn="ctr"/>
+            <a:endParaRPr/>
           </a:p>
         </p:txBody>
       </p:sp>
@@ -12451,7 +12266,7 @@
           <a:noFill/>
         </p:spPr>
         <p:txBody>
-          <a:bodyPr wrap="square" lIns="27432" rIns="27432" tIns="0" bIns="0" anchor="ctr">
+          <a:bodyPr wrap="square" lIns="27432" tIns="0" rIns="27432" bIns="0" anchor="ctr">
             <a:noAutofit/>
           </a:bodyPr>
           <a:lstStyle/>
@@ -12469,7 +12284,7 @@
               <a:buNone/>
             </a:pPr>
             <a:r>
-              <a:rPr sz="2400" b="0" i="0" lang="sr-Latn-RS">
+              <a:rPr lang="sr-Latn-RS" sz="2400" b="0" i="0">
                 <a:solidFill>
                   <a:srgbClr val="212121"/>
                 </a:solidFill>
@@ -12492,7 +12307,7 @@
               <a:buNone/>
             </a:pPr>
             <a:r>
-              <a:rPr sz="2400" b="0" i="0" lang="sr-Latn-RS">
+              <a:rPr lang="sr-Latn-RS" sz="2400" b="0" i="0">
                 <a:solidFill>
                   <a:srgbClr val="212121"/>
                 </a:solidFill>
@@ -12545,6 +12360,7 @@
           <a:lstStyle/>
           <a:p>
             <a:pPr algn="ctr"/>
+            <a:endParaRPr/>
           </a:p>
         </p:txBody>
       </p:sp>
@@ -12565,7 +12381,7 @@
           <a:noFill/>
         </p:spPr>
         <p:txBody>
-          <a:bodyPr wrap="square" lIns="27432" rIns="27432" tIns="0" bIns="0" anchor="ctr">
+          <a:bodyPr wrap="square" lIns="27432" tIns="0" rIns="27432" bIns="0" anchor="ctr">
             <a:noAutofit/>
           </a:bodyPr>
           <a:lstStyle/>
@@ -12583,7 +12399,7 @@
               <a:buNone/>
             </a:pPr>
             <a:r>
-              <a:rPr sz="2400" b="0" i="0" lang="sr-Latn-RS">
+              <a:rPr lang="sr-Latn-RS" sz="2400" b="0" i="0">
                 <a:solidFill>
                   <a:srgbClr val="212121"/>
                 </a:solidFill>
@@ -12606,7 +12422,7 @@
               <a:buNone/>
             </a:pPr>
             <a:r>
-              <a:rPr sz="2400" b="0" i="0" lang="sr-Latn-RS">
+              <a:rPr lang="sr-Latn-RS" sz="2400" b="0" i="0">
                 <a:solidFill>
                   <a:srgbClr val="212121"/>
                 </a:solidFill>
@@ -12659,6 +12475,7 @@
           <a:lstStyle/>
           <a:p>
             <a:pPr algn="ctr"/>
+            <a:endParaRPr/>
           </a:p>
         </p:txBody>
       </p:sp>
@@ -12679,7 +12496,7 @@
           <a:noFill/>
         </p:spPr>
         <p:txBody>
-          <a:bodyPr wrap="square" lIns="27432" rIns="27432" tIns="0" bIns="0" anchor="ctr">
+          <a:bodyPr wrap="square" lIns="27432" tIns="0" rIns="27432" bIns="0" anchor="ctr">
             <a:noAutofit/>
           </a:bodyPr>
           <a:lstStyle/>
@@ -12697,7 +12514,7 @@
               <a:buNone/>
             </a:pPr>
             <a:r>
-              <a:rPr sz="2400" b="0" i="0" lang="sr-Latn-RS">
+              <a:rPr lang="sr-Latn-RS" sz="2400" b="0" i="0">
                 <a:solidFill>
                   <a:srgbClr val="212121"/>
                 </a:solidFill>
@@ -12720,7 +12537,7 @@
               <a:buNone/>
             </a:pPr>
             <a:r>
-              <a:rPr sz="2400" b="0" i="0" lang="sr-Latn-RS">
+              <a:rPr lang="sr-Latn-RS" sz="2400" b="0" i="0">
                 <a:solidFill>
                   <a:srgbClr val="212121"/>
                 </a:solidFill>
@@ -12748,7 +12565,7 @@
           <a:noFill/>
         </p:spPr>
         <p:txBody>
-          <a:bodyPr wrap="square" lIns="27432" rIns="27432" tIns="0" bIns="0" anchor="ctr">
+          <a:bodyPr wrap="square" lIns="27432" tIns="0" rIns="27432" bIns="0" anchor="ctr">
             <a:noAutofit/>
           </a:bodyPr>
           <a:lstStyle/>
@@ -12766,7 +12583,7 @@
               <a:buNone/>
             </a:pPr>
             <a:r>
-              <a:rPr sz="2800" b="0" i="0" lang="sr-Latn-RS">
+              <a:rPr lang="sr-Latn-RS" sz="2800" b="0" i="0">
                 <a:solidFill>
                   <a:srgbClr val="212121"/>
                 </a:solidFill>
@@ -12794,7 +12611,7 @@
           <a:noFill/>
         </p:spPr>
         <p:txBody>
-          <a:bodyPr wrap="square" lIns="27432" rIns="27432" tIns="0" bIns="0" anchor="ctr">
+          <a:bodyPr wrap="square" lIns="27432" tIns="0" rIns="27432" bIns="0" anchor="ctr">
             <a:noAutofit/>
           </a:bodyPr>
           <a:lstStyle/>
@@ -12812,13 +12629,552 @@
               <a:buNone/>
             </a:pPr>
             <a:r>
-              <a:rPr sz="1600" b="0" i="0" lang="sr-Latn-RS">
+              <a:rPr lang="sr-Latn-RS" sz="1600" b="0" i="0">
                 <a:solidFill>
                   <a:srgbClr val="212121"/>
                 </a:solidFill>
                 <a:latin typeface="Garamond"/>
               </a:rPr>
               <a:t>8/10</a:t>
+            </a:r>
+          </a:p>
+        </p:txBody>
+      </p:sp>
+    </p:spTree>
+  </p:cSld>
+  <p:clrMapOvr>
+    <a:masterClrMapping/>
+  </p:clrMapOvr>
+</p:sld>
+</file>
+
+<file path=ppt/slides/slide9.xml><?xml version="1.0" encoding="utf-8"?>
+<p:sld xmlns:a="http://schemas.openxmlformats.org/drawingml/2006/main" xmlns:r="http://schemas.openxmlformats.org/officeDocument/2006/relationships" xmlns:p="http://schemas.openxmlformats.org/presentationml/2006/main">
+  <p:cSld>
+    <p:spTree>
+      <p:nvGrpSpPr>
+        <p:cNvPr id="1" name=""/>
+        <p:cNvGrpSpPr/>
+        <p:nvPr/>
+      </p:nvGrpSpPr>
+      <p:grpSpPr>
+        <a:xfrm>
+          <a:off x="0" y="0"/>
+          <a:ext cx="0" cy="0"/>
+          <a:chOff x="0" y="0"/>
+          <a:chExt cx="0" cy="0"/>
+        </a:xfrm>
+      </p:grpSpPr>
+      <p:sp>
+        <p:nvSpPr>
+          <p:cNvPr id="2" name="TextBox 1"/>
+          <p:cNvSpPr txBox="1"/>
+          <p:nvPr/>
+        </p:nvSpPr>
+        <p:spPr>
+          <a:xfrm>
+            <a:off x="1298448" y="950976"/>
+            <a:ext cx="9601200" cy="768096"/>
+          </a:xfrm>
+          <a:prstGeom prst="rect">
+            <a:avLst/>
+          </a:prstGeom>
+          <a:noFill/>
+        </p:spPr>
+        <p:txBody>
+          <a:bodyPr wrap="square" lIns="27432" tIns="0" rIns="27432" bIns="0" anchor="ctr">
+            <a:noAutofit/>
+          </a:bodyPr>
+          <a:lstStyle/>
+          <a:p>
+            <a:pPr algn="ctr">
+              <a:lnSpc>
+                <a:spcPct val="100000"/>
+              </a:lnSpc>
+              <a:spcBef>
+                <a:spcPts val="0"/>
+              </a:spcBef>
+              <a:spcAft>
+                <a:spcPts val="0"/>
+              </a:spcAft>
+              <a:buNone/>
+            </a:pPr>
+            <a:r>
+              <a:rPr lang="sr-Latn-RS" sz="4200" b="0" i="0">
+                <a:solidFill>
+                  <a:srgbClr val="212121"/>
+                </a:solidFill>
+                <a:latin typeface="Garamond"/>
+              </a:rPr>
+              <a:t>Šta je ostvareno i šta dalje?</a:t>
+            </a:r>
+          </a:p>
+        </p:txBody>
+      </p:sp>
+      <p:cxnSp>
+        <p:nvCxnSpPr>
+          <p:cNvPr id="3" name="Straight Connector 6"/>
+          <p:cNvCxnSpPr/>
+          <p:nvPr/>
+        </p:nvCxnSpPr>
+        <p:spPr>
+          <a:xfrm>
+            <a:off x="1399032" y="1847088"/>
+            <a:ext cx="9409176" cy="0"/>
+          </a:xfrm>
+          <a:prstGeom prst="line">
+            <a:avLst/>
+          </a:prstGeom>
+          <a:ln w="15875"/>
+        </p:spPr>
+        <p:style>
+          <a:lnRef idx="2">
+            <a:schemeClr val="accent1"/>
+          </a:lnRef>
+          <a:fillRef idx="0">
+            <a:schemeClr val="accent1"/>
+          </a:fillRef>
+          <a:effectRef idx="1">
+            <a:schemeClr val="accent1"/>
+          </a:effectRef>
+          <a:fontRef idx="minor">
+            <a:schemeClr val="tx1"/>
+          </a:fontRef>
+        </p:style>
+      </p:cxnSp>
+      <p:sp>
+        <p:nvSpPr>
+          <p:cNvPr id="4" name="TextBox 3"/>
+          <p:cNvSpPr txBox="1"/>
+          <p:nvPr/>
+        </p:nvSpPr>
+        <p:spPr>
+          <a:xfrm>
+            <a:off x="1536192" y="2249424"/>
+            <a:ext cx="2267712" cy="667512"/>
+          </a:xfrm>
+          <a:prstGeom prst="rect">
+            <a:avLst/>
+          </a:prstGeom>
+          <a:noFill/>
+        </p:spPr>
+        <p:txBody>
+          <a:bodyPr wrap="square" lIns="27432" tIns="0" rIns="27432" bIns="0" anchor="ctr">
+            <a:noAutofit/>
+          </a:bodyPr>
+          <a:lstStyle/>
+          <a:p>
+            <a:pPr algn="l">
+              <a:lnSpc>
+                <a:spcPct val="100000"/>
+              </a:lnSpc>
+              <a:spcBef>
+                <a:spcPts val="0"/>
+              </a:spcBef>
+              <a:spcAft>
+                <a:spcPts val="0"/>
+              </a:spcAft>
+              <a:buNone/>
+            </a:pPr>
+            <a:r>
+              <a:rPr lang="sr-Latn-RS" sz="3100" b="1" i="0">
+                <a:solidFill>
+                  <a:srgbClr val="83992A"/>
+                </a:solidFill>
+                <a:latin typeface="Garamond"/>
+              </a:rPr>
+              <a:t>Ostvareno</a:t>
+            </a:r>
+          </a:p>
+        </p:txBody>
+      </p:sp>
+      <p:sp>
+        <p:nvSpPr>
+          <p:cNvPr id="5" name="TextBox 4"/>
+          <p:cNvSpPr txBox="1"/>
+          <p:nvPr/>
+        </p:nvSpPr>
+        <p:spPr>
+          <a:xfrm>
+            <a:off x="3968496" y="2249424"/>
+            <a:ext cx="6638544" cy="914400"/>
+          </a:xfrm>
+          <a:prstGeom prst="rect">
+            <a:avLst/>
+          </a:prstGeom>
+          <a:noFill/>
+        </p:spPr>
+        <p:txBody>
+          <a:bodyPr wrap="square" lIns="27432" tIns="0" rIns="27432" bIns="0" anchor="ctr">
+            <a:noAutofit/>
+          </a:bodyPr>
+          <a:lstStyle/>
+          <a:p>
+            <a:pPr algn="l">
+              <a:lnSpc>
+                <a:spcPct val="100000"/>
+              </a:lnSpc>
+              <a:spcBef>
+                <a:spcPts val="0"/>
+              </a:spcBef>
+              <a:spcAft>
+                <a:spcPts val="0"/>
+              </a:spcAft>
+              <a:buNone/>
+            </a:pPr>
+            <a:r>
+              <a:rPr lang="sr-Latn-RS" sz="2800" b="0" i="0">
+                <a:solidFill>
+                  <a:srgbClr val="212121"/>
+                </a:solidFill>
+                <a:latin typeface="Garamond"/>
+              </a:rPr>
+              <a:t>Pisanje, izvršavanje i praćenje programa</a:t>
+            </a:r>
+          </a:p>
+        </p:txBody>
+      </p:sp>
+      <p:sp>
+        <p:nvSpPr>
+          <p:cNvPr id="6" name="TextBox 5"/>
+          <p:cNvSpPr txBox="1"/>
+          <p:nvPr/>
+        </p:nvSpPr>
+        <p:spPr>
+          <a:xfrm>
+            <a:off x="1536192" y="3218688"/>
+            <a:ext cx="2267712" cy="667512"/>
+          </a:xfrm>
+          <a:prstGeom prst="rect">
+            <a:avLst/>
+          </a:prstGeom>
+          <a:noFill/>
+        </p:spPr>
+        <p:txBody>
+          <a:bodyPr wrap="square" lIns="27432" tIns="0" rIns="27432" bIns="0" anchor="ctr">
+            <a:noAutofit/>
+          </a:bodyPr>
+          <a:lstStyle/>
+          <a:p>
+            <a:pPr algn="l">
+              <a:lnSpc>
+                <a:spcPct val="100000"/>
+              </a:lnSpc>
+              <a:spcBef>
+                <a:spcPts val="0"/>
+              </a:spcBef>
+              <a:spcAft>
+                <a:spcPts val="0"/>
+              </a:spcAft>
+              <a:buNone/>
+            </a:pPr>
+            <a:r>
+              <a:rPr lang="sr-Latn-RS" sz="3100" b="1" i="0">
+                <a:solidFill>
+                  <a:srgbClr val="83992A"/>
+                </a:solidFill>
+                <a:latin typeface="Garamond"/>
+              </a:rPr>
+              <a:t>Granice</a:t>
+            </a:r>
+          </a:p>
+        </p:txBody>
+      </p:sp>
+      <p:sp>
+        <p:nvSpPr>
+          <p:cNvPr id="7" name="TextBox 6"/>
+          <p:cNvSpPr txBox="1"/>
+          <p:nvPr/>
+        </p:nvSpPr>
+        <p:spPr>
+          <a:xfrm>
+            <a:off x="3968496" y="3218688"/>
+            <a:ext cx="6638544" cy="914400"/>
+          </a:xfrm>
+          <a:prstGeom prst="rect">
+            <a:avLst/>
+          </a:prstGeom>
+          <a:noFill/>
+        </p:spPr>
+        <p:txBody>
+          <a:bodyPr wrap="square" lIns="27432" tIns="0" rIns="27432" bIns="0" anchor="ctr">
+            <a:noAutofit/>
+          </a:bodyPr>
+          <a:lstStyle/>
+          <a:p>
+            <a:pPr algn="l">
+              <a:lnSpc>
+                <a:spcPct val="100000"/>
+              </a:lnSpc>
+              <a:spcBef>
+                <a:spcPts val="0"/>
+              </a:spcBef>
+              <a:spcAft>
+                <a:spcPts val="0"/>
+              </a:spcAft>
+              <a:buNone/>
+            </a:pPr>
+            <a:r>
+              <a:rPr lang="sr-Latn-RS" sz="2800" b="0" i="0">
+                <a:solidFill>
+                  <a:srgbClr val="212121"/>
+                </a:solidFill>
+                <a:latin typeface="Garamond"/>
+              </a:rPr>
+              <a:t>Odabrani podskup RISC-V instrukcija</a:t>
+            </a:r>
+          </a:p>
+        </p:txBody>
+      </p:sp>
+      <p:sp>
+        <p:nvSpPr>
+          <p:cNvPr id="8" name="TextBox 7"/>
+          <p:cNvSpPr txBox="1"/>
+          <p:nvPr/>
+        </p:nvSpPr>
+        <p:spPr>
+          <a:xfrm>
+            <a:off x="1536192" y="4187952"/>
+            <a:ext cx="2267712" cy="667512"/>
+          </a:xfrm>
+          <a:prstGeom prst="rect">
+            <a:avLst/>
+          </a:prstGeom>
+          <a:noFill/>
+        </p:spPr>
+        <p:txBody>
+          <a:bodyPr wrap="square" lIns="27432" tIns="0" rIns="27432" bIns="0" anchor="ctr">
+            <a:noAutofit/>
+          </a:bodyPr>
+          <a:lstStyle/>
+          <a:p>
+            <a:pPr algn="l">
+              <a:lnSpc>
+                <a:spcPct val="100000"/>
+              </a:lnSpc>
+              <a:spcBef>
+                <a:spcPts val="0"/>
+              </a:spcBef>
+              <a:spcAft>
+                <a:spcPts val="0"/>
+              </a:spcAft>
+              <a:buNone/>
+            </a:pPr>
+            <a:r>
+              <a:rPr lang="sr-Latn-RS" sz="3100" b="1" i="0">
+                <a:solidFill>
+                  <a:srgbClr val="83992A"/>
+                </a:solidFill>
+                <a:latin typeface="Garamond"/>
+              </a:rPr>
+              <a:t>Dalje</a:t>
+            </a:r>
+          </a:p>
+        </p:txBody>
+      </p:sp>
+      <p:sp>
+        <p:nvSpPr>
+          <p:cNvPr id="9" name="TextBox 8"/>
+          <p:cNvSpPr txBox="1"/>
+          <p:nvPr/>
+        </p:nvSpPr>
+        <p:spPr>
+          <a:xfrm>
+            <a:off x="3968496" y="4187952"/>
+            <a:ext cx="6638544" cy="914400"/>
+          </a:xfrm>
+          <a:prstGeom prst="rect">
+            <a:avLst/>
+          </a:prstGeom>
+          <a:noFill/>
+        </p:spPr>
+        <p:txBody>
+          <a:bodyPr wrap="square" lIns="27432" tIns="0" rIns="27432" bIns="0" anchor="ctr">
+            <a:noAutofit/>
+          </a:bodyPr>
+          <a:lstStyle/>
+          <a:p>
+            <a:pPr algn="l">
+              <a:lnSpc>
+                <a:spcPct val="100000"/>
+              </a:lnSpc>
+              <a:spcBef>
+                <a:spcPts val="0"/>
+              </a:spcBef>
+              <a:spcAft>
+                <a:spcPts val="0"/>
+              </a:spcAft>
+              <a:buNone/>
+            </a:pPr>
+            <a:r>
+              <a:rPr lang="sr-Latn-RS" sz="2800" b="0" i="0">
+                <a:solidFill>
+                  <a:srgbClr val="212121"/>
+                </a:solidFill>
+                <a:latin typeface="Garamond"/>
+              </a:rPr>
+              <a:t>Više instrukcija, čuvanje programa,</a:t>
+            </a:r>
+          </a:p>
+          <a:p>
+            <a:pPr algn="l">
+              <a:lnSpc>
+                <a:spcPct val="100000"/>
+              </a:lnSpc>
+              <a:spcBef>
+                <a:spcPts val="0"/>
+              </a:spcBef>
+              <a:spcAft>
+                <a:spcPts val="0"/>
+              </a:spcAft>
+              <a:buNone/>
+            </a:pPr>
+            <a:r>
+              <a:rPr lang="sr-Latn-RS" sz="2800" b="0" i="0">
+                <a:solidFill>
+                  <a:srgbClr val="212121"/>
+                </a:solidFill>
+                <a:latin typeface="Garamond"/>
+              </a:rPr>
+              <a:t>vraćanje jednog koraka</a:t>
+            </a:r>
+          </a:p>
+        </p:txBody>
+      </p:sp>
+      <p:sp>
+        <p:nvSpPr>
+          <p:cNvPr id="10" name="Rectangle 9"/>
+          <p:cNvSpPr/>
+          <p:nvPr/>
+        </p:nvSpPr>
+        <p:spPr>
+          <a:xfrm>
+            <a:off x="1325880" y="5367528"/>
+            <a:ext cx="9537192" cy="448056"/>
+          </a:xfrm>
+          <a:prstGeom prst="rect">
+            <a:avLst/>
+          </a:prstGeom>
+          <a:solidFill>
+            <a:srgbClr val="F3F5EA"/>
+          </a:solidFill>
+          <a:ln w="12700">
+            <a:solidFill>
+              <a:srgbClr val="83992A"/>
+            </a:solidFill>
+          </a:ln>
+        </p:spPr>
+        <p:style>
+          <a:lnRef idx="1">
+            <a:schemeClr val="accent1"/>
+          </a:lnRef>
+          <a:fillRef idx="3">
+            <a:schemeClr val="accent1"/>
+          </a:fillRef>
+          <a:effectRef idx="2">
+            <a:schemeClr val="accent1"/>
+          </a:effectRef>
+          <a:fontRef idx="minor">
+            <a:schemeClr val="lt1"/>
+          </a:fontRef>
+        </p:style>
+        <p:txBody>
+          <a:bodyPr rtlCol="0" anchor="ctr"/>
+          <a:lstStyle/>
+          <a:p>
+            <a:pPr algn="ctr"/>
+            <a:endParaRPr/>
+          </a:p>
+        </p:txBody>
+      </p:sp>
+      <p:sp>
+        <p:nvSpPr>
+          <p:cNvPr id="11" name="TextBox 10"/>
+          <p:cNvSpPr txBox="1"/>
+          <p:nvPr/>
+        </p:nvSpPr>
+        <p:spPr>
+          <a:xfrm>
+            <a:off x="1444752" y="5385816"/>
+            <a:ext cx="9299448" cy="411480"/>
+          </a:xfrm>
+          <a:prstGeom prst="rect">
+            <a:avLst/>
+          </a:prstGeom>
+          <a:noFill/>
+        </p:spPr>
+        <p:txBody>
+          <a:bodyPr wrap="square" lIns="27432" tIns="0" rIns="27432" bIns="0" anchor="ctr">
+            <a:noAutofit/>
+          </a:bodyPr>
+          <a:lstStyle/>
+          <a:p>
+            <a:pPr algn="ctr">
+              <a:lnSpc>
+                <a:spcPct val="100000"/>
+              </a:lnSpc>
+              <a:spcBef>
+                <a:spcPts val="0"/>
+              </a:spcBef>
+              <a:spcAft>
+                <a:spcPts val="0"/>
+              </a:spcAft>
+              <a:buNone/>
+            </a:pPr>
+            <a:r>
+              <a:rPr lang="sr-Latn-RS" sz="2600" b="1" i="0">
+                <a:solidFill>
+                  <a:srgbClr val="212121"/>
+                </a:solidFill>
+                <a:latin typeface="Garamond"/>
+              </a:rPr>
+              <a:t>Od napisanog programa do vidljivog rezultata.</a:t>
+            </a:r>
+          </a:p>
+        </p:txBody>
+      </p:sp>
+      <p:sp>
+        <p:nvSpPr>
+          <p:cNvPr id="12" name="Broj slajda"/>
+          <p:cNvSpPr txBox="1"/>
+          <p:nvPr/>
+        </p:nvSpPr>
+        <p:spPr>
+          <a:xfrm>
+            <a:off x="10140696" y="5980176"/>
+            <a:ext cx="694944" cy="246888"/>
+          </a:xfrm>
+          <a:prstGeom prst="rect">
+            <a:avLst/>
+          </a:prstGeom>
+          <a:noFill/>
+        </p:spPr>
+        <p:txBody>
+          <a:bodyPr wrap="square" lIns="27432" tIns="0" rIns="27432" bIns="0" anchor="ctr">
+            <a:noAutofit/>
+          </a:bodyPr>
+          <a:lstStyle/>
+          <a:p>
+            <a:pPr algn="r">
+              <a:lnSpc>
+                <a:spcPct val="100000"/>
+              </a:lnSpc>
+              <a:spcBef>
+                <a:spcPts val="0"/>
+              </a:spcBef>
+              <a:spcAft>
+                <a:spcPts val="0"/>
+              </a:spcAft>
+              <a:buNone/>
+            </a:pPr>
+            <a:r>
+              <a:rPr lang="sr-Latn-RS" sz="1600" b="0" i="0">
+                <a:solidFill>
+                  <a:srgbClr val="212121"/>
+                </a:solidFill>
+                <a:latin typeface="Garamond"/>
+              </a:rPr>
+              <a:t>9/10</a:t>
             </a:r>
           </a:p>
         </p:txBody>
@@ -13075,44 +13431,44 @@
         <a:sysClr val="window" lastClr="FFFFFF"/>
       </a:lt1>
       <a:dk2>
-        <a:srgbClr val="1F497D"/>
+        <a:srgbClr val="0E2841"/>
       </a:dk2>
       <a:lt2>
-        <a:srgbClr val="EEECE1"/>
+        <a:srgbClr val="E8E8E8"/>
       </a:lt2>
       <a:accent1>
-        <a:srgbClr val="4F81BD"/>
+        <a:srgbClr val="156082"/>
       </a:accent1>
       <a:accent2>
-        <a:srgbClr val="C0504D"/>
+        <a:srgbClr val="E97132"/>
       </a:accent2>
       <a:accent3>
-        <a:srgbClr val="9BBB59"/>
+        <a:srgbClr val="196B24"/>
       </a:accent3>
       <a:accent4>
-        <a:srgbClr val="8064A2"/>
+        <a:srgbClr val="0F9ED5"/>
       </a:accent4>
       <a:accent5>
-        <a:srgbClr val="4BACC6"/>
+        <a:srgbClr val="A02B93"/>
       </a:accent5>
       <a:accent6>
-        <a:srgbClr val="F79646"/>
+        <a:srgbClr val="4EA72E"/>
       </a:accent6>
       <a:hlink>
-        <a:srgbClr val="0000FF"/>
+        <a:srgbClr val="467886"/>
       </a:hlink>
       <a:folHlink>
-        <a:srgbClr val="800080"/>
+        <a:srgbClr val="96607D"/>
       </a:folHlink>
     </a:clrScheme>
     <a:fontScheme name="Office">
       <a:majorFont>
-        <a:latin typeface="Calibri"/>
+        <a:latin typeface="Aptos Display" panose="02110004020202020204"/>
         <a:ea typeface=""/>
         <a:cs typeface=""/>
-        <a:font script="Jpan" typeface="ＭＳ Ｐゴシック"/>
+        <a:font script="Jpan" typeface="游ゴシック Light"/>
         <a:font script="Hang" typeface="맑은 고딕"/>
-        <a:font script="Hans" typeface="宋体"/>
+        <a:font script="Hans" typeface="等线 Light"/>
         <a:font script="Hant" typeface="新細明體"/>
         <a:font script="Arab" typeface="Times New Roman"/>
         <a:font script="Hebr" typeface="Times New Roman"/>
@@ -13140,14 +13496,31 @@
         <a:font script="Viet" typeface="Times New Roman"/>
         <a:font script="Uigh" typeface="Microsoft Uighur"/>
         <a:font script="Geor" typeface="Sylfaen"/>
+        <a:font script="Armn" typeface="Arial"/>
+        <a:font script="Bugi" typeface="Leelawadee UI"/>
+        <a:font script="Bopo" typeface="Microsoft JhengHei"/>
+        <a:font script="Java" typeface="Javanese Text"/>
+        <a:font script="Lisu" typeface="Segoe UI"/>
+        <a:font script="Mymr" typeface="Myanmar Text"/>
+        <a:font script="Nkoo" typeface="Ebrima"/>
+        <a:font script="Olck" typeface="Nirmala UI"/>
+        <a:font script="Osma" typeface="Ebrima"/>
+        <a:font script="Phag" typeface="Phagspa"/>
+        <a:font script="Syrn" typeface="Estrangelo Edessa"/>
+        <a:font script="Syrj" typeface="Estrangelo Edessa"/>
+        <a:font script="Syre" typeface="Estrangelo Edessa"/>
+        <a:font script="Sora" typeface="Nirmala UI"/>
+        <a:font script="Tale" typeface="Microsoft Tai Le"/>
+        <a:font script="Talu" typeface="Microsoft New Tai Lue"/>
+        <a:font script="Tfng" typeface="Ebrima"/>
       </a:majorFont>
       <a:minorFont>
-        <a:latin typeface="Calibri"/>
+        <a:latin typeface="Aptos" panose="02110004020202020204"/>
         <a:ea typeface=""/>
         <a:cs typeface=""/>
-        <a:font script="Jpan" typeface="ＭＳ Ｐゴシック"/>
+        <a:font script="Jpan" typeface="游ゴシック"/>
         <a:font script="Hang" typeface="맑은 고딕"/>
-        <a:font script="Hans" typeface="宋体"/>
+        <a:font script="Hans" typeface="等线"/>
         <a:font script="Hant" typeface="新細明體"/>
         <a:font script="Arab" typeface="Arial"/>
         <a:font script="Hebr" typeface="Arial"/>
@@ -13175,6 +13548,23 @@
         <a:font script="Viet" typeface="Arial"/>
         <a:font script="Uigh" typeface="Microsoft Uighur"/>
         <a:font script="Geor" typeface="Sylfaen"/>
+        <a:font script="Armn" typeface="Arial"/>
+        <a:font script="Bugi" typeface="Leelawadee UI"/>
+        <a:font script="Bopo" typeface="Microsoft JhengHei"/>
+        <a:font script="Java" typeface="Javanese Text"/>
+        <a:font script="Lisu" typeface="Segoe UI"/>
+        <a:font script="Mymr" typeface="Myanmar Text"/>
+        <a:font script="Nkoo" typeface="Ebrima"/>
+        <a:font script="Olck" typeface="Nirmala UI"/>
+        <a:font script="Osma" typeface="Ebrima"/>
+        <a:font script="Phag" typeface="Phagspa"/>
+        <a:font script="Syrn" typeface="Estrangelo Edessa"/>
+        <a:font script="Syrj" typeface="Estrangelo Edessa"/>
+        <a:font script="Syre" typeface="Estrangelo Edessa"/>
+        <a:font script="Sora" typeface="Nirmala UI"/>
+        <a:font script="Tale" typeface="Microsoft Tai Le"/>
+        <a:font script="Talu" typeface="Microsoft New Tai Lue"/>
+        <a:font script="Tfng" typeface="Ebrima"/>
       </a:minorFont>
     </a:fontScheme>
     <a:fmtScheme name="Office">
@@ -13186,180 +13576,136 @@
           <a:gsLst>
             <a:gs pos="0">
               <a:schemeClr val="phClr">
-                <a:tint val="50000"/>
-                <a:satMod val="300000"/>
+                <a:lumMod val="110000"/>
+                <a:satMod val="105000"/>
+                <a:tint val="67000"/>
               </a:schemeClr>
             </a:gs>
-            <a:gs pos="35000">
+            <a:gs pos="50000">
               <a:schemeClr val="phClr">
-                <a:tint val="37000"/>
-                <a:satMod val="300000"/>
+                <a:lumMod val="105000"/>
+                <a:satMod val="103000"/>
+                <a:tint val="73000"/>
               </a:schemeClr>
             </a:gs>
             <a:gs pos="100000">
               <a:schemeClr val="phClr">
-                <a:tint val="15000"/>
-                <a:satMod val="350000"/>
+                <a:lumMod val="105000"/>
+                <a:satMod val="109000"/>
+                <a:tint val="81000"/>
               </a:schemeClr>
             </a:gs>
           </a:gsLst>
-          <a:lin ang="16200000" scaled="1"/>
+          <a:lin ang="5400000" scaled="0"/>
         </a:gradFill>
         <a:gradFill rotWithShape="1">
           <a:gsLst>
             <a:gs pos="0">
               <a:schemeClr val="phClr">
-                <a:tint val="100000"/>
+                <a:satMod val="103000"/>
+                <a:lumMod val="102000"/>
+                <a:tint val="94000"/>
+              </a:schemeClr>
+            </a:gs>
+            <a:gs pos="50000">
+              <a:schemeClr val="phClr">
+                <a:satMod val="110000"/>
+                <a:lumMod val="100000"/>
                 <a:shade val="100000"/>
-                <a:satMod val="130000"/>
               </a:schemeClr>
             </a:gs>
             <a:gs pos="100000">
               <a:schemeClr val="phClr">
-                <a:tint val="50000"/>
-                <a:shade val="100000"/>
-                <a:satMod val="350000"/>
+                <a:lumMod val="99000"/>
+                <a:satMod val="120000"/>
+                <a:shade val="78000"/>
               </a:schemeClr>
             </a:gs>
           </a:gsLst>
-          <a:lin ang="16200000" scaled="0"/>
+          <a:lin ang="5400000" scaled="0"/>
         </a:gradFill>
       </a:fillStyleLst>
       <a:lnStyleLst>
-        <a:ln w="9525" cap="flat" cmpd="sng" algn="ctr">
+        <a:ln w="12700" cap="flat" cmpd="sng" algn="ctr">
           <a:solidFill>
-            <a:schemeClr val="phClr">
-              <a:shade val="95000"/>
-              <a:satMod val="105000"/>
-            </a:schemeClr>
+            <a:schemeClr val="phClr"/>
           </a:solidFill>
           <a:prstDash val="solid"/>
+          <a:miter lim="800000"/>
+        </a:ln>
+        <a:ln w="19050" cap="flat" cmpd="sng" algn="ctr">
+          <a:solidFill>
+            <a:schemeClr val="phClr"/>
+          </a:solidFill>
+          <a:prstDash val="solid"/>
+          <a:miter lim="800000"/>
         </a:ln>
         <a:ln w="25400" cap="flat" cmpd="sng" algn="ctr">
           <a:solidFill>
             <a:schemeClr val="phClr"/>
           </a:solidFill>
           <a:prstDash val="solid"/>
-        </a:ln>
-        <a:ln w="38100" cap="flat" cmpd="sng" algn="ctr">
-          <a:solidFill>
-            <a:schemeClr val="phClr"/>
-          </a:solidFill>
-          <a:prstDash val="solid"/>
+          <a:miter lim="800000"/>
         </a:ln>
       </a:lnStyleLst>
       <a:effectStyleLst>
         <a:effectStyle>
+          <a:effectLst/>
+        </a:effectStyle>
+        <a:effectStyle>
+          <a:effectLst/>
+        </a:effectStyle>
+        <a:effectStyle>
           <a:effectLst>
-            <a:outerShdw blurRad="40000" dist="20000" dir="5400000" rotWithShape="0">
+            <a:outerShdw blurRad="57150" dist="19050" dir="5400000" algn="ctr" rotWithShape="0">
               <a:srgbClr val="000000">
-                <a:alpha val="38000"/>
+                <a:alpha val="63000"/>
               </a:srgbClr>
             </a:outerShdw>
           </a:effectLst>
-        </a:effectStyle>
-        <a:effectStyle>
-          <a:effectLst>
-            <a:outerShdw blurRad="40000" dist="23000" dir="5400000" rotWithShape="0">
-              <a:srgbClr val="000000">
-                <a:alpha val="35000"/>
-              </a:srgbClr>
-            </a:outerShdw>
-          </a:effectLst>
-        </a:effectStyle>
-        <a:effectStyle>
-          <a:effectLst>
-            <a:outerShdw blurRad="40000" dist="23000" dir="5400000" rotWithShape="0">
-              <a:srgbClr val="000000">
-                <a:alpha val="35000"/>
-              </a:srgbClr>
-            </a:outerShdw>
-          </a:effectLst>
-          <a:scene3d>
-            <a:camera prst="orthographicFront">
-              <a:rot lat="0" lon="0" rev="0"/>
-            </a:camera>
-            <a:lightRig rig="threePt" dir="t">
-              <a:rot lat="0" lon="0" rev="1200000"/>
-            </a:lightRig>
-          </a:scene3d>
-          <a:sp3d>
-            <a:bevelT w="63500" h="25400"/>
-          </a:sp3d>
         </a:effectStyle>
       </a:effectStyleLst>
       <a:bgFillStyleLst>
         <a:solidFill>
           <a:schemeClr val="phClr"/>
         </a:solidFill>
+        <a:solidFill>
+          <a:schemeClr val="phClr">
+            <a:tint val="95000"/>
+            <a:satMod val="170000"/>
+          </a:schemeClr>
+        </a:solidFill>
         <a:gradFill rotWithShape="1">
           <a:gsLst>
             <a:gs pos="0">
               <a:schemeClr val="phClr">
-                <a:tint val="40000"/>
-                <a:satMod val="350000"/>
+                <a:tint val="93000"/>
+                <a:satMod val="150000"/>
+                <a:shade val="98000"/>
+                <a:lumMod val="102000"/>
               </a:schemeClr>
             </a:gs>
-            <a:gs pos="40000">
+            <a:gs pos="50000">
               <a:schemeClr val="phClr">
-                <a:tint val="45000"/>
-                <a:shade val="99000"/>
-                <a:satMod val="350000"/>
+                <a:tint val="98000"/>
+                <a:satMod val="130000"/>
+                <a:shade val="90000"/>
+                <a:lumMod val="103000"/>
               </a:schemeClr>
             </a:gs>
             <a:gs pos="100000">
               <a:schemeClr val="phClr">
-                <a:shade val="20000"/>
-                <a:satMod val="255000"/>
+                <a:shade val="63000"/>
+                <a:satMod val="120000"/>
               </a:schemeClr>
             </a:gs>
           </a:gsLst>
-          <a:path path="circle">
-            <a:fillToRect l="50000" t="-80000" r="50000" b="180000"/>
-          </a:path>
-        </a:gradFill>
-        <a:gradFill rotWithShape="1">
-          <a:gsLst>
-            <a:gs pos="0">
-              <a:schemeClr val="phClr">
-                <a:tint val="80000"/>
-                <a:satMod val="300000"/>
-              </a:schemeClr>
-            </a:gs>
-            <a:gs pos="100000">
-              <a:schemeClr val="phClr">
-                <a:shade val="30000"/>
-                <a:satMod val="200000"/>
-              </a:schemeClr>
-            </a:gs>
-          </a:gsLst>
-          <a:path path="circle">
-            <a:fillToRect l="50000" t="50000" r="50000" b="50000"/>
-          </a:path>
+          <a:lin ang="5400000" scaled="0"/>
         </a:gradFill>
       </a:bgFillStyleLst>
     </a:fmtScheme>
   </a:themeElements>
   <a:objectDefaults>
-    <a:spDef>
-      <a:spPr/>
-      <a:bodyPr/>
-      <a:lstStyle/>
-      <a:style>
-        <a:lnRef idx="1">
-          <a:schemeClr val="accent1"/>
-        </a:lnRef>
-        <a:fillRef idx="3">
-          <a:schemeClr val="accent1"/>
-        </a:fillRef>
-        <a:effectRef idx="2">
-          <a:schemeClr val="accent1"/>
-        </a:effectRef>
-        <a:fontRef idx="minor">
-          <a:schemeClr val="lt1"/>
-        </a:fontRef>
-      </a:style>
-    </a:spDef>
     <a:lnDef>
       <a:spPr/>
       <a:bodyPr/>
@@ -13381,5 +13727,16 @@
     </a:lnDef>
   </a:objectDefaults>
   <a:extraClrSchemeLst/>
+  <a:extLst>
+    <a:ext uri="{05A4C25C-085E-4340-85A3-A5531E510DB2}">
+      <thm15:themeFamily xmlns:thm15="http://schemas.microsoft.com/office/thememl/2012/main" name="Office Theme" id="{2E142A2C-CD16-42D6-873A-C26D2A0506FA}" vid="{1BDDFF52-6CD6-40A5-AB3C-68EB2F1E4D0A}"/>
+    </a:ext>
+  </a:extLst>
 </a:theme>
+</file>
+
+<file path=docMetadata/LabelInfo.xml><?xml version="1.0" encoding="utf-8"?>
+<clbl:labelList xmlns:clbl="http://schemas.microsoft.com/office/2020/mipLabelMetadata">
+  <clbl:label id="{f42aa342-8706-4288-bd11-ebb85995028c}" enabled="1" method="Standard" siteId="{72f988bf-86f1-41af-91ab-2d7cd011db47}" removed="0"/>
+</clbl:labelList>
 </file>
--- a/docs/prezentacija/Prezentacija-odbrana.pptx
+++ b/docs/prezentacija/Prezentacija-odbrana.pptx
@@ -129,7 +129,7 @@
   <pc:docChgLst>
     <pc:chgData name="Dunja Jankovic" userId="5a4e960c-bd51-42d1-9434-6bdfc1ce4c9a" providerId="ADAL" clId="{05A0F1E5-139C-4B9A-BACE-2909464F74E5}"/>
     <pc:docChg chg="custSel modSld">
-      <pc:chgData name="Dunja Jankovic" userId="5a4e960c-bd51-42d1-9434-6bdfc1ce4c9a" providerId="ADAL" clId="{05A0F1E5-139C-4B9A-BACE-2909464F74E5}" dt="2026-09-29T20:31:07.774" v="86" actId="20577"/>
+      <pc:chgData name="Dunja Jankovic" userId="5a4e960c-bd51-42d1-9434-6bdfc1ce4c9a" providerId="ADAL" clId="{05A0F1E5-139C-4B9A-BACE-2909464F74E5}" dt="2026-09-29T20:55:33.932" v="153" actId="1076"/>
       <pc:docMkLst>
         <pc:docMk/>
       </pc:docMkLst>
@@ -149,13 +149,132 @@
         </pc:spChg>
       </pc:sldChg>
       <pc:sldChg chg="modSp mod">
-        <pc:chgData name="Dunja Jankovic" userId="5a4e960c-bd51-42d1-9434-6bdfc1ce4c9a" providerId="ADAL" clId="{05A0F1E5-139C-4B9A-BACE-2909464F74E5}" dt="2026-09-29T20:27:21.912" v="36" actId="20577"/>
+        <pc:chgData name="Dunja Jankovic" userId="5a4e960c-bd51-42d1-9434-6bdfc1ce4c9a" providerId="ADAL" clId="{05A0F1E5-139C-4B9A-BACE-2909464F74E5}" dt="2026-09-29T20:51:41.690" v="139" actId="14100"/>
+        <pc:sldMkLst>
+          <pc:docMk/>
+          <pc:sldMk cId="1787984834" sldId="258"/>
+        </pc:sldMkLst>
+        <pc:spChg chg="mod">
+          <ac:chgData name="Dunja Jankovic" userId="5a4e960c-bd51-42d1-9434-6bdfc1ce4c9a" providerId="ADAL" clId="{05A0F1E5-139C-4B9A-BACE-2909464F74E5}" dt="2026-09-29T20:51:33.417" v="137" actId="20577"/>
+          <ac:spMkLst>
+            <pc:docMk/>
+            <pc:sldMk cId="1787984834" sldId="258"/>
+            <ac:spMk id="2" creationId="{0DD6507F-684E-4CD6-8514-BEC980F73A48}"/>
+          </ac:spMkLst>
+        </pc:spChg>
+        <pc:spChg chg="mod">
+          <ac:chgData name="Dunja Jankovic" userId="5a4e960c-bd51-42d1-9434-6bdfc1ce4c9a" providerId="ADAL" clId="{05A0F1E5-139C-4B9A-BACE-2909464F74E5}" dt="2026-09-29T20:51:41.690" v="139" actId="14100"/>
+          <ac:spMkLst>
+            <pc:docMk/>
+            <pc:sldMk cId="1787984834" sldId="258"/>
+            <ac:spMk id="3" creationId="{48B32EDC-9286-4C15-A99C-6D759C56D29D}"/>
+          </ac:spMkLst>
+        </pc:spChg>
+      </pc:sldChg>
+      <pc:sldChg chg="delSp modSp mod">
+        <pc:chgData name="Dunja Jankovic" userId="5a4e960c-bd51-42d1-9434-6bdfc1ce4c9a" providerId="ADAL" clId="{05A0F1E5-139C-4B9A-BACE-2909464F74E5}" dt="2026-09-29T20:53:30.178" v="150" actId="20577"/>
         <pc:sldMkLst>
           <pc:docMk/>
           <pc:sldMk cId="0" sldId="259"/>
         </pc:sldMkLst>
         <pc:spChg chg="mod">
-          <ac:chgData name="Dunja Jankovic" userId="5a4e960c-bd51-42d1-9434-6bdfc1ce4c9a" providerId="ADAL" clId="{05A0F1E5-139C-4B9A-BACE-2909464F74E5}" dt="2026-09-29T20:27:21.912" v="36" actId="20577"/>
+          <ac:chgData name="Dunja Jankovic" userId="5a4e960c-bd51-42d1-9434-6bdfc1ce4c9a" providerId="ADAL" clId="{05A0F1E5-139C-4B9A-BACE-2909464F74E5}" dt="2026-09-29T20:53:30.178" v="150" actId="20577"/>
+          <ac:spMkLst>
+            <pc:docMk/>
+            <pc:sldMk cId="0" sldId="259"/>
+            <ac:spMk id="2" creationId="{00000000-0000-0000-0000-000000000000}"/>
+          </ac:spMkLst>
+        </pc:spChg>
+        <pc:spChg chg="mod">
+          <ac:chgData name="Dunja Jankovic" userId="5a4e960c-bd51-42d1-9434-6bdfc1ce4c9a" providerId="ADAL" clId="{05A0F1E5-139C-4B9A-BACE-2909464F74E5}" dt="2026-09-29T20:52:52.872" v="142" actId="1076"/>
+          <ac:spMkLst>
+            <pc:docMk/>
+            <pc:sldMk cId="0" sldId="259"/>
+            <ac:spMk id="4" creationId="{00000000-0000-0000-0000-000000000000}"/>
+          </ac:spMkLst>
+        </pc:spChg>
+        <pc:spChg chg="mod">
+          <ac:chgData name="Dunja Jankovic" userId="5a4e960c-bd51-42d1-9434-6bdfc1ce4c9a" providerId="ADAL" clId="{05A0F1E5-139C-4B9A-BACE-2909464F74E5}" dt="2026-09-29T20:52:52.872" v="142" actId="1076"/>
+          <ac:spMkLst>
+            <pc:docMk/>
+            <pc:sldMk cId="0" sldId="259"/>
+            <ac:spMk id="5" creationId="{00000000-0000-0000-0000-000000000000}"/>
+          </ac:spMkLst>
+        </pc:spChg>
+        <pc:spChg chg="mod">
+          <ac:chgData name="Dunja Jankovic" userId="5a4e960c-bd51-42d1-9434-6bdfc1ce4c9a" providerId="ADAL" clId="{05A0F1E5-139C-4B9A-BACE-2909464F74E5}" dt="2026-09-29T20:52:52.872" v="142" actId="1076"/>
+          <ac:spMkLst>
+            <pc:docMk/>
+            <pc:sldMk cId="0" sldId="259"/>
+            <ac:spMk id="6" creationId="{00000000-0000-0000-0000-000000000000}"/>
+          </ac:spMkLst>
+        </pc:spChg>
+        <pc:spChg chg="mod">
+          <ac:chgData name="Dunja Jankovic" userId="5a4e960c-bd51-42d1-9434-6bdfc1ce4c9a" providerId="ADAL" clId="{05A0F1E5-139C-4B9A-BACE-2909464F74E5}" dt="2026-09-29T20:52:52.872" v="142" actId="1076"/>
+          <ac:spMkLst>
+            <pc:docMk/>
+            <pc:sldMk cId="0" sldId="259"/>
+            <ac:spMk id="7" creationId="{00000000-0000-0000-0000-000000000000}"/>
+          </ac:spMkLst>
+        </pc:spChg>
+        <pc:spChg chg="mod">
+          <ac:chgData name="Dunja Jankovic" userId="5a4e960c-bd51-42d1-9434-6bdfc1ce4c9a" providerId="ADAL" clId="{05A0F1E5-139C-4B9A-BACE-2909464F74E5}" dt="2026-09-29T20:52:52.872" v="142" actId="1076"/>
+          <ac:spMkLst>
+            <pc:docMk/>
+            <pc:sldMk cId="0" sldId="259"/>
+            <ac:spMk id="8" creationId="{00000000-0000-0000-0000-000000000000}"/>
+          </ac:spMkLst>
+        </pc:spChg>
+        <pc:spChg chg="mod">
+          <ac:chgData name="Dunja Jankovic" userId="5a4e960c-bd51-42d1-9434-6bdfc1ce4c9a" providerId="ADAL" clId="{05A0F1E5-139C-4B9A-BACE-2909464F74E5}" dt="2026-09-29T20:52:52.872" v="142" actId="1076"/>
+          <ac:spMkLst>
+            <pc:docMk/>
+            <pc:sldMk cId="0" sldId="259"/>
+            <ac:spMk id="9" creationId="{00000000-0000-0000-0000-000000000000}"/>
+          </ac:spMkLst>
+        </pc:spChg>
+        <pc:spChg chg="mod">
+          <ac:chgData name="Dunja Jankovic" userId="5a4e960c-bd51-42d1-9434-6bdfc1ce4c9a" providerId="ADAL" clId="{05A0F1E5-139C-4B9A-BACE-2909464F74E5}" dt="2026-09-29T20:52:52.872" v="142" actId="1076"/>
+          <ac:spMkLst>
+            <pc:docMk/>
+            <pc:sldMk cId="0" sldId="259"/>
+            <ac:spMk id="10" creationId="{00000000-0000-0000-0000-000000000000}"/>
+          </ac:spMkLst>
+        </pc:spChg>
+        <pc:spChg chg="mod">
+          <ac:chgData name="Dunja Jankovic" userId="5a4e960c-bd51-42d1-9434-6bdfc1ce4c9a" providerId="ADAL" clId="{05A0F1E5-139C-4B9A-BACE-2909464F74E5}" dt="2026-09-29T20:52:52.872" v="142" actId="1076"/>
+          <ac:spMkLst>
+            <pc:docMk/>
+            <pc:sldMk cId="0" sldId="259"/>
+            <ac:spMk id="11" creationId="{00000000-0000-0000-0000-000000000000}"/>
+          </ac:spMkLst>
+        </pc:spChg>
+        <pc:spChg chg="mod">
+          <ac:chgData name="Dunja Jankovic" userId="5a4e960c-bd51-42d1-9434-6bdfc1ce4c9a" providerId="ADAL" clId="{05A0F1E5-139C-4B9A-BACE-2909464F74E5}" dt="2026-09-29T20:52:52.872" v="142" actId="1076"/>
+          <ac:spMkLst>
+            <pc:docMk/>
+            <pc:sldMk cId="0" sldId="259"/>
+            <ac:spMk id="12" creationId="{00000000-0000-0000-0000-000000000000}"/>
+          </ac:spMkLst>
+        </pc:spChg>
+        <pc:spChg chg="mod">
+          <ac:chgData name="Dunja Jankovic" userId="5a4e960c-bd51-42d1-9434-6bdfc1ce4c9a" providerId="ADAL" clId="{05A0F1E5-139C-4B9A-BACE-2909464F74E5}" dt="2026-09-29T20:52:52.872" v="142" actId="1076"/>
+          <ac:spMkLst>
+            <pc:docMk/>
+            <pc:sldMk cId="0" sldId="259"/>
+            <ac:spMk id="13" creationId="{00000000-0000-0000-0000-000000000000}"/>
+          </ac:spMkLst>
+        </pc:spChg>
+        <pc:spChg chg="del">
+          <ac:chgData name="Dunja Jankovic" userId="5a4e960c-bd51-42d1-9434-6bdfc1ce4c9a" providerId="ADAL" clId="{05A0F1E5-139C-4B9A-BACE-2909464F74E5}" dt="2026-09-29T20:52:40.474" v="141" actId="21"/>
+          <ac:spMkLst>
+            <pc:docMk/>
+            <pc:sldMk cId="0" sldId="259"/>
+            <ac:spMk id="14" creationId="{00000000-0000-0000-0000-000000000000}"/>
+          </ac:spMkLst>
+        </pc:spChg>
+        <pc:spChg chg="del mod">
+          <ac:chgData name="Dunja Jankovic" userId="5a4e960c-bd51-42d1-9434-6bdfc1ce4c9a" providerId="ADAL" clId="{05A0F1E5-139C-4B9A-BACE-2909464F74E5}" dt="2026-09-29T20:52:37.249" v="140" actId="21"/>
           <ac:spMkLst>
             <pc:docMk/>
             <pc:sldMk cId="0" sldId="259"/>
@@ -229,6 +348,85 @@
             <pc:docMk/>
             <pc:sldMk cId="0" sldId="265"/>
             <ac:spMk id="2" creationId="{00000000-0000-0000-0000-000000000000}"/>
+          </ac:spMkLst>
+        </pc:spChg>
+      </pc:sldChg>
+      <pc:sldChg chg="delSp modSp mod">
+        <pc:chgData name="Dunja Jankovic" userId="5a4e960c-bd51-42d1-9434-6bdfc1ce4c9a" providerId="ADAL" clId="{05A0F1E5-139C-4B9A-BACE-2909464F74E5}" dt="2026-09-29T20:55:33.932" v="153" actId="1076"/>
+        <pc:sldMkLst>
+          <pc:docMk/>
+          <pc:sldMk cId="0" sldId="266"/>
+        </pc:sldMkLst>
+        <pc:spChg chg="mod">
+          <ac:chgData name="Dunja Jankovic" userId="5a4e960c-bd51-42d1-9434-6bdfc1ce4c9a" providerId="ADAL" clId="{05A0F1E5-139C-4B9A-BACE-2909464F74E5}" dt="2026-09-29T20:50:43.620" v="128" actId="20577"/>
+          <ac:spMkLst>
+            <pc:docMk/>
+            <pc:sldMk cId="0" sldId="266"/>
+            <ac:spMk id="2" creationId="{00000000-0000-0000-0000-000000000000}"/>
+          </ac:spMkLst>
+        </pc:spChg>
+        <pc:spChg chg="mod">
+          <ac:chgData name="Dunja Jankovic" userId="5a4e960c-bd51-42d1-9434-6bdfc1ce4c9a" providerId="ADAL" clId="{05A0F1E5-139C-4B9A-BACE-2909464F74E5}" dt="2026-09-29T20:55:33.932" v="153" actId="1076"/>
+          <ac:spMkLst>
+            <pc:docMk/>
+            <pc:sldMk cId="0" sldId="266"/>
+            <ac:spMk id="4" creationId="{00000000-0000-0000-0000-000000000000}"/>
+          </ac:spMkLst>
+        </pc:spChg>
+        <pc:spChg chg="mod">
+          <ac:chgData name="Dunja Jankovic" userId="5a4e960c-bd51-42d1-9434-6bdfc1ce4c9a" providerId="ADAL" clId="{05A0F1E5-139C-4B9A-BACE-2909464F74E5}" dt="2026-09-29T20:55:33.932" v="153" actId="1076"/>
+          <ac:spMkLst>
+            <pc:docMk/>
+            <pc:sldMk cId="0" sldId="266"/>
+            <ac:spMk id="5" creationId="{00000000-0000-0000-0000-000000000000}"/>
+          </ac:spMkLst>
+        </pc:spChg>
+        <pc:spChg chg="mod">
+          <ac:chgData name="Dunja Jankovic" userId="5a4e960c-bd51-42d1-9434-6bdfc1ce4c9a" providerId="ADAL" clId="{05A0F1E5-139C-4B9A-BACE-2909464F74E5}" dt="2026-09-29T20:55:33.932" v="153" actId="1076"/>
+          <ac:spMkLst>
+            <pc:docMk/>
+            <pc:sldMk cId="0" sldId="266"/>
+            <ac:spMk id="6" creationId="{00000000-0000-0000-0000-000000000000}"/>
+          </ac:spMkLst>
+        </pc:spChg>
+        <pc:spChg chg="mod">
+          <ac:chgData name="Dunja Jankovic" userId="5a4e960c-bd51-42d1-9434-6bdfc1ce4c9a" providerId="ADAL" clId="{05A0F1E5-139C-4B9A-BACE-2909464F74E5}" dt="2026-09-29T20:55:33.932" v="153" actId="1076"/>
+          <ac:spMkLst>
+            <pc:docMk/>
+            <pc:sldMk cId="0" sldId="266"/>
+            <ac:spMk id="7" creationId="{00000000-0000-0000-0000-000000000000}"/>
+          </ac:spMkLst>
+        </pc:spChg>
+        <pc:spChg chg="mod">
+          <ac:chgData name="Dunja Jankovic" userId="5a4e960c-bd51-42d1-9434-6bdfc1ce4c9a" providerId="ADAL" clId="{05A0F1E5-139C-4B9A-BACE-2909464F74E5}" dt="2026-09-29T20:55:33.932" v="153" actId="1076"/>
+          <ac:spMkLst>
+            <pc:docMk/>
+            <pc:sldMk cId="0" sldId="266"/>
+            <ac:spMk id="8" creationId="{00000000-0000-0000-0000-000000000000}"/>
+          </ac:spMkLst>
+        </pc:spChg>
+        <pc:spChg chg="mod">
+          <ac:chgData name="Dunja Jankovic" userId="5a4e960c-bd51-42d1-9434-6bdfc1ce4c9a" providerId="ADAL" clId="{05A0F1E5-139C-4B9A-BACE-2909464F74E5}" dt="2026-09-29T20:55:33.932" v="153" actId="1076"/>
+          <ac:spMkLst>
+            <pc:docMk/>
+            <pc:sldMk cId="0" sldId="266"/>
+            <ac:spMk id="9" creationId="{00000000-0000-0000-0000-000000000000}"/>
+          </ac:spMkLst>
+        </pc:spChg>
+        <pc:spChg chg="del">
+          <ac:chgData name="Dunja Jankovic" userId="5a4e960c-bd51-42d1-9434-6bdfc1ce4c9a" providerId="ADAL" clId="{05A0F1E5-139C-4B9A-BACE-2909464F74E5}" dt="2026-09-29T20:55:20.549" v="152" actId="21"/>
+          <ac:spMkLst>
+            <pc:docMk/>
+            <pc:sldMk cId="0" sldId="266"/>
+            <ac:spMk id="10" creationId="{00000000-0000-0000-0000-000000000000}"/>
+          </ac:spMkLst>
+        </pc:spChg>
+        <pc:spChg chg="del">
+          <ac:chgData name="Dunja Jankovic" userId="5a4e960c-bd51-42d1-9434-6bdfc1ce4c9a" providerId="ADAL" clId="{05A0F1E5-139C-4B9A-BACE-2909464F74E5}" dt="2026-09-29T20:55:18.133" v="151" actId="21"/>
+          <ac:spMkLst>
+            <pc:docMk/>
+            <pc:sldMk cId="0" sldId="266"/>
+            <ac:spMk id="11" creationId="{00000000-0000-0000-0000-000000000000}"/>
           </ac:spMkLst>
         </pc:spChg>
       </pc:sldChg>
@@ -8095,13 +8293,22 @@
               <a:buNone/>
             </a:pPr>
             <a:r>
-              <a:rPr lang="sr-Latn-RS" sz="4400" b="0" i="0">
+              <a:rPr lang="sr-Latn-RS" sz="4400" b="0" i="0" dirty="0">
                 <a:solidFill>
                   <a:srgbClr val="212121"/>
                 </a:solidFill>
                 <a:latin typeface="Garamond"/>
               </a:rPr>
               <a:t>Pitanja</a:t>
+            </a:r>
+            <a:r>
+              <a:rPr lang="en-US" sz="4400" b="0" i="0" dirty="0">
+                <a:solidFill>
+                  <a:srgbClr val="212121"/>
+                </a:solidFill>
+                <a:latin typeface="Garamond"/>
+              </a:rPr>
+              <a:t>?</a:t>
             </a:r>
             <a:endParaRPr lang="en-GB" dirty="0"/>
           </a:p>
@@ -8126,7 +8333,7 @@
         <p:spPr>
           <a:xfrm>
             <a:off x="1295401" y="2935224"/>
-            <a:ext cx="9601196" cy="1170432"/>
+            <a:ext cx="9601196" cy="1787778"/>
           </a:xfrm>
         </p:spPr>
         <p:txBody>
@@ -8148,13 +8355,42 @@
               <a:buNone/>
             </a:pPr>
             <a:r>
-              <a:rPr lang="sr-Latn-RS" sz="4400" b="0" i="0">
+              <a:rPr lang="sr-Latn-RS" sz="4400" b="0" i="0" dirty="0">
                 <a:solidFill>
                   <a:srgbClr val="212121"/>
                 </a:solidFill>
                 <a:latin typeface="Garamond"/>
               </a:rPr>
-              <a:t>Hvala na pažnji!</a:t>
+              <a:t>Hvala na pažnji </a:t>
+            </a:r>
+            <a:endParaRPr lang="en-US" sz="4400" b="0" i="0" dirty="0">
+              <a:solidFill>
+                <a:srgbClr val="212121"/>
+              </a:solidFill>
+              <a:latin typeface="Garamond"/>
+            </a:endParaRPr>
+          </a:p>
+          <a:p>
+            <a:pPr algn="ctr">
+              <a:lnSpc>
+                <a:spcPct val="100000"/>
+              </a:lnSpc>
+              <a:spcBef>
+                <a:spcPts val="0"/>
+              </a:spcBef>
+              <a:spcAft>
+                <a:spcPts val="0"/>
+              </a:spcAft>
+              <a:buNone/>
+            </a:pPr>
+            <a:r>
+              <a:rPr lang="en-US" sz="4400" b="0" i="0" dirty="0">
+                <a:solidFill>
+                  <a:srgbClr val="212121"/>
+                </a:solidFill>
+                <a:latin typeface="Garamond"/>
+              </a:rPr>
+              <a:t>&lt;3</a:t>
             </a:r>
             <a:endParaRPr lang="en-GB" dirty="0"/>
           </a:p>
@@ -8225,13 +8461,13 @@
               <a:buNone/>
             </a:pPr>
             <a:r>
-              <a:rPr lang="sr-Latn-RS" sz="4200" b="0" i="0">
+              <a:rPr lang="sr-Latn-RS" sz="4200" b="0" i="0" dirty="0">
                 <a:solidFill>
                   <a:srgbClr val="212121"/>
                 </a:solidFill>
                 <a:latin typeface="Garamond"/>
               </a:rPr>
-              <a:t>Šta zapravo znači naslov rada?</a:t>
+              <a:t>Šta znači naslov rada?</a:t>
             </a:r>
           </a:p>
         </p:txBody>
@@ -8275,7 +8511,7 @@
         </p:nvSpPr>
         <p:spPr>
           <a:xfrm>
-            <a:off x="1389888" y="2075688"/>
+            <a:off x="1399032" y="2276855"/>
             <a:ext cx="3054096" cy="502920"/>
           </a:xfrm>
           <a:prstGeom prst="rect">
@@ -8321,7 +8557,7 @@
         </p:nvSpPr>
         <p:spPr>
           <a:xfrm>
-            <a:off x="4590288" y="2075688"/>
+            <a:off x="4599432" y="2276855"/>
             <a:ext cx="6217920" cy="502920"/>
           </a:xfrm>
           <a:prstGeom prst="rect">
@@ -8367,7 +8603,7 @@
         </p:nvSpPr>
         <p:spPr>
           <a:xfrm>
-            <a:off x="1389888" y="2624328"/>
+            <a:off x="1399032" y="2825495"/>
             <a:ext cx="3054096" cy="822960"/>
           </a:xfrm>
           <a:prstGeom prst="rect">
@@ -8413,7 +8649,7 @@
         </p:nvSpPr>
         <p:spPr>
           <a:xfrm>
-            <a:off x="4590288" y="2624328"/>
+            <a:off x="4599432" y="2825495"/>
             <a:ext cx="6217920" cy="822960"/>
           </a:xfrm>
           <a:prstGeom prst="rect">
@@ -8482,7 +8718,7 @@
         </p:nvSpPr>
         <p:spPr>
           <a:xfrm>
-            <a:off x="1389888" y="3493008"/>
+            <a:off x="1399032" y="3694175"/>
             <a:ext cx="3054096" cy="502920"/>
           </a:xfrm>
           <a:prstGeom prst="rect">
@@ -8528,7 +8764,7 @@
         </p:nvSpPr>
         <p:spPr>
           <a:xfrm>
-            <a:off x="4590288" y="3493008"/>
+            <a:off x="4599432" y="3694175"/>
             <a:ext cx="6217920" cy="502920"/>
           </a:xfrm>
           <a:prstGeom prst="rect">
@@ -8574,7 +8810,7 @@
         </p:nvSpPr>
         <p:spPr>
           <a:xfrm>
-            <a:off x="1389888" y="4041648"/>
+            <a:off x="1399032" y="4242815"/>
             <a:ext cx="3054096" cy="502920"/>
           </a:xfrm>
           <a:prstGeom prst="rect">
@@ -8620,7 +8856,7 @@
         </p:nvSpPr>
         <p:spPr>
           <a:xfrm>
-            <a:off x="4590288" y="4041648"/>
+            <a:off x="4599432" y="4242815"/>
             <a:ext cx="6217920" cy="502920"/>
           </a:xfrm>
           <a:prstGeom prst="rect">
@@ -8666,7 +8902,7 @@
         </p:nvSpPr>
         <p:spPr>
           <a:xfrm>
-            <a:off x="1389888" y="4590288"/>
+            <a:off x="1399032" y="4791455"/>
             <a:ext cx="3054096" cy="502920"/>
           </a:xfrm>
           <a:prstGeom prst="rect">
@@ -8712,7 +8948,7 @@
         </p:nvSpPr>
         <p:spPr>
           <a:xfrm>
-            <a:off x="4590288" y="4590288"/>
+            <a:off x="4599432" y="4791455"/>
             <a:ext cx="6217920" cy="502920"/>
           </a:xfrm>
           <a:prstGeom prst="rect">
@@ -8746,116 +8982,6 @@
                 <a:latin typeface="Garamond"/>
               </a:rPr>
               <a:t>Korisnik izvršava korake i prati promene.</a:t>
-            </a:r>
-          </a:p>
-        </p:txBody>
-      </p:sp>
-      <p:sp>
-        <p:nvSpPr>
-          <p:cNvPr id="14" name="Rectangle 13"/>
-          <p:cNvSpPr/>
-          <p:nvPr/>
-        </p:nvSpPr>
-        <p:spPr>
-          <a:xfrm>
-            <a:off x="1325880" y="5175504"/>
-            <a:ext cx="9537192" cy="768096"/>
-          </a:xfrm>
-          <a:prstGeom prst="rect">
-            <a:avLst/>
-          </a:prstGeom>
-          <a:solidFill>
-            <a:srgbClr val="F3F5EA"/>
-          </a:solidFill>
-          <a:ln w="12700">
-            <a:solidFill>
-              <a:srgbClr val="83992A"/>
-            </a:solidFill>
-          </a:ln>
-        </p:spPr>
-        <p:style>
-          <a:lnRef idx="1">
-            <a:schemeClr val="accent1"/>
-          </a:lnRef>
-          <a:fillRef idx="3">
-            <a:schemeClr val="accent1"/>
-          </a:fillRef>
-          <a:effectRef idx="2">
-            <a:schemeClr val="accent1"/>
-          </a:effectRef>
-          <a:fontRef idx="minor">
-            <a:schemeClr val="lt1"/>
-          </a:fontRef>
-        </p:style>
-        <p:txBody>
-          <a:bodyPr rtlCol="0" anchor="ctr"/>
-          <a:lstStyle/>
-          <a:p>
-            <a:pPr algn="ctr"/>
-            <a:endParaRPr/>
-          </a:p>
-        </p:txBody>
-      </p:sp>
-      <p:sp>
-        <p:nvSpPr>
-          <p:cNvPr id="15" name="TextBox 14"/>
-          <p:cNvSpPr txBox="1"/>
-          <p:nvPr/>
-        </p:nvSpPr>
-        <p:spPr>
-          <a:xfrm>
-            <a:off x="1444752" y="5193792"/>
-            <a:ext cx="9299448" cy="731519"/>
-          </a:xfrm>
-          <a:prstGeom prst="rect">
-            <a:avLst/>
-          </a:prstGeom>
-          <a:noFill/>
-        </p:spPr>
-        <p:txBody>
-          <a:bodyPr wrap="square" lIns="27432" tIns="0" rIns="27432" bIns="0" anchor="ctr">
-            <a:noAutofit/>
-          </a:bodyPr>
-          <a:lstStyle/>
-          <a:p>
-            <a:pPr algn="ctr">
-              <a:lnSpc>
-                <a:spcPct val="100000"/>
-              </a:lnSpc>
-              <a:spcBef>
-                <a:spcPts val="0"/>
-              </a:spcBef>
-              <a:spcAft>
-                <a:spcPts val="0"/>
-              </a:spcAft>
-              <a:buNone/>
-            </a:pPr>
-            <a:r>
-              <a:rPr lang="sr-Latn-RS" sz="2400" b="1" i="0" dirty="0">
-                <a:solidFill>
-                  <a:srgbClr val="212121"/>
-                </a:solidFill>
-                <a:latin typeface="Garamond"/>
-              </a:rPr>
-              <a:t>Napišemo mali program i pratimo</a:t>
-            </a:r>
-            <a:r>
-              <a:rPr lang="en-US" sz="2400" b="1" dirty="0">
-                <a:solidFill>
-                  <a:srgbClr val="212121"/>
-                </a:solidFill>
-                <a:latin typeface="Garamond"/>
-              </a:rPr>
-              <a:t> </a:t>
-            </a:r>
-            <a:r>
-              <a:rPr lang="sr-Latn-RS" sz="2400" b="1" i="0" dirty="0">
-                <a:solidFill>
-                  <a:srgbClr val="212121"/>
-                </a:solidFill>
-                <a:latin typeface="Garamond"/>
-              </a:rPr>
-              <a:t>kako se izvršava, korak po korak.</a:t>
             </a:r>
           </a:p>
         </p:txBody>
@@ -12700,14 +12826,29 @@
               <a:buNone/>
             </a:pPr>
             <a:r>
-              <a:rPr lang="sr-Latn-RS" sz="4200" b="0" i="0">
+              <a:rPr lang="en-US" sz="4200" b="0" i="0" dirty="0" err="1">
                 <a:solidFill>
                   <a:srgbClr val="212121"/>
                 </a:solidFill>
                 <a:latin typeface="Garamond"/>
               </a:rPr>
-              <a:t>Šta je ostvareno i šta dalje?</a:t>
-            </a:r>
+              <a:t>Zaklju</a:t>
+            </a:r>
+            <a:r>
+              <a:rPr lang="sr-Latn-RS" sz="4200" dirty="0">
+                <a:solidFill>
+                  <a:srgbClr val="212121"/>
+                </a:solidFill>
+                <a:latin typeface="Garamond"/>
+              </a:rPr>
+              <a:t>čak</a:t>
+            </a:r>
+            <a:endParaRPr lang="sr-Latn-RS" sz="4200" b="0" i="0" dirty="0">
+              <a:solidFill>
+                <a:srgbClr val="212121"/>
+              </a:solidFill>
+              <a:latin typeface="Garamond"/>
+            </a:endParaRPr>
           </a:p>
         </p:txBody>
       </p:sp>
@@ -12750,7 +12891,7 @@
         </p:nvSpPr>
         <p:spPr>
           <a:xfrm>
-            <a:off x="1536192" y="2249424"/>
+            <a:off x="1552970" y="2487168"/>
             <a:ext cx="2267712" cy="667512"/>
           </a:xfrm>
           <a:prstGeom prst="rect">
@@ -12796,7 +12937,7 @@
         </p:nvSpPr>
         <p:spPr>
           <a:xfrm>
-            <a:off x="3968496" y="2249424"/>
+            <a:off x="3985274" y="2487168"/>
             <a:ext cx="6638544" cy="914400"/>
           </a:xfrm>
           <a:prstGeom prst="rect">
@@ -12842,7 +12983,7 @@
         </p:nvSpPr>
         <p:spPr>
           <a:xfrm>
-            <a:off x="1536192" y="3218688"/>
+            <a:off x="1552970" y="3456432"/>
             <a:ext cx="2267712" cy="667512"/>
           </a:xfrm>
           <a:prstGeom prst="rect">
@@ -12888,7 +13029,7 @@
         </p:nvSpPr>
         <p:spPr>
           <a:xfrm>
-            <a:off x="3968496" y="3218688"/>
+            <a:off x="3985274" y="3456432"/>
             <a:ext cx="6638544" cy="914400"/>
           </a:xfrm>
           <a:prstGeom prst="rect">
@@ -12934,7 +13075,7 @@
         </p:nvSpPr>
         <p:spPr>
           <a:xfrm>
-            <a:off x="1536192" y="4187952"/>
+            <a:off x="1552970" y="4425696"/>
             <a:ext cx="2267712" cy="667512"/>
           </a:xfrm>
           <a:prstGeom prst="rect">
@@ -12980,7 +13121,7 @@
         </p:nvSpPr>
         <p:spPr>
           <a:xfrm>
-            <a:off x="3968496" y="4187952"/>
+            <a:off x="3985274" y="4425696"/>
             <a:ext cx="6638544" cy="914400"/>
           </a:xfrm>
           <a:prstGeom prst="rect">
@@ -13037,98 +13178,6 @@
                 <a:latin typeface="Garamond"/>
               </a:rPr>
               <a:t>vraćanje jednog koraka</a:t>
-            </a:r>
-          </a:p>
-        </p:txBody>
-      </p:sp>
-      <p:sp>
-        <p:nvSpPr>
-          <p:cNvPr id="10" name="Rectangle 9"/>
-          <p:cNvSpPr/>
-          <p:nvPr/>
-        </p:nvSpPr>
-        <p:spPr>
-          <a:xfrm>
-            <a:off x="1325880" y="5367528"/>
-            <a:ext cx="9537192" cy="448056"/>
-          </a:xfrm>
-          <a:prstGeom prst="rect">
-            <a:avLst/>
-          </a:prstGeom>
-          <a:solidFill>
-            <a:srgbClr val="F3F5EA"/>
-          </a:solidFill>
-          <a:ln w="12700">
-            <a:solidFill>
-              <a:srgbClr val="83992A"/>
-            </a:solidFill>
-          </a:ln>
-        </p:spPr>
-        <p:style>
-          <a:lnRef idx="1">
-            <a:schemeClr val="accent1"/>
-          </a:lnRef>
-          <a:fillRef idx="3">
-            <a:schemeClr val="accent1"/>
-          </a:fillRef>
-          <a:effectRef idx="2">
-            <a:schemeClr val="accent1"/>
-          </a:effectRef>
-          <a:fontRef idx="minor">
-            <a:schemeClr val="lt1"/>
-          </a:fontRef>
-        </p:style>
-        <p:txBody>
-          <a:bodyPr rtlCol="0" anchor="ctr"/>
-          <a:lstStyle/>
-          <a:p>
-            <a:pPr algn="ctr"/>
-            <a:endParaRPr/>
-          </a:p>
-        </p:txBody>
-      </p:sp>
-      <p:sp>
-        <p:nvSpPr>
-          <p:cNvPr id="11" name="TextBox 10"/>
-          <p:cNvSpPr txBox="1"/>
-          <p:nvPr/>
-        </p:nvSpPr>
-        <p:spPr>
-          <a:xfrm>
-            <a:off x="1444752" y="5385816"/>
-            <a:ext cx="9299448" cy="411480"/>
-          </a:xfrm>
-          <a:prstGeom prst="rect">
-            <a:avLst/>
-          </a:prstGeom>
-          <a:noFill/>
-        </p:spPr>
-        <p:txBody>
-          <a:bodyPr wrap="square" lIns="27432" tIns="0" rIns="27432" bIns="0" anchor="ctr">
-            <a:noAutofit/>
-          </a:bodyPr>
-          <a:lstStyle/>
-          <a:p>
-            <a:pPr algn="ctr">
-              <a:lnSpc>
-                <a:spcPct val="100000"/>
-              </a:lnSpc>
-              <a:spcBef>
-                <a:spcPts val="0"/>
-              </a:spcBef>
-              <a:spcAft>
-                <a:spcPts val="0"/>
-              </a:spcAft>
-              <a:buNone/>
-            </a:pPr>
-            <a:r>
-              <a:rPr lang="sr-Latn-RS" sz="2600" b="1" i="0">
-                <a:solidFill>
-                  <a:srgbClr val="212121"/>
-                </a:solidFill>
-                <a:latin typeface="Garamond"/>
-              </a:rPr>
-              <a:t>Od napisanog programa do vidljivog rezultata.</a:t>
             </a:r>
           </a:p>
         </p:txBody>
